--- a/presentation/Amba_Travel_AI.pptx
+++ b/presentation/Amba_Travel_AI.pptx
@@ -121,18 +121,18 @@
   <p:extLst>
     <p:ext uri="{521415D9-36F7-43E2-AB2F-B90AF26B5E84}">
       <p14:sectionLst xmlns:p14="http://schemas.microsoft.com/office/powerpoint/2010/main">
-        <p14:section name="Начало" id="{256f4936-9434-d83a-02b3-ec4bac4fda0c}">
+        <p14:section name="Начало" id="{19ff1243-ed7a-812e-75c9-1041f6816633}">
           <p14:sldIdLst>
             <p14:sldId id="256"/>
           </p14:sldIdLst>
         </p14:section>
-        <p14:section name="Задача" id="{46912dee-799b-9018-8e8f-38b341a8caa2}">
+        <p14:section name="Задача" id="{d7defa1a-5c26-224d-f83e-3188c6ec6a67}">
           <p14:sldIdLst>
             <p14:sldId id="257"/>
             <p14:sldId id="258"/>
           </p14:sldIdLst>
         </p14:section>
-        <p14:section name="Решение" id="{6660558d-7773-f324-9dd3-f1ec9d6777e8}">
+        <p14:section name="Решение" id="{116757dc-313b-a7b9-632a-4896286fea09}">
           <p14:sldIdLst>
             <p14:sldId id="259"/>
             <p14:sldId id="260"/>
@@ -142,19 +142,19 @@
             <p14:sldId id="264"/>
           </p14:sldIdLst>
         </p14:section>
-        <p14:section name="Замеры" id="{5b6c4905-1b3d-b394-3556-b37e8b73964c}">
+        <p14:section name="Замеры" id="{961554c5-61f0-2715-9dd3-70a801617162}">
           <p14:sldIdLst>
             <p14:sldId id="265"/>
             <p14:sldId id="266"/>
             <p14:sldId id="267"/>
           </p14:sldIdLst>
         </p14:section>
-        <p14:section name="Команда" id="{1f99f570-9739-1ff2-d701-5307f593f991}">
+        <p14:section name="Команда" id="{0ac60ffc-1ab5-57bb-10c0-4a63167e7931}">
           <p14:sldIdLst>
             <p14:sldId id="268"/>
           </p14:sldIdLst>
         </p14:section>
-        <p14:section name="Итоги" id="{51861b35-41c8-1057-b55b-87c6daf652aa}">
+        <p14:section name="Итоги" id="{e3e67cd0-39a5-eb6a-ed05-8b90212319e3}">
           <p14:sldIdLst>
             <p14:sldId id="269"/>
             <p14:sldId id="270"/>
@@ -183,7 +183,7 @@
             <a:pPr>
               <a:defRPr sz="1200" b="0" i="0" u="none" strike="noStrike">
                 <a:solidFill>
-                  <a:srgbClr val="2A1A10"/>
+                  <a:srgbClr val="0F2D3A"/>
                 </a:solidFill>
                 <a:latin typeface="+mn-lt"/>
               </a:defRPr>
@@ -191,7 +191,7 @@
             <a:r>
               <a:rPr sz="1200" b="0" i="0" u="none" strike="noStrike">
                 <a:solidFill>
-                  <a:srgbClr val="2A1A10"/>
+                  <a:srgbClr val="0F2D3A"/>
                 </a:solidFill>
                 <a:latin typeface="+mn-lt"/>
               </a:rPr>
@@ -226,7 +226,7 @@
           </c:tx>
           <c:spPr>
             <a:solidFill>
-              <a:srgbClr val="2F7482"/>
+              <a:srgbClr val="2E6B62"/>
             </a:solidFill>
             <a:effectLst/>
           </c:spPr>
@@ -240,7 +240,7 @@
                 <a:pPr>
                   <a:defRPr b="0" i="0" strike="noStrike" sz="1000" u="none">
                     <a:solidFill>
-                      <a:srgbClr val="2A1A10"/>
+                      <a:srgbClr val="0F2D3A"/>
                     </a:solidFill>
                     <a:latin typeface="+mn-lt"/>
                   </a:defRPr>
@@ -296,7 +296,7 @@
               <a:pPr>
                 <a:defRPr b="0" i="0" strike="noStrike" sz="1000" u="none">
                   <a:solidFill>
-                    <a:srgbClr val="2A1A10"/>
+                    <a:srgbClr val="0F2D3A"/>
                   </a:solidFill>
                   <a:latin typeface="+mn-lt"/>
                 </a:defRPr>
@@ -344,7 +344,7 @@
             <a:pPr>
               <a:defRPr sz="1000" b="0" i="0" u="none" strike="noStrike">
                 <a:solidFill>
-                  <a:srgbClr val="5B4431"/>
+                  <a:srgbClr val="3D5A66"/>
                 </a:solidFill>
                 <a:latin typeface="+mn-lt"/>
               </a:defRPr>
@@ -369,7 +369,7 @@
           <c:spPr>
             <a:ln w="6350" cap="flat">
               <a:solidFill>
-                <a:srgbClr val="E2D3B0"/>
+                <a:srgbClr val="D5E0E3"/>
               </a:solidFill>
               <a:prstDash val="solid"/>
               <a:round/>
@@ -396,7 +396,7 @@
             <a:pPr>
               <a:defRPr sz="900" b="0" i="0" u="none" strike="noStrike">
                 <a:solidFill>
-                  <a:srgbClr val="5B4431"/>
+                  <a:srgbClr val="3D5A66"/>
                 </a:solidFill>
                 <a:latin typeface="+mn-lt"/>
               </a:defRPr>
@@ -446,7 +446,7 @@
             <a:pPr>
               <a:defRPr sz="1200" b="0" i="0" u="none" strike="noStrike">
                 <a:solidFill>
-                  <a:srgbClr val="2A1A10"/>
+                  <a:srgbClr val="0F2D3A"/>
                 </a:solidFill>
                 <a:latin typeface="+mn-lt"/>
               </a:defRPr>
@@ -454,7 +454,7 @@
             <a:r>
               <a:rPr sz="1200" b="0" i="0" u="none" strike="noStrike">
                 <a:solidFill>
-                  <a:srgbClr val="2A1A10"/>
+                  <a:srgbClr val="0F2D3A"/>
                 </a:solidFill>
                 <a:latin typeface="+mn-lt"/>
               </a:rPr>
@@ -489,7 +489,7 @@
           </c:tx>
           <c:spPr>
             <a:solidFill>
-              <a:srgbClr val="B3261E"/>
+              <a:srgbClr val="F0641E"/>
             </a:solidFill>
             <a:effectLst/>
           </c:spPr>
@@ -503,7 +503,7 @@
                 <a:pPr>
                   <a:defRPr b="0" i="0" strike="noStrike" sz="1000" u="none">
                     <a:solidFill>
-                      <a:srgbClr val="2A1A10"/>
+                      <a:srgbClr val="0F2D3A"/>
                     </a:solidFill>
                     <a:latin typeface="+mn-lt"/>
                   </a:defRPr>
@@ -559,7 +559,7 @@
               <a:pPr>
                 <a:defRPr b="0" i="0" strike="noStrike" sz="1000" u="none">
                   <a:solidFill>
-                    <a:srgbClr val="2A1A10"/>
+                    <a:srgbClr val="0F2D3A"/>
                   </a:solidFill>
                   <a:latin typeface="+mn-lt"/>
                 </a:defRPr>
@@ -607,7 +607,7 @@
             <a:pPr>
               <a:defRPr sz="1000" b="0" i="0" u="none" strike="noStrike">
                 <a:solidFill>
-                  <a:srgbClr val="5B4431"/>
+                  <a:srgbClr val="3D5A66"/>
                 </a:solidFill>
                 <a:latin typeface="+mn-lt"/>
               </a:defRPr>
@@ -634,7 +634,7 @@
           <c:spPr>
             <a:ln w="6350" cap="flat">
               <a:solidFill>
-                <a:srgbClr val="E2D3B0"/>
+                <a:srgbClr val="D5E0E3"/>
               </a:solidFill>
               <a:prstDash val="solid"/>
               <a:round/>
@@ -661,7 +661,7 @@
             <a:pPr>
               <a:defRPr sz="900" b="0" i="0" u="none" strike="noStrike">
                 <a:solidFill>
-                  <a:srgbClr val="5B4431"/>
+                  <a:srgbClr val="3D5A66"/>
                 </a:solidFill>
                 <a:latin typeface="+mn-lt"/>
               </a:defRPr>
@@ -1444,7 +1444,7 @@
           <a:p>
             <a:r>
               <a:rPr lang="en-US" dirty="0"/>
-              <a:t>Кто чем занимался: агент и тулы, данные и сверка, фронт и маскот, эвал и деплой.</a:t>
+              <a:t>Команда из семи участников: двое бэкендеров, двое ML-инженеров, которые вели и фронт, QA, тимлид и инженер по отладке.</a:t>
             </a:r>
             <a:endParaRPr lang="en-US" dirty="0"/>
           </a:p>
@@ -1884,7 +1884,7 @@
           <a:p>
             <a:r>
               <a:rPr lang="en-US" dirty="0"/>
-              <a:t>Демо: запрос «на 3 дня на машине в Хасанский район». Сверху интенты, слева грамота с планом по дням, справа карта и живая летопись шагов агента. Переключатель убирает дореформенную орфографию, грамоту можно сохранить в PDF.</a:t>
+              <a:t>Демо: запрос «на 3 дня на машине в Хасанский район». Сверху то, что агент понял из запроса, статус сверки, дни таймлайном, справа карта и живые шаги агента. Одной кнопкой тот же план превращается в старорусскую грамоту.</a:t>
             </a:r>
             <a:endParaRPr lang="en-US" dirty="0"/>
           </a:p>
@@ -2402,7 +2402,7 @@
     <p:bg>
       <p:bgPr>
         <a:solidFill>
-          <a:srgbClr val="0C2630"/>
+          <a:srgbClr val="0F2D3A"/>
         </a:solidFill>
       </p:bgPr>
     </p:bg>
@@ -2448,9 +2448,9 @@
                 <a:solidFill>
                   <a:schemeClr val="bg2"/>
                 </a:solidFill>
-                <a:latin typeface="Bookman Old Style" pitchFamily="34" charset="0"/>
-                <a:ea typeface="Bookman Old Style" pitchFamily="34" charset="-122"/>
-                <a:cs typeface="Bookman Old Style" pitchFamily="34" charset="-120"/>
+                <a:latin typeface="Arial" pitchFamily="34" charset="0"/>
+                <a:ea typeface="Arial" pitchFamily="34" charset="-122"/>
+                <a:cs typeface="Arial" pitchFamily="34" charset="-120"/>
               </a:defRPr>
             </a:lvl1pPr>
           </a:lstStyle>
@@ -2564,9 +2564,9 @@
                 <a:solidFill>
                   <a:schemeClr val="tx2"/>
                 </a:solidFill>
-                <a:latin typeface="Bookman Old Style" pitchFamily="34" charset="0"/>
-                <a:ea typeface="Bookman Old Style" pitchFamily="34" charset="-122"/>
-                <a:cs typeface="Bookman Old Style" pitchFamily="34" charset="-120"/>
+                <a:latin typeface="Arial" pitchFamily="34" charset="0"/>
+                <a:ea typeface="Arial" pitchFamily="34" charset="-122"/>
+                <a:cs typeface="Arial" pitchFamily="34" charset="-120"/>
               </a:defRPr>
             </a:lvl1pPr>
           </a:lstStyle>
@@ -2605,7 +2605,7 @@
             <a:r>
               <a:rPr lang="en-US" sz="900" dirty="0">
                 <a:solidFill>
-                  <a:srgbClr val="7D6650"/>
+                  <a:srgbClr val="6B8590"/>
                 </a:solidFill>
               </a:rPr>
               <a:t>Амба · Т-Банк × Сириус</a:t>
@@ -2644,7 +2644,7 @@
             <a:lvl1pPr>
               <a:defRPr sz="900">
                 <a:solidFill>
-                  <a:srgbClr val="7D6650"/>
+                  <a:srgbClr val="6B8590"/>
                 </a:solidFill>
               </a:defRPr>
             </a:lvl1pPr>
@@ -2714,7 +2714,7 @@
             <a:lvl1pPr>
               <a:defRPr sz="900">
                 <a:solidFill>
-                  <a:srgbClr val="7D6650"/>
+                  <a:srgbClr val="6B8590"/>
                 </a:solidFill>
               </a:defRPr>
             </a:lvl1pPr>
@@ -3035,7 +3035,7 @@
             <a:r>
               <a:rPr lang="en-US" sz="1200" b="1" spc="200" kern="0" dirty="0">
                 <a:solidFill>
-                  <a:srgbClr val="D4A63A"/>
+                  <a:srgbClr val="F5A15F"/>
                 </a:solidFill>
               </a:rPr>
               <a:t>Т-Банк × Сириус · командный проект</a:t>
@@ -3075,9 +3075,9 @@
                 <a:solidFill>
                   <a:schemeClr val="bg2"/>
                 </a:solidFill>
-                <a:latin typeface="Bookman Old Style" pitchFamily="34" charset="0"/>
-                <a:ea typeface="Bookman Old Style" pitchFamily="34" charset="-122"/>
-                <a:cs typeface="Bookman Old Style" pitchFamily="34" charset="-120"/>
+                <a:latin typeface="Arial" pitchFamily="34" charset="0"/>
+                <a:ea typeface="Arial" pitchFamily="34" charset="-122"/>
+                <a:cs typeface="Arial" pitchFamily="34" charset="-120"/>
               </a:rPr>
               <a:t>Амба — AI-летописец странствий по Приморью</a:t>
             </a:r>
@@ -3171,7 +3171,7 @@
           </a:solidFill>
           <a:ln w="19050">
             <a:solidFill>
-              <a:srgbClr val="D4A63A"/>
+              <a:srgbClr val="F5A15F"/>
             </a:solidFill>
             <a:prstDash val="solid"/>
           </a:ln>
@@ -3206,9 +3206,9 @@
                 <a:solidFill>
                   <a:schemeClr val="tx1"/>
                 </a:solidFill>
-                <a:latin typeface="Bookman Old Style" pitchFamily="34" charset="0"/>
-                <a:ea typeface="Bookman Old Style" pitchFamily="34" charset="-122"/>
-                <a:cs typeface="Bookman Old Style" pitchFamily="34" charset="-120"/>
+                <a:latin typeface="Arial" pitchFamily="34" charset="0"/>
+                <a:ea typeface="Arial" pitchFamily="34" charset="-122"/>
+                <a:cs typeface="Arial" pitchFamily="34" charset="-120"/>
               </a:rPr>
               <a:t>Гой еси, путникъ! Куда держимъ путь?</a:t>
             </a:r>
@@ -3272,9 +3272,9 @@
                 <a:solidFill>
                   <a:schemeClr val="tx2"/>
                 </a:solidFill>
-                <a:latin typeface="Bookman Old Style" pitchFamily="34" charset="0"/>
-                <a:ea typeface="Bookman Old Style" pitchFamily="34" charset="-122"/>
-                <a:cs typeface="Bookman Old Style" pitchFamily="34" charset="-120"/>
+                <a:latin typeface="Arial" pitchFamily="34" charset="0"/>
+                <a:ea typeface="Arial" pitchFamily="34" charset="-122"/>
+                <a:cs typeface="Arial" pitchFamily="34" charset="-120"/>
               </a:rPr>
               <a:t>Eval: как понять, что стало лучше</a:t>
             </a:r>
@@ -3927,7 +3927,7 @@
             <a:lvl1pPr>
               <a:defRPr sz="900">
                 <a:solidFill>
-                  <a:srgbClr val="7D6650"/>
+                  <a:srgbClr val="6B8590"/>
                 </a:solidFill>
               </a:defRPr>
             </a:lvl1pPr>
@@ -3998,9 +3998,9 @@
                 <a:solidFill>
                   <a:schemeClr val="tx2"/>
                 </a:solidFill>
-                <a:latin typeface="Bookman Old Style" pitchFamily="34" charset="0"/>
-                <a:ea typeface="Bookman Old Style" pitchFamily="34" charset="-122"/>
-                <a:cs typeface="Bookman Old Style" pitchFamily="34" charset="-120"/>
+                <a:latin typeface="Arial" pitchFamily="34" charset="0"/>
+                <a:ea typeface="Arial" pitchFamily="34" charset="-122"/>
+                <a:cs typeface="Arial" pitchFamily="34" charset="-120"/>
               </a:rPr>
               <a:t>Сравнение версий пайплайна</a:t>
             </a:r>
@@ -4063,7 +4063,7 @@
                   <a:tcPr marL="45720" marR="45720" marT="45720" marB="45720" anchor="ctr">
                     <a:lnL w="6350" cap="flat" cmpd="sng" algn="ctr">
                       <a:solidFill>
-                        <a:srgbClr val="E2D3B0"/>
+                        <a:srgbClr val="D5E0E3"/>
                       </a:solidFill>
                       <a:prstDash val="solid"/>
                       <a:round/>
@@ -4072,7 +4072,7 @@
                     </a:lnL>
                     <a:lnR w="6350" cap="flat" cmpd="sng" algn="ctr">
                       <a:solidFill>
-                        <a:srgbClr val="E2D3B0"/>
+                        <a:srgbClr val="D5E0E3"/>
                       </a:solidFill>
                       <a:prstDash val="solid"/>
                       <a:round/>
@@ -4081,7 +4081,7 @@
                     </a:lnR>
                     <a:lnT w="6350" cap="flat" cmpd="sng" algn="ctr">
                       <a:solidFill>
-                        <a:srgbClr val="E2D3B0"/>
+                        <a:srgbClr val="D5E0E3"/>
                       </a:solidFill>
                       <a:prstDash val="solid"/>
                       <a:round/>
@@ -4090,7 +4090,7 @@
                     </a:lnT>
                     <a:lnB w="6350" cap="flat" cmpd="sng" algn="ctr">
                       <a:solidFill>
-                        <a:srgbClr val="E2D3B0"/>
+                        <a:srgbClr val="D5E0E3"/>
                       </a:solidFill>
                       <a:prstDash val="solid"/>
                       <a:round/>
@@ -4098,7 +4098,7 @@
                       <a:tailEnd type="none" w="med" len="med"/>
                     </a:lnB>
                     <a:solidFill>
-                      <a:srgbClr val="0C2630"/>
+                      <a:srgbClr val="0F2D3A"/>
                     </a:solidFill>
                   </a:tcPr>
                 </a:tc>
@@ -4124,7 +4124,7 @@
                   <a:tcPr marL="45720" marR="45720" marT="45720" marB="45720" anchor="ctr">
                     <a:lnL w="6350" cap="flat" cmpd="sng" algn="ctr">
                       <a:solidFill>
-                        <a:srgbClr val="E2D3B0"/>
+                        <a:srgbClr val="D5E0E3"/>
                       </a:solidFill>
                       <a:prstDash val="solid"/>
                       <a:round/>
@@ -4133,7 +4133,7 @@
                     </a:lnL>
                     <a:lnR w="6350" cap="flat" cmpd="sng" algn="ctr">
                       <a:solidFill>
-                        <a:srgbClr val="E2D3B0"/>
+                        <a:srgbClr val="D5E0E3"/>
                       </a:solidFill>
                       <a:prstDash val="solid"/>
                       <a:round/>
@@ -4142,7 +4142,7 @@
                     </a:lnR>
                     <a:lnT w="6350" cap="flat" cmpd="sng" algn="ctr">
                       <a:solidFill>
-                        <a:srgbClr val="E2D3B0"/>
+                        <a:srgbClr val="D5E0E3"/>
                       </a:solidFill>
                       <a:prstDash val="solid"/>
                       <a:round/>
@@ -4151,7 +4151,7 @@
                     </a:lnT>
                     <a:lnB w="6350" cap="flat" cmpd="sng" algn="ctr">
                       <a:solidFill>
-                        <a:srgbClr val="E2D3B0"/>
+                        <a:srgbClr val="D5E0E3"/>
                       </a:solidFill>
                       <a:prstDash val="solid"/>
                       <a:round/>
@@ -4159,7 +4159,7 @@
                       <a:tailEnd type="none" w="med" len="med"/>
                     </a:lnB>
                     <a:solidFill>
-                      <a:srgbClr val="0C2630"/>
+                      <a:srgbClr val="0F2D3A"/>
                     </a:solidFill>
                   </a:tcPr>
                 </a:tc>
@@ -4185,7 +4185,7 @@
                   <a:tcPr marL="45720" marR="45720" marT="45720" marB="45720" anchor="ctr">
                     <a:lnL w="6350" cap="flat" cmpd="sng" algn="ctr">
                       <a:solidFill>
-                        <a:srgbClr val="E2D3B0"/>
+                        <a:srgbClr val="D5E0E3"/>
                       </a:solidFill>
                       <a:prstDash val="solid"/>
                       <a:round/>
@@ -4194,7 +4194,7 @@
                     </a:lnL>
                     <a:lnR w="6350" cap="flat" cmpd="sng" algn="ctr">
                       <a:solidFill>
-                        <a:srgbClr val="E2D3B0"/>
+                        <a:srgbClr val="D5E0E3"/>
                       </a:solidFill>
                       <a:prstDash val="solid"/>
                       <a:round/>
@@ -4203,7 +4203,7 @@
                     </a:lnR>
                     <a:lnT w="6350" cap="flat" cmpd="sng" algn="ctr">
                       <a:solidFill>
-                        <a:srgbClr val="E2D3B0"/>
+                        <a:srgbClr val="D5E0E3"/>
                       </a:solidFill>
                       <a:prstDash val="solid"/>
                       <a:round/>
@@ -4212,7 +4212,7 @@
                     </a:lnT>
                     <a:lnB w="6350" cap="flat" cmpd="sng" algn="ctr">
                       <a:solidFill>
-                        <a:srgbClr val="E2D3B0"/>
+                        <a:srgbClr val="D5E0E3"/>
                       </a:solidFill>
                       <a:prstDash val="solid"/>
                       <a:round/>
@@ -4220,7 +4220,7 @@
                       <a:tailEnd type="none" w="med" len="med"/>
                     </a:lnB>
                     <a:solidFill>
-                      <a:srgbClr val="0C2630"/>
+                      <a:srgbClr val="0F2D3A"/>
                     </a:solidFill>
                   </a:tcPr>
                 </a:tc>
@@ -4246,7 +4246,7 @@
                   <a:tcPr marL="45720" marR="45720" marT="45720" marB="45720" anchor="ctr">
                     <a:lnL w="6350" cap="flat" cmpd="sng" algn="ctr">
                       <a:solidFill>
-                        <a:srgbClr val="E2D3B0"/>
+                        <a:srgbClr val="D5E0E3"/>
                       </a:solidFill>
                       <a:prstDash val="solid"/>
                       <a:round/>
@@ -4255,7 +4255,7 @@
                     </a:lnL>
                     <a:lnR w="6350" cap="flat" cmpd="sng" algn="ctr">
                       <a:solidFill>
-                        <a:srgbClr val="E2D3B0"/>
+                        <a:srgbClr val="D5E0E3"/>
                       </a:solidFill>
                       <a:prstDash val="solid"/>
                       <a:round/>
@@ -4264,7 +4264,7 @@
                     </a:lnR>
                     <a:lnT w="6350" cap="flat" cmpd="sng" algn="ctr">
                       <a:solidFill>
-                        <a:srgbClr val="E2D3B0"/>
+                        <a:srgbClr val="D5E0E3"/>
                       </a:solidFill>
                       <a:prstDash val="solid"/>
                       <a:round/>
@@ -4273,7 +4273,7 @@
                     </a:lnT>
                     <a:lnB w="6350" cap="flat" cmpd="sng" algn="ctr">
                       <a:solidFill>
-                        <a:srgbClr val="E2D3B0"/>
+                        <a:srgbClr val="D5E0E3"/>
                       </a:solidFill>
                       <a:prstDash val="solid"/>
                       <a:round/>
@@ -4281,7 +4281,7 @@
                       <a:tailEnd type="none" w="med" len="med"/>
                     </a:lnB>
                     <a:solidFill>
-                      <a:srgbClr val="0C2630"/>
+                      <a:srgbClr val="0F2D3A"/>
                     </a:solidFill>
                   </a:tcPr>
                 </a:tc>
@@ -4307,7 +4307,7 @@
                   <a:tcPr marL="45720" marR="45720" marT="45720" marB="45720" anchor="ctr">
                     <a:lnL w="6350" cap="flat" cmpd="sng" algn="ctr">
                       <a:solidFill>
-                        <a:srgbClr val="E2D3B0"/>
+                        <a:srgbClr val="D5E0E3"/>
                       </a:solidFill>
                       <a:prstDash val="solid"/>
                       <a:round/>
@@ -4316,7 +4316,7 @@
                     </a:lnL>
                     <a:lnR w="6350" cap="flat" cmpd="sng" algn="ctr">
                       <a:solidFill>
-                        <a:srgbClr val="E2D3B0"/>
+                        <a:srgbClr val="D5E0E3"/>
                       </a:solidFill>
                       <a:prstDash val="solid"/>
                       <a:round/>
@@ -4325,7 +4325,7 @@
                     </a:lnR>
                     <a:lnT w="6350" cap="flat" cmpd="sng" algn="ctr">
                       <a:solidFill>
-                        <a:srgbClr val="E2D3B0"/>
+                        <a:srgbClr val="D5E0E3"/>
                       </a:solidFill>
                       <a:prstDash val="solid"/>
                       <a:round/>
@@ -4334,7 +4334,7 @@
                     </a:lnT>
                     <a:lnB w="6350" cap="flat" cmpd="sng" algn="ctr">
                       <a:solidFill>
-                        <a:srgbClr val="E2D3B0"/>
+                        <a:srgbClr val="D5E0E3"/>
                       </a:solidFill>
                       <a:prstDash val="solid"/>
                       <a:round/>
@@ -4342,7 +4342,7 @@
                       <a:tailEnd type="none" w="med" len="med"/>
                     </a:lnB>
                     <a:solidFill>
-                      <a:srgbClr val="0C2630"/>
+                      <a:srgbClr val="0F2D3A"/>
                     </a:solidFill>
                   </a:tcPr>
                 </a:tc>
@@ -4368,7 +4368,7 @@
                   <a:tcPr marL="45720" marR="45720" marT="45720" marB="45720" anchor="ctr">
                     <a:lnL w="6350" cap="flat" cmpd="sng" algn="ctr">
                       <a:solidFill>
-                        <a:srgbClr val="E2D3B0"/>
+                        <a:srgbClr val="D5E0E3"/>
                       </a:solidFill>
                       <a:prstDash val="solid"/>
                       <a:round/>
@@ -4377,7 +4377,7 @@
                     </a:lnL>
                     <a:lnR w="6350" cap="flat" cmpd="sng" algn="ctr">
                       <a:solidFill>
-                        <a:srgbClr val="E2D3B0"/>
+                        <a:srgbClr val="D5E0E3"/>
                       </a:solidFill>
                       <a:prstDash val="solid"/>
                       <a:round/>
@@ -4386,7 +4386,7 @@
                     </a:lnR>
                     <a:lnT w="6350" cap="flat" cmpd="sng" algn="ctr">
                       <a:solidFill>
-                        <a:srgbClr val="E2D3B0"/>
+                        <a:srgbClr val="D5E0E3"/>
                       </a:solidFill>
                       <a:prstDash val="solid"/>
                       <a:round/>
@@ -4395,7 +4395,7 @@
                     </a:lnT>
                     <a:lnB w="6350" cap="flat" cmpd="sng" algn="ctr">
                       <a:solidFill>
-                        <a:srgbClr val="E2D3B0"/>
+                        <a:srgbClr val="D5E0E3"/>
                       </a:solidFill>
                       <a:prstDash val="solid"/>
                       <a:round/>
@@ -4403,7 +4403,7 @@
                       <a:tailEnd type="none" w="med" len="med"/>
                     </a:lnB>
                     <a:solidFill>
-                      <a:srgbClr val="0C2630"/>
+                      <a:srgbClr val="0F2D3A"/>
                     </a:solidFill>
                   </a:tcPr>
                 </a:tc>
@@ -4429,7 +4429,7 @@
                   <a:tcPr marL="45720" marR="45720" marT="45720" marB="45720" anchor="ctr">
                     <a:lnL w="6350" cap="flat" cmpd="sng" algn="ctr">
                       <a:solidFill>
-                        <a:srgbClr val="E2D3B0"/>
+                        <a:srgbClr val="D5E0E3"/>
                       </a:solidFill>
                       <a:prstDash val="solid"/>
                       <a:round/>
@@ -4438,7 +4438,7 @@
                     </a:lnL>
                     <a:lnR w="6350" cap="flat" cmpd="sng" algn="ctr">
                       <a:solidFill>
-                        <a:srgbClr val="E2D3B0"/>
+                        <a:srgbClr val="D5E0E3"/>
                       </a:solidFill>
                       <a:prstDash val="solid"/>
                       <a:round/>
@@ -4447,7 +4447,7 @@
                     </a:lnR>
                     <a:lnT w="6350" cap="flat" cmpd="sng" algn="ctr">
                       <a:solidFill>
-                        <a:srgbClr val="E2D3B0"/>
+                        <a:srgbClr val="D5E0E3"/>
                       </a:solidFill>
                       <a:prstDash val="solid"/>
                       <a:round/>
@@ -4456,7 +4456,7 @@
                     </a:lnT>
                     <a:lnB w="6350" cap="flat" cmpd="sng" algn="ctr">
                       <a:solidFill>
-                        <a:srgbClr val="E2D3B0"/>
+                        <a:srgbClr val="D5E0E3"/>
                       </a:solidFill>
                       <a:prstDash val="solid"/>
                       <a:round/>
@@ -4464,7 +4464,7 @@
                       <a:tailEnd type="none" w="med" len="med"/>
                     </a:lnB>
                     <a:solidFill>
-                      <a:srgbClr val="0C2630"/>
+                      <a:srgbClr val="0F2D3A"/>
                     </a:solidFill>
                   </a:tcPr>
                 </a:tc>
@@ -4490,7 +4490,7 @@
                   <a:tcPr marL="45720" marR="45720" marT="45720" marB="45720" anchor="ctr">
                     <a:lnL w="6350" cap="flat" cmpd="sng" algn="ctr">
                       <a:solidFill>
-                        <a:srgbClr val="E2D3B0"/>
+                        <a:srgbClr val="D5E0E3"/>
                       </a:solidFill>
                       <a:prstDash val="solid"/>
                       <a:round/>
@@ -4499,7 +4499,7 @@
                     </a:lnL>
                     <a:lnR w="6350" cap="flat" cmpd="sng" algn="ctr">
                       <a:solidFill>
-                        <a:srgbClr val="E2D3B0"/>
+                        <a:srgbClr val="D5E0E3"/>
                       </a:solidFill>
                       <a:prstDash val="solid"/>
                       <a:round/>
@@ -4508,7 +4508,7 @@
                     </a:lnR>
                     <a:lnT w="6350" cap="flat" cmpd="sng" algn="ctr">
                       <a:solidFill>
-                        <a:srgbClr val="E2D3B0"/>
+                        <a:srgbClr val="D5E0E3"/>
                       </a:solidFill>
                       <a:prstDash val="solid"/>
                       <a:round/>
@@ -4517,7 +4517,7 @@
                     </a:lnT>
                     <a:lnB w="6350" cap="flat" cmpd="sng" algn="ctr">
                       <a:solidFill>
-                        <a:srgbClr val="E2D3B0"/>
+                        <a:srgbClr val="D5E0E3"/>
                       </a:solidFill>
                       <a:prstDash val="solid"/>
                       <a:round/>
@@ -4525,7 +4525,7 @@
                       <a:tailEnd type="none" w="med" len="med"/>
                     </a:lnB>
                     <a:solidFill>
-                      <a:srgbClr val="0C2630"/>
+                      <a:srgbClr val="0F2D3A"/>
                     </a:solidFill>
                   </a:tcPr>
                 </a:tc>
@@ -4542,7 +4542,7 @@
                       <a:r>
                         <a:rPr lang="en-US" sz="1100" b="1" dirty="0">
                           <a:solidFill>
-                            <a:srgbClr val="2A1A10"/>
+                            <a:srgbClr val="0F2D3A"/>
                           </a:solidFill>
                         </a:rPr>
                         <a:t>v1 · Бейзлайн</a:t>
@@ -4553,7 +4553,7 @@
                   <a:tcPr marL="45720" marR="45720" marT="45720" marB="45720" anchor="ctr">
                     <a:lnL w="6350" cap="flat" cmpd="sng" algn="ctr">
                       <a:solidFill>
-                        <a:srgbClr val="E2D3B0"/>
+                        <a:srgbClr val="D5E0E3"/>
                       </a:solidFill>
                       <a:prstDash val="solid"/>
                       <a:round/>
@@ -4562,7 +4562,7 @@
                     </a:lnL>
                     <a:lnR w="6350" cap="flat" cmpd="sng" algn="ctr">
                       <a:solidFill>
-                        <a:srgbClr val="E2D3B0"/>
+                        <a:srgbClr val="D5E0E3"/>
                       </a:solidFill>
                       <a:prstDash val="solid"/>
                       <a:round/>
@@ -4571,7 +4571,7 @@
                     </a:lnR>
                     <a:lnT w="6350" cap="flat" cmpd="sng" algn="ctr">
                       <a:solidFill>
-                        <a:srgbClr val="E2D3B0"/>
+                        <a:srgbClr val="D5E0E3"/>
                       </a:solidFill>
                       <a:prstDash val="solid"/>
                       <a:round/>
@@ -4580,7 +4580,7 @@
                     </a:lnT>
                     <a:lnB w="6350" cap="flat" cmpd="sng" algn="ctr">
                       <a:solidFill>
-                        <a:srgbClr val="E2D3B0"/>
+                        <a:srgbClr val="D5E0E3"/>
                       </a:solidFill>
                       <a:prstDash val="solid"/>
                       <a:round/>
@@ -4588,7 +4588,7 @@
                       <a:tailEnd type="none" w="med" len="med"/>
                     </a:lnB>
                     <a:solidFill>
-                      <a:srgbClr val="F7F1E3"/>
+                      <a:srgbClr val="F3F6F7"/>
                     </a:solidFill>
                   </a:tcPr>
                 </a:tc>
@@ -4603,7 +4603,7 @@
                       <a:r>
                         <a:rPr lang="en-US" sz="1000" dirty="0">
                           <a:solidFill>
-                            <a:srgbClr val="2A1A10"/>
+                            <a:srgbClr val="0F2D3A"/>
                           </a:solidFill>
                         </a:rPr>
                         <a:t>rule-based-planner</a:t>
@@ -4614,7 +4614,7 @@
                   <a:tcPr marL="45720" marR="45720" marT="45720" marB="45720" anchor="ctr">
                     <a:lnL w="6350" cap="flat" cmpd="sng" algn="ctr">
                       <a:solidFill>
-                        <a:srgbClr val="E2D3B0"/>
+                        <a:srgbClr val="D5E0E3"/>
                       </a:solidFill>
                       <a:prstDash val="solid"/>
                       <a:round/>
@@ -4623,7 +4623,7 @@
                     </a:lnL>
                     <a:lnR w="6350" cap="flat" cmpd="sng" algn="ctr">
                       <a:solidFill>
-                        <a:srgbClr val="E2D3B0"/>
+                        <a:srgbClr val="D5E0E3"/>
                       </a:solidFill>
                       <a:prstDash val="solid"/>
                       <a:round/>
@@ -4632,7 +4632,7 @@
                     </a:lnR>
                     <a:lnT w="6350" cap="flat" cmpd="sng" algn="ctr">
                       <a:solidFill>
-                        <a:srgbClr val="E2D3B0"/>
+                        <a:srgbClr val="D5E0E3"/>
                       </a:solidFill>
                       <a:prstDash val="solid"/>
                       <a:round/>
@@ -4641,7 +4641,7 @@
                     </a:lnT>
                     <a:lnB w="6350" cap="flat" cmpd="sng" algn="ctr">
                       <a:solidFill>
-                        <a:srgbClr val="E2D3B0"/>
+                        <a:srgbClr val="D5E0E3"/>
                       </a:solidFill>
                       <a:prstDash val="solid"/>
                       <a:round/>
@@ -4649,7 +4649,7 @@
                       <a:tailEnd type="none" w="med" len="med"/>
                     </a:lnB>
                     <a:solidFill>
-                      <a:srgbClr val="F7F1E3"/>
+                      <a:srgbClr val="F3F6F7"/>
                     </a:solidFill>
                   </a:tcPr>
                 </a:tc>
@@ -4664,7 +4664,7 @@
                       <a:r>
                         <a:rPr lang="en-US" sz="1100" b="1" dirty="0">
                           <a:solidFill>
-                            <a:srgbClr val="B3261E"/>
+                            <a:srgbClr val="F0641E"/>
                           </a:solidFill>
                         </a:rPr>
                         <a:t>0.96</a:t>
@@ -4675,7 +4675,7 @@
                   <a:tcPr marL="45720" marR="45720" marT="45720" marB="45720" anchor="ctr">
                     <a:lnL w="6350" cap="flat" cmpd="sng" algn="ctr">
                       <a:solidFill>
-                        <a:srgbClr val="E2D3B0"/>
+                        <a:srgbClr val="D5E0E3"/>
                       </a:solidFill>
                       <a:prstDash val="solid"/>
                       <a:round/>
@@ -4684,7 +4684,7 @@
                     </a:lnL>
                     <a:lnR w="6350" cap="flat" cmpd="sng" algn="ctr">
                       <a:solidFill>
-                        <a:srgbClr val="E2D3B0"/>
+                        <a:srgbClr val="D5E0E3"/>
                       </a:solidFill>
                       <a:prstDash val="solid"/>
                       <a:round/>
@@ -4693,7 +4693,7 @@
                     </a:lnR>
                     <a:lnT w="6350" cap="flat" cmpd="sng" algn="ctr">
                       <a:solidFill>
-                        <a:srgbClr val="E2D3B0"/>
+                        <a:srgbClr val="D5E0E3"/>
                       </a:solidFill>
                       <a:prstDash val="solid"/>
                       <a:round/>
@@ -4702,7 +4702,7 @@
                     </a:lnT>
                     <a:lnB w="6350" cap="flat" cmpd="sng" algn="ctr">
                       <a:solidFill>
-                        <a:srgbClr val="E2D3B0"/>
+                        <a:srgbClr val="D5E0E3"/>
                       </a:solidFill>
                       <a:prstDash val="solid"/>
                       <a:round/>
@@ -4710,7 +4710,7 @@
                       <a:tailEnd type="none" w="med" len="med"/>
                     </a:lnB>
                     <a:solidFill>
-                      <a:srgbClr val="F7F1E3"/>
+                      <a:srgbClr val="F3F6F7"/>
                     </a:solidFill>
                   </a:tcPr>
                 </a:tc>
@@ -4725,7 +4725,7 @@
                       <a:r>
                         <a:rPr lang="en-US" sz="1100" dirty="0">
                           <a:solidFill>
-                            <a:srgbClr val="2A1A10"/>
+                            <a:srgbClr val="0F2D3A"/>
                           </a:solidFill>
                         </a:rPr>
                         <a:t>95%</a:t>
@@ -4736,7 +4736,7 @@
                   <a:tcPr marL="45720" marR="45720" marT="45720" marB="45720" anchor="ctr">
                     <a:lnL w="6350" cap="flat" cmpd="sng" algn="ctr">
                       <a:solidFill>
-                        <a:srgbClr val="E2D3B0"/>
+                        <a:srgbClr val="D5E0E3"/>
                       </a:solidFill>
                       <a:prstDash val="solid"/>
                       <a:round/>
@@ -4745,7 +4745,7 @@
                     </a:lnL>
                     <a:lnR w="6350" cap="flat" cmpd="sng" algn="ctr">
                       <a:solidFill>
-                        <a:srgbClr val="E2D3B0"/>
+                        <a:srgbClr val="D5E0E3"/>
                       </a:solidFill>
                       <a:prstDash val="solid"/>
                       <a:round/>
@@ -4754,7 +4754,7 @@
                     </a:lnR>
                     <a:lnT w="6350" cap="flat" cmpd="sng" algn="ctr">
                       <a:solidFill>
-                        <a:srgbClr val="E2D3B0"/>
+                        <a:srgbClr val="D5E0E3"/>
                       </a:solidFill>
                       <a:prstDash val="solid"/>
                       <a:round/>
@@ -4763,7 +4763,7 @@
                     </a:lnT>
                     <a:lnB w="6350" cap="flat" cmpd="sng" algn="ctr">
                       <a:solidFill>
-                        <a:srgbClr val="E2D3B0"/>
+                        <a:srgbClr val="D5E0E3"/>
                       </a:solidFill>
                       <a:prstDash val="solid"/>
                       <a:round/>
@@ -4771,7 +4771,7 @@
                       <a:tailEnd type="none" w="med" len="med"/>
                     </a:lnB>
                     <a:solidFill>
-                      <a:srgbClr val="F7F1E3"/>
+                      <a:srgbClr val="F3F6F7"/>
                     </a:solidFill>
                   </a:tcPr>
                 </a:tc>
@@ -4786,7 +4786,7 @@
                       <a:r>
                         <a:rPr lang="en-US" sz="1100" dirty="0">
                           <a:solidFill>
-                            <a:srgbClr val="2A1A10"/>
+                            <a:srgbClr val="0F2D3A"/>
                           </a:solidFill>
                         </a:rPr>
                         <a:t>87%</a:t>
@@ -4797,7 +4797,7 @@
                   <a:tcPr marL="45720" marR="45720" marT="45720" marB="45720" anchor="ctr">
                     <a:lnL w="6350" cap="flat" cmpd="sng" algn="ctr">
                       <a:solidFill>
-                        <a:srgbClr val="E2D3B0"/>
+                        <a:srgbClr val="D5E0E3"/>
                       </a:solidFill>
                       <a:prstDash val="solid"/>
                       <a:round/>
@@ -4806,7 +4806,7 @@
                     </a:lnL>
                     <a:lnR w="6350" cap="flat" cmpd="sng" algn="ctr">
                       <a:solidFill>
-                        <a:srgbClr val="E2D3B0"/>
+                        <a:srgbClr val="D5E0E3"/>
                       </a:solidFill>
                       <a:prstDash val="solid"/>
                       <a:round/>
@@ -4815,7 +4815,7 @@
                     </a:lnR>
                     <a:lnT w="6350" cap="flat" cmpd="sng" algn="ctr">
                       <a:solidFill>
-                        <a:srgbClr val="E2D3B0"/>
+                        <a:srgbClr val="D5E0E3"/>
                       </a:solidFill>
                       <a:prstDash val="solid"/>
                       <a:round/>
@@ -4824,7 +4824,7 @@
                     </a:lnT>
                     <a:lnB w="6350" cap="flat" cmpd="sng" algn="ctr">
                       <a:solidFill>
-                        <a:srgbClr val="E2D3B0"/>
+                        <a:srgbClr val="D5E0E3"/>
                       </a:solidFill>
                       <a:prstDash val="solid"/>
                       <a:round/>
@@ -4832,7 +4832,7 @@
                       <a:tailEnd type="none" w="med" len="med"/>
                     </a:lnB>
                     <a:solidFill>
-                      <a:srgbClr val="F7F1E3"/>
+                      <a:srgbClr val="F3F6F7"/>
                     </a:solidFill>
                   </a:tcPr>
                 </a:tc>
@@ -4847,7 +4847,7 @@
                       <a:r>
                         <a:rPr lang="en-US" sz="1100" dirty="0">
                           <a:solidFill>
-                            <a:srgbClr val="2A1A10"/>
+                            <a:srgbClr val="0F2D3A"/>
                           </a:solidFill>
                         </a:rPr>
                         <a:t>9 470</a:t>
@@ -4858,7 +4858,7 @@
                   <a:tcPr marL="45720" marR="45720" marT="45720" marB="45720" anchor="ctr">
                     <a:lnL w="6350" cap="flat" cmpd="sng" algn="ctr">
                       <a:solidFill>
-                        <a:srgbClr val="E2D3B0"/>
+                        <a:srgbClr val="D5E0E3"/>
                       </a:solidFill>
                       <a:prstDash val="solid"/>
                       <a:round/>
@@ -4867,7 +4867,7 @@
                     </a:lnL>
                     <a:lnR w="6350" cap="flat" cmpd="sng" algn="ctr">
                       <a:solidFill>
-                        <a:srgbClr val="E2D3B0"/>
+                        <a:srgbClr val="D5E0E3"/>
                       </a:solidFill>
                       <a:prstDash val="solid"/>
                       <a:round/>
@@ -4876,7 +4876,7 @@
                     </a:lnR>
                     <a:lnT w="6350" cap="flat" cmpd="sng" algn="ctr">
                       <a:solidFill>
-                        <a:srgbClr val="E2D3B0"/>
+                        <a:srgbClr val="D5E0E3"/>
                       </a:solidFill>
                       <a:prstDash val="solid"/>
                       <a:round/>
@@ -4885,7 +4885,7 @@
                     </a:lnT>
                     <a:lnB w="6350" cap="flat" cmpd="sng" algn="ctr">
                       <a:solidFill>
-                        <a:srgbClr val="E2D3B0"/>
+                        <a:srgbClr val="D5E0E3"/>
                       </a:solidFill>
                       <a:prstDash val="solid"/>
                       <a:round/>
@@ -4893,7 +4893,7 @@
                       <a:tailEnd type="none" w="med" len="med"/>
                     </a:lnB>
                     <a:solidFill>
-                      <a:srgbClr val="F7F1E3"/>
+                      <a:srgbClr val="F3F6F7"/>
                     </a:solidFill>
                   </a:tcPr>
                 </a:tc>
@@ -4908,7 +4908,7 @@
                       <a:r>
                         <a:rPr lang="en-US" sz="1100" dirty="0">
                           <a:solidFill>
-                            <a:srgbClr val="2A1A10"/>
+                            <a:srgbClr val="0F2D3A"/>
                           </a:solidFill>
                         </a:rPr>
                         <a:t>—</a:t>
@@ -4919,7 +4919,7 @@
                   <a:tcPr marL="45720" marR="45720" marT="45720" marB="45720" anchor="ctr">
                     <a:lnL w="6350" cap="flat" cmpd="sng" algn="ctr">
                       <a:solidFill>
-                        <a:srgbClr val="E2D3B0"/>
+                        <a:srgbClr val="D5E0E3"/>
                       </a:solidFill>
                       <a:prstDash val="solid"/>
                       <a:round/>
@@ -4928,7 +4928,7 @@
                     </a:lnL>
                     <a:lnR w="6350" cap="flat" cmpd="sng" algn="ctr">
                       <a:solidFill>
-                        <a:srgbClr val="E2D3B0"/>
+                        <a:srgbClr val="D5E0E3"/>
                       </a:solidFill>
                       <a:prstDash val="solid"/>
                       <a:round/>
@@ -4937,7 +4937,7 @@
                     </a:lnR>
                     <a:lnT w="6350" cap="flat" cmpd="sng" algn="ctr">
                       <a:solidFill>
-                        <a:srgbClr val="E2D3B0"/>
+                        <a:srgbClr val="D5E0E3"/>
                       </a:solidFill>
                       <a:prstDash val="solid"/>
                       <a:round/>
@@ -4946,7 +4946,7 @@
                     </a:lnT>
                     <a:lnB w="6350" cap="flat" cmpd="sng" algn="ctr">
                       <a:solidFill>
-                        <a:srgbClr val="E2D3B0"/>
+                        <a:srgbClr val="D5E0E3"/>
                       </a:solidFill>
                       <a:prstDash val="solid"/>
                       <a:round/>
@@ -4954,7 +4954,7 @@
                       <a:tailEnd type="none" w="med" len="med"/>
                     </a:lnB>
                     <a:solidFill>
-                      <a:srgbClr val="F7F1E3"/>
+                      <a:srgbClr val="F3F6F7"/>
                     </a:solidFill>
                   </a:tcPr>
                 </a:tc>
@@ -4969,7 +4969,7 @@
                       <a:r>
                         <a:rPr lang="en-US" sz="1100" dirty="0">
                           <a:solidFill>
-                            <a:srgbClr val="2A1A10"/>
+                            <a:srgbClr val="0F2D3A"/>
                           </a:solidFill>
                         </a:rPr>
                         <a:t>3,35</a:t>
@@ -4980,7 +4980,7 @@
                   <a:tcPr marL="45720" marR="45720" marT="45720" marB="45720" anchor="ctr">
                     <a:lnL w="6350" cap="flat" cmpd="sng" algn="ctr">
                       <a:solidFill>
-                        <a:srgbClr val="E2D3B0"/>
+                        <a:srgbClr val="D5E0E3"/>
                       </a:solidFill>
                       <a:prstDash val="solid"/>
                       <a:round/>
@@ -4989,7 +4989,7 @@
                     </a:lnL>
                     <a:lnR w="6350" cap="flat" cmpd="sng" algn="ctr">
                       <a:solidFill>
-                        <a:srgbClr val="E2D3B0"/>
+                        <a:srgbClr val="D5E0E3"/>
                       </a:solidFill>
                       <a:prstDash val="solid"/>
                       <a:round/>
@@ -4998,7 +4998,7 @@
                     </a:lnR>
                     <a:lnT w="6350" cap="flat" cmpd="sng" algn="ctr">
                       <a:solidFill>
-                        <a:srgbClr val="E2D3B0"/>
+                        <a:srgbClr val="D5E0E3"/>
                       </a:solidFill>
                       <a:prstDash val="solid"/>
                       <a:round/>
@@ -5007,7 +5007,7 @@
                     </a:lnT>
                     <a:lnB w="6350" cap="flat" cmpd="sng" algn="ctr">
                       <a:solidFill>
-                        <a:srgbClr val="E2D3B0"/>
+                        <a:srgbClr val="D5E0E3"/>
                       </a:solidFill>
                       <a:prstDash val="solid"/>
                       <a:round/>
@@ -5015,7 +5015,7 @@
                       <a:tailEnd type="none" w="med" len="med"/>
                     </a:lnB>
                     <a:solidFill>
-                      <a:srgbClr val="F7F1E3"/>
+                      <a:srgbClr val="F3F6F7"/>
                     </a:solidFill>
                   </a:tcPr>
                 </a:tc>
@@ -5032,7 +5032,7 @@
                       <a:r>
                         <a:rPr lang="en-US" sz="1100" b="1" dirty="0">
                           <a:solidFill>
-                            <a:srgbClr val="2A1A10"/>
+                            <a:srgbClr val="0F2D3A"/>
                           </a:solidFill>
                         </a:rPr>
                         <a:t>v2 · Сжатие контекста + сверка</a:t>
@@ -5043,7 +5043,7 @@
                   <a:tcPr marL="45720" marR="45720" marT="45720" marB="45720" anchor="ctr">
                     <a:lnL w="6350" cap="flat" cmpd="sng" algn="ctr">
                       <a:solidFill>
-                        <a:srgbClr val="E2D3B0"/>
+                        <a:srgbClr val="D5E0E3"/>
                       </a:solidFill>
                       <a:prstDash val="solid"/>
                       <a:round/>
@@ -5052,7 +5052,7 @@
                     </a:lnL>
                     <a:lnR w="6350" cap="flat" cmpd="sng" algn="ctr">
                       <a:solidFill>
-                        <a:srgbClr val="E2D3B0"/>
+                        <a:srgbClr val="D5E0E3"/>
                       </a:solidFill>
                       <a:prstDash val="solid"/>
                       <a:round/>
@@ -5061,7 +5061,7 @@
                     </a:lnR>
                     <a:lnT w="6350" cap="flat" cmpd="sng" algn="ctr">
                       <a:solidFill>
-                        <a:srgbClr val="E2D3B0"/>
+                        <a:srgbClr val="D5E0E3"/>
                       </a:solidFill>
                       <a:prstDash val="solid"/>
                       <a:round/>
@@ -5070,7 +5070,7 @@
                     </a:lnT>
                     <a:lnB w="6350" cap="flat" cmpd="sng" algn="ctr">
                       <a:solidFill>
-                        <a:srgbClr val="E2D3B0"/>
+                        <a:srgbClr val="D5E0E3"/>
                       </a:solidFill>
                       <a:prstDash val="solid"/>
                       <a:round/>
@@ -5093,7 +5093,7 @@
                       <a:r>
                         <a:rPr lang="en-US" sz="1000" dirty="0">
                           <a:solidFill>
-                            <a:srgbClr val="2A1A10"/>
+                            <a:srgbClr val="0F2D3A"/>
                           </a:solidFill>
                         </a:rPr>
                         <a:t>rule-based-planner</a:t>
@@ -5104,7 +5104,7 @@
                   <a:tcPr marL="45720" marR="45720" marT="45720" marB="45720" anchor="ctr">
                     <a:lnL w="6350" cap="flat" cmpd="sng" algn="ctr">
                       <a:solidFill>
-                        <a:srgbClr val="E2D3B0"/>
+                        <a:srgbClr val="D5E0E3"/>
                       </a:solidFill>
                       <a:prstDash val="solid"/>
                       <a:round/>
@@ -5113,7 +5113,7 @@
                     </a:lnL>
                     <a:lnR w="6350" cap="flat" cmpd="sng" algn="ctr">
                       <a:solidFill>
-                        <a:srgbClr val="E2D3B0"/>
+                        <a:srgbClr val="D5E0E3"/>
                       </a:solidFill>
                       <a:prstDash val="solid"/>
                       <a:round/>
@@ -5122,7 +5122,7 @@
                     </a:lnR>
                     <a:lnT w="6350" cap="flat" cmpd="sng" algn="ctr">
                       <a:solidFill>
-                        <a:srgbClr val="E2D3B0"/>
+                        <a:srgbClr val="D5E0E3"/>
                       </a:solidFill>
                       <a:prstDash val="solid"/>
                       <a:round/>
@@ -5131,7 +5131,7 @@
                     </a:lnT>
                     <a:lnB w="6350" cap="flat" cmpd="sng" algn="ctr">
                       <a:solidFill>
-                        <a:srgbClr val="E2D3B0"/>
+                        <a:srgbClr val="D5E0E3"/>
                       </a:solidFill>
                       <a:prstDash val="solid"/>
                       <a:round/>
@@ -5154,7 +5154,7 @@
                       <a:r>
                         <a:rPr lang="en-US" sz="1100" b="1" dirty="0">
                           <a:solidFill>
-                            <a:srgbClr val="B3261E"/>
+                            <a:srgbClr val="F0641E"/>
                           </a:solidFill>
                         </a:rPr>
                         <a:t>0.96</a:t>
@@ -5165,7 +5165,7 @@
                   <a:tcPr marL="45720" marR="45720" marT="45720" marB="45720" anchor="ctr">
                     <a:lnL w="6350" cap="flat" cmpd="sng" algn="ctr">
                       <a:solidFill>
-                        <a:srgbClr val="E2D3B0"/>
+                        <a:srgbClr val="D5E0E3"/>
                       </a:solidFill>
                       <a:prstDash val="solid"/>
                       <a:round/>
@@ -5174,7 +5174,7 @@
                     </a:lnL>
                     <a:lnR w="6350" cap="flat" cmpd="sng" algn="ctr">
                       <a:solidFill>
-                        <a:srgbClr val="E2D3B0"/>
+                        <a:srgbClr val="D5E0E3"/>
                       </a:solidFill>
                       <a:prstDash val="solid"/>
                       <a:round/>
@@ -5183,7 +5183,7 @@
                     </a:lnR>
                     <a:lnT w="6350" cap="flat" cmpd="sng" algn="ctr">
                       <a:solidFill>
-                        <a:srgbClr val="E2D3B0"/>
+                        <a:srgbClr val="D5E0E3"/>
                       </a:solidFill>
                       <a:prstDash val="solid"/>
                       <a:round/>
@@ -5192,7 +5192,7 @@
                     </a:lnT>
                     <a:lnB w="6350" cap="flat" cmpd="sng" algn="ctr">
                       <a:solidFill>
-                        <a:srgbClr val="E2D3B0"/>
+                        <a:srgbClr val="D5E0E3"/>
                       </a:solidFill>
                       <a:prstDash val="solid"/>
                       <a:round/>
@@ -5215,7 +5215,7 @@
                       <a:r>
                         <a:rPr lang="en-US" sz="1100" dirty="0">
                           <a:solidFill>
-                            <a:srgbClr val="2A1A10"/>
+                            <a:srgbClr val="0F2D3A"/>
                           </a:solidFill>
                         </a:rPr>
                         <a:t>95%</a:t>
@@ -5226,7 +5226,7 @@
                   <a:tcPr marL="45720" marR="45720" marT="45720" marB="45720" anchor="ctr">
                     <a:lnL w="6350" cap="flat" cmpd="sng" algn="ctr">
                       <a:solidFill>
-                        <a:srgbClr val="E2D3B0"/>
+                        <a:srgbClr val="D5E0E3"/>
                       </a:solidFill>
                       <a:prstDash val="solid"/>
                       <a:round/>
@@ -5235,7 +5235,7 @@
                     </a:lnL>
                     <a:lnR w="6350" cap="flat" cmpd="sng" algn="ctr">
                       <a:solidFill>
-                        <a:srgbClr val="E2D3B0"/>
+                        <a:srgbClr val="D5E0E3"/>
                       </a:solidFill>
                       <a:prstDash val="solid"/>
                       <a:round/>
@@ -5244,7 +5244,7 @@
                     </a:lnR>
                     <a:lnT w="6350" cap="flat" cmpd="sng" algn="ctr">
                       <a:solidFill>
-                        <a:srgbClr val="E2D3B0"/>
+                        <a:srgbClr val="D5E0E3"/>
                       </a:solidFill>
                       <a:prstDash val="solid"/>
                       <a:round/>
@@ -5253,7 +5253,7 @@
                     </a:lnT>
                     <a:lnB w="6350" cap="flat" cmpd="sng" algn="ctr">
                       <a:solidFill>
-                        <a:srgbClr val="E2D3B0"/>
+                        <a:srgbClr val="D5E0E3"/>
                       </a:solidFill>
                       <a:prstDash val="solid"/>
                       <a:round/>
@@ -5276,7 +5276,7 @@
                       <a:r>
                         <a:rPr lang="en-US" sz="1100" dirty="0">
                           <a:solidFill>
-                            <a:srgbClr val="2A1A10"/>
+                            <a:srgbClr val="0F2D3A"/>
                           </a:solidFill>
                         </a:rPr>
                         <a:t>87%</a:t>
@@ -5287,7 +5287,7 @@
                   <a:tcPr marL="45720" marR="45720" marT="45720" marB="45720" anchor="ctr">
                     <a:lnL w="6350" cap="flat" cmpd="sng" algn="ctr">
                       <a:solidFill>
-                        <a:srgbClr val="E2D3B0"/>
+                        <a:srgbClr val="D5E0E3"/>
                       </a:solidFill>
                       <a:prstDash val="solid"/>
                       <a:round/>
@@ -5296,7 +5296,7 @@
                     </a:lnL>
                     <a:lnR w="6350" cap="flat" cmpd="sng" algn="ctr">
                       <a:solidFill>
-                        <a:srgbClr val="E2D3B0"/>
+                        <a:srgbClr val="D5E0E3"/>
                       </a:solidFill>
                       <a:prstDash val="solid"/>
                       <a:round/>
@@ -5305,7 +5305,7 @@
                     </a:lnR>
                     <a:lnT w="6350" cap="flat" cmpd="sng" algn="ctr">
                       <a:solidFill>
-                        <a:srgbClr val="E2D3B0"/>
+                        <a:srgbClr val="D5E0E3"/>
                       </a:solidFill>
                       <a:prstDash val="solid"/>
                       <a:round/>
@@ -5314,7 +5314,7 @@
                     </a:lnT>
                     <a:lnB w="6350" cap="flat" cmpd="sng" algn="ctr">
                       <a:solidFill>
-                        <a:srgbClr val="E2D3B0"/>
+                        <a:srgbClr val="D5E0E3"/>
                       </a:solidFill>
                       <a:prstDash val="solid"/>
                       <a:round/>
@@ -5337,7 +5337,7 @@
                       <a:r>
                         <a:rPr lang="en-US" sz="1100" dirty="0">
                           <a:solidFill>
-                            <a:srgbClr val="2A1A10"/>
+                            <a:srgbClr val="0F2D3A"/>
                           </a:solidFill>
                         </a:rPr>
                         <a:t>2 893</a:t>
@@ -5348,7 +5348,7 @@
                   <a:tcPr marL="45720" marR="45720" marT="45720" marB="45720" anchor="ctr">
                     <a:lnL w="6350" cap="flat" cmpd="sng" algn="ctr">
                       <a:solidFill>
-                        <a:srgbClr val="E2D3B0"/>
+                        <a:srgbClr val="D5E0E3"/>
                       </a:solidFill>
                       <a:prstDash val="solid"/>
                       <a:round/>
@@ -5357,7 +5357,7 @@
                     </a:lnL>
                     <a:lnR w="6350" cap="flat" cmpd="sng" algn="ctr">
                       <a:solidFill>
-                        <a:srgbClr val="E2D3B0"/>
+                        <a:srgbClr val="D5E0E3"/>
                       </a:solidFill>
                       <a:prstDash val="solid"/>
                       <a:round/>
@@ -5366,7 +5366,7 @@
                     </a:lnR>
                     <a:lnT w="6350" cap="flat" cmpd="sng" algn="ctr">
                       <a:solidFill>
-                        <a:srgbClr val="E2D3B0"/>
+                        <a:srgbClr val="D5E0E3"/>
                       </a:solidFill>
                       <a:prstDash val="solid"/>
                       <a:round/>
@@ -5375,7 +5375,7 @@
                     </a:lnT>
                     <a:lnB w="6350" cap="flat" cmpd="sng" algn="ctr">
                       <a:solidFill>
-                        <a:srgbClr val="E2D3B0"/>
+                        <a:srgbClr val="D5E0E3"/>
                       </a:solidFill>
                       <a:prstDash val="solid"/>
                       <a:round/>
@@ -5398,7 +5398,7 @@
                       <a:r>
                         <a:rPr lang="en-US" sz="1100" dirty="0">
                           <a:solidFill>
-                            <a:srgbClr val="2A1A10"/>
+                            <a:srgbClr val="0F2D3A"/>
                           </a:solidFill>
                         </a:rPr>
                         <a:t>—</a:t>
@@ -5409,7 +5409,7 @@
                   <a:tcPr marL="45720" marR="45720" marT="45720" marB="45720" anchor="ctr">
                     <a:lnL w="6350" cap="flat" cmpd="sng" algn="ctr">
                       <a:solidFill>
-                        <a:srgbClr val="E2D3B0"/>
+                        <a:srgbClr val="D5E0E3"/>
                       </a:solidFill>
                       <a:prstDash val="solid"/>
                       <a:round/>
@@ -5418,7 +5418,7 @@
                     </a:lnL>
                     <a:lnR w="6350" cap="flat" cmpd="sng" algn="ctr">
                       <a:solidFill>
-                        <a:srgbClr val="E2D3B0"/>
+                        <a:srgbClr val="D5E0E3"/>
                       </a:solidFill>
                       <a:prstDash val="solid"/>
                       <a:round/>
@@ -5427,7 +5427,7 @@
                     </a:lnR>
                     <a:lnT w="6350" cap="flat" cmpd="sng" algn="ctr">
                       <a:solidFill>
-                        <a:srgbClr val="E2D3B0"/>
+                        <a:srgbClr val="D5E0E3"/>
                       </a:solidFill>
                       <a:prstDash val="solid"/>
                       <a:round/>
@@ -5436,7 +5436,7 @@
                     </a:lnT>
                     <a:lnB w="6350" cap="flat" cmpd="sng" algn="ctr">
                       <a:solidFill>
-                        <a:srgbClr val="E2D3B0"/>
+                        <a:srgbClr val="D5E0E3"/>
                       </a:solidFill>
                       <a:prstDash val="solid"/>
                       <a:round/>
@@ -5459,7 +5459,7 @@
                       <a:r>
                         <a:rPr lang="en-US" sz="1100" dirty="0">
                           <a:solidFill>
-                            <a:srgbClr val="2A1A10"/>
+                            <a:srgbClr val="0F2D3A"/>
                           </a:solidFill>
                         </a:rPr>
                         <a:t>0,37</a:t>
@@ -5470,7 +5470,7 @@
                   <a:tcPr marL="45720" marR="45720" marT="45720" marB="45720" anchor="ctr">
                     <a:lnL w="6350" cap="flat" cmpd="sng" algn="ctr">
                       <a:solidFill>
-                        <a:srgbClr val="E2D3B0"/>
+                        <a:srgbClr val="D5E0E3"/>
                       </a:solidFill>
                       <a:prstDash val="solid"/>
                       <a:round/>
@@ -5479,7 +5479,7 @@
                     </a:lnL>
                     <a:lnR w="6350" cap="flat" cmpd="sng" algn="ctr">
                       <a:solidFill>
-                        <a:srgbClr val="E2D3B0"/>
+                        <a:srgbClr val="D5E0E3"/>
                       </a:solidFill>
                       <a:prstDash val="solid"/>
                       <a:round/>
@@ -5488,7 +5488,7 @@
                     </a:lnR>
                     <a:lnT w="6350" cap="flat" cmpd="sng" algn="ctr">
                       <a:solidFill>
-                        <a:srgbClr val="E2D3B0"/>
+                        <a:srgbClr val="D5E0E3"/>
                       </a:solidFill>
                       <a:prstDash val="solid"/>
                       <a:round/>
@@ -5497,7 +5497,7 @@
                     </a:lnT>
                     <a:lnB w="6350" cap="flat" cmpd="sng" algn="ctr">
                       <a:solidFill>
-                        <a:srgbClr val="E2D3B0"/>
+                        <a:srgbClr val="D5E0E3"/>
                       </a:solidFill>
                       <a:prstDash val="solid"/>
                       <a:round/>
@@ -5612,7 +5612,7 @@
             <a:lvl1pPr>
               <a:defRPr sz="900">
                 <a:solidFill>
-                  <a:srgbClr val="7D6650"/>
+                  <a:srgbClr val="6B8590"/>
                 </a:solidFill>
               </a:defRPr>
             </a:lvl1pPr>
@@ -5683,9 +5683,9 @@
                 <a:solidFill>
                   <a:schemeClr val="tx2"/>
                 </a:solidFill>
-                <a:latin typeface="Bookman Old Style" pitchFamily="34" charset="0"/>
-                <a:ea typeface="Bookman Old Style" pitchFamily="34" charset="-122"/>
-                <a:cs typeface="Bookman Old Style" pitchFamily="34" charset="-120"/>
+                <a:latin typeface="Arial" pitchFamily="34" charset="0"/>
+                <a:ea typeface="Arial" pitchFamily="34" charset="-122"/>
+                <a:cs typeface="Arial" pitchFamily="34" charset="-120"/>
               </a:rPr>
               <a:t>Что дали улучшения</a:t>
             </a:r>
@@ -6096,7 +6096,7 @@
             <a:lvl1pPr>
               <a:defRPr sz="900">
                 <a:solidFill>
-                  <a:srgbClr val="7D6650"/>
+                  <a:srgbClr val="6B8590"/>
                 </a:solidFill>
               </a:defRPr>
             </a:lvl1pPr>
@@ -6167,9 +6167,9 @@
                 <a:solidFill>
                   <a:schemeClr val="tx2"/>
                 </a:solidFill>
-                <a:latin typeface="Bookman Old Style" pitchFamily="34" charset="0"/>
-                <a:ea typeface="Bookman Old Style" pitchFamily="34" charset="-122"/>
-                <a:cs typeface="Bookman Old Style" pitchFamily="34" charset="-120"/>
+                <a:latin typeface="Arial" pitchFamily="34" charset="0"/>
+                <a:ea typeface="Arial" pitchFamily="34" charset="-122"/>
+                <a:cs typeface="Arial" pitchFamily="34" charset="-120"/>
               </a:rPr>
               <a:t>Команда</a:t>
             </a:r>
@@ -6185,12 +6185,12 @@
         </p:nvSpPr>
         <p:spPr>
           <a:xfrm>
-            <a:off x="457200" y="1143000"/>
-            <a:ext cx="1920240" cy="2926080"/>
+            <a:off x="457200" y="1051560"/>
+            <a:ext cx="1920240" cy="1645920"/>
           </a:xfrm>
           <a:prstGeom prst="roundRect">
             <a:avLst>
-              <a:gd name="adj" fmla="val 5714"/>
+              <a:gd name="adj" fmla="val 6667"/>
             </a:avLst>
           </a:prstGeom>
           <a:solidFill>
@@ -6212,16 +6212,16 @@
         </p:nvSpPr>
         <p:spPr>
           <a:xfrm>
-            <a:off x="1051560" y="1325880"/>
-            <a:ext cx="731520" cy="731520"/>
+            <a:off x="594360" y="1216152"/>
+            <a:ext cx="502920" cy="502920"/>
           </a:xfrm>
           <a:prstGeom prst="ellipse">
             <a:avLst/>
           </a:prstGeom>
           <a:solidFill>
-            <a:srgbClr val="B3261E"/>
+            <a:srgbClr val="F0641E"/>
           </a:solidFill>
-          <a:ln w="25400">
+          <a:ln w="19050">
             <a:solidFill>
               <a:srgbClr val="FFFFFF"/>
             </a:solidFill>
@@ -6237,8 +6237,8 @@
         </p:nvSpPr>
         <p:spPr>
           <a:xfrm>
-            <a:off x="1051560" y="1325880"/>
-            <a:ext cx="731520" cy="731520"/>
+            <a:off x="594360" y="1216152"/>
+            <a:ext cx="502920" cy="502920"/>
           </a:xfrm>
           <a:prstGeom prst="rect">
             <a:avLst/>
@@ -6254,14 +6254,14 @@
               <a:buNone/>
             </a:pPr>
             <a:r>
-              <a:rPr lang="en-US" sz="1800" b="1" dirty="0">
+              <a:rPr lang="en-US" sz="1300" b="1" dirty="0">
                 <a:solidFill>
                   <a:schemeClr val="bg1"/>
                 </a:solidFill>
               </a:rPr>
-              <a:t>У1</a:t>
-            </a:r>
-            <a:endParaRPr lang="en-US" sz="1800" dirty="0"/>
+              <a:t>СД</a:t>
+            </a:r>
+            <a:endParaRPr lang="en-US" sz="1300" dirty="0"/>
           </a:p>
         </p:txBody>
       </p:sp>
@@ -6273,8 +6273,8 @@
         </p:nvSpPr>
         <p:spPr>
           <a:xfrm>
-            <a:off x="548640" y="2194560"/>
-            <a:ext cx="1737360" cy="365760"/>
+            <a:off x="1188720" y="1161288"/>
+            <a:ext cx="1097280" cy="640080"/>
           </a:xfrm>
           <a:prstGeom prst="rect">
             <a:avLst/>
@@ -6286,18 +6286,18 @@
           <a:bodyPr wrap="square" lIns="0" tIns="0" rIns="0" bIns="0" rtlCol="0" anchor="ctr"/>
           <a:lstStyle/>
           <a:p>
-            <a:pPr algn="ctr" indent="0" marL="0">
+            <a:pPr indent="0" marL="0">
               <a:buNone/>
             </a:pPr>
             <a:r>
-              <a:rPr lang="en-US" sz="1400" b="1" dirty="0">
+              <a:rPr lang="en-US" sz="1300" b="1" dirty="0">
                 <a:solidFill>
                   <a:schemeClr val="tx1"/>
                 </a:solidFill>
               </a:rPr>
-              <a:t>Участник 1</a:t>
-            </a:r>
-            <a:endParaRPr lang="en-US" sz="1400" dirty="0"/>
+              <a:t>Саша Дё</a:t>
+            </a:r>
+            <a:endParaRPr lang="en-US" sz="1300" dirty="0"/>
           </a:p>
         </p:txBody>
       </p:sp>
@@ -6309,8 +6309,8 @@
         </p:nvSpPr>
         <p:spPr>
           <a:xfrm>
-            <a:off x="548640" y="2560320"/>
-            <a:ext cx="1737360" cy="320040"/>
+            <a:off x="594360" y="1828800"/>
+            <a:ext cx="1645920" cy="274320"/>
           </a:xfrm>
           <a:prstGeom prst="rect">
             <a:avLst/>
@@ -6322,18 +6322,18 @@
           <a:bodyPr wrap="square" lIns="0" tIns="0" rIns="0" bIns="0" rtlCol="0" anchor="ctr"/>
           <a:lstStyle/>
           <a:p>
-            <a:pPr algn="ctr" indent="0" marL="0">
+            <a:pPr indent="0" marL="0">
               <a:buNone/>
             </a:pPr>
             <a:r>
-              <a:rPr lang="en-US" sz="1200" b="1" dirty="0">
+              <a:rPr lang="en-US" sz="1100" b="1" dirty="0">
                 <a:solidFill>
                   <a:schemeClr val="accent1"/>
                 </a:solidFill>
               </a:rPr>
-              <a:t>Агент и тулы</a:t>
-            </a:r>
-            <a:endParaRPr lang="en-US" sz="1200" dirty="0"/>
+              <a:t>Backend developer</a:t>
+            </a:r>
+            <a:endParaRPr lang="en-US" sz="1100" dirty="0"/>
           </a:p>
         </p:txBody>
       </p:sp>
@@ -6345,8 +6345,8 @@
         </p:nvSpPr>
         <p:spPr>
           <a:xfrm>
-            <a:off x="594360" y="2926080"/>
-            <a:ext cx="1645920" cy="1051560"/>
+            <a:off x="594360" y="2103120"/>
+            <a:ext cx="1645920" cy="548640"/>
           </a:xfrm>
           <a:prstGeom prst="rect">
             <a:avLst/>
@@ -6358,18 +6358,18 @@
           <a:bodyPr wrap="square" lIns="0" tIns="0" rIns="0" bIns="0" rtlCol="0" anchor="t"/>
           <a:lstStyle/>
           <a:p>
-            <a:pPr algn="ctr" indent="0" marL="0">
+            <a:pPr indent="0" marL="0">
               <a:buNone/>
             </a:pPr>
             <a:r>
-              <a:rPr lang="en-US" sz="1100" dirty="0">
+              <a:rPr lang="en-US" sz="1000" dirty="0">
                 <a:solidFill>
                   <a:schemeClr val="accent6"/>
                 </a:solidFill>
               </a:rPr>
-              <a:t>агентный цикл, OpenRouter, тулы погоды/маршрутов/АЗС</a:t>
-            </a:r>
-            <a:endParaRPr lang="en-US" sz="1100" dirty="0"/>
+              <a:t>агентный цикл, FastAPI, стрим шагов</a:t>
+            </a:r>
+            <a:endParaRPr lang="en-US" sz="1000" dirty="0"/>
           </a:p>
         </p:txBody>
       </p:sp>
@@ -6381,12 +6381,12 @@
         </p:nvSpPr>
         <p:spPr>
           <a:xfrm>
-            <a:off x="2542032" y="1143000"/>
-            <a:ext cx="1920240" cy="2926080"/>
+            <a:off x="2560320" y="1051560"/>
+            <a:ext cx="1920240" cy="1645920"/>
           </a:xfrm>
           <a:prstGeom prst="roundRect">
             <a:avLst>
-              <a:gd name="adj" fmla="val 5714"/>
+              <a:gd name="adj" fmla="val 6667"/>
             </a:avLst>
           </a:prstGeom>
           <a:solidFill>
@@ -6408,16 +6408,16 @@
         </p:nvSpPr>
         <p:spPr>
           <a:xfrm>
-            <a:off x="3136392" y="1325880"/>
-            <a:ext cx="731520" cy="731520"/>
+            <a:off x="2697480" y="1216152"/>
+            <a:ext cx="502920" cy="502920"/>
           </a:xfrm>
           <a:prstGeom prst="ellipse">
             <a:avLst/>
           </a:prstGeom>
           <a:solidFill>
-            <a:srgbClr val="2F7482"/>
+            <a:srgbClr val="2E6B62"/>
           </a:solidFill>
-          <a:ln w="25400">
+          <a:ln w="19050">
             <a:solidFill>
               <a:srgbClr val="FFFFFF"/>
             </a:solidFill>
@@ -6433,8 +6433,8 @@
         </p:nvSpPr>
         <p:spPr>
           <a:xfrm>
-            <a:off x="3136392" y="1325880"/>
-            <a:ext cx="731520" cy="731520"/>
+            <a:off x="2697480" y="1216152"/>
+            <a:ext cx="502920" cy="502920"/>
           </a:xfrm>
           <a:prstGeom prst="rect">
             <a:avLst/>
@@ -6450,14 +6450,14 @@
               <a:buNone/>
             </a:pPr>
             <a:r>
-              <a:rPr lang="en-US" sz="1800" b="1" dirty="0">
+              <a:rPr lang="en-US" sz="1300" b="1" dirty="0">
                 <a:solidFill>
                   <a:schemeClr val="bg1"/>
                 </a:solidFill>
               </a:rPr>
-              <a:t>У2</a:t>
-            </a:r>
-            <a:endParaRPr lang="en-US" sz="1800" dirty="0"/>
+              <a:t>АК</a:t>
+            </a:r>
+            <a:endParaRPr lang="en-US" sz="1300" dirty="0"/>
           </a:p>
         </p:txBody>
       </p:sp>
@@ -6469,8 +6469,8 @@
         </p:nvSpPr>
         <p:spPr>
           <a:xfrm>
-            <a:off x="2633472" y="2194560"/>
-            <a:ext cx="1737360" cy="365760"/>
+            <a:off x="3291840" y="1161288"/>
+            <a:ext cx="1097280" cy="640080"/>
           </a:xfrm>
           <a:prstGeom prst="rect">
             <a:avLst/>
@@ -6482,18 +6482,18 @@
           <a:bodyPr wrap="square" lIns="0" tIns="0" rIns="0" bIns="0" rtlCol="0" anchor="ctr"/>
           <a:lstStyle/>
           <a:p>
-            <a:pPr algn="ctr" indent="0" marL="0">
+            <a:pPr indent="0" marL="0">
               <a:buNone/>
             </a:pPr>
             <a:r>
-              <a:rPr lang="en-US" sz="1400" b="1" dirty="0">
+              <a:rPr lang="en-US" sz="1300" b="1" dirty="0">
                 <a:solidFill>
                   <a:schemeClr val="tx1"/>
                 </a:solidFill>
               </a:rPr>
-              <a:t>Участник 2</a:t>
-            </a:r>
-            <a:endParaRPr lang="en-US" sz="1400" dirty="0"/>
+              <a:t>Анфиса Кирсанова</a:t>
+            </a:r>
+            <a:endParaRPr lang="en-US" sz="1300" dirty="0"/>
           </a:p>
         </p:txBody>
       </p:sp>
@@ -6505,8 +6505,8 @@
         </p:nvSpPr>
         <p:spPr>
           <a:xfrm>
-            <a:off x="2633472" y="2560320"/>
-            <a:ext cx="1737360" cy="320040"/>
+            <a:off x="2697480" y="1828800"/>
+            <a:ext cx="1645920" cy="274320"/>
           </a:xfrm>
           <a:prstGeom prst="rect">
             <a:avLst/>
@@ -6518,18 +6518,18 @@
           <a:bodyPr wrap="square" lIns="0" tIns="0" rIns="0" bIns="0" rtlCol="0" anchor="ctr"/>
           <a:lstStyle/>
           <a:p>
-            <a:pPr algn="ctr" indent="0" marL="0">
+            <a:pPr indent="0" marL="0">
               <a:buNone/>
             </a:pPr>
             <a:r>
-              <a:rPr lang="en-US" sz="1200" b="1" dirty="0">
+              <a:rPr lang="en-US" sz="1100" b="1" dirty="0">
                 <a:solidFill>
                   <a:schemeClr val="accent1"/>
                 </a:solidFill>
               </a:rPr>
-              <a:t>Данные и сверка</a:t>
-            </a:r>
-            <a:endParaRPr lang="en-US" sz="1200" dirty="0"/>
+              <a:t>ML-engineer / Frontend</a:t>
+            </a:r>
+            <a:endParaRPr lang="en-US" sz="1100" dirty="0"/>
           </a:p>
         </p:txBody>
       </p:sp>
@@ -6541,8 +6541,8 @@
         </p:nvSpPr>
         <p:spPr>
           <a:xfrm>
-            <a:off x="2679192" y="2926080"/>
-            <a:ext cx="1645920" cy="1051560"/>
+            <a:off x="2697480" y="2103120"/>
+            <a:ext cx="1645920" cy="548640"/>
           </a:xfrm>
           <a:prstGeom prst="rect">
             <a:avLst/>
@@ -6554,18 +6554,18 @@
           <a:bodyPr wrap="square" lIns="0" tIns="0" rIns="0" bIns="0" rtlCol="0" anchor="t"/>
           <a:lstStyle/>
           <a:p>
-            <a:pPr algn="ctr" indent="0" marL="0">
+            <a:pPr indent="0" marL="0">
               <a:buNone/>
             </a:pPr>
             <a:r>
-              <a:rPr lang="en-US" sz="1100" dirty="0">
+              <a:rPr lang="en-US" sz="1000" dirty="0">
                 <a:solidFill>
                   <a:schemeClr val="accent6"/>
                 </a:solidFill>
               </a:rPr>
-              <a:t>датасеты Приморья, валидатор плана, guardrails</a:t>
-            </a:r>
-            <a:endParaRPr lang="en-US" sz="1100" dirty="0"/>
+              <a:t>промпты и версии агента, интерфейс</a:t>
+            </a:r>
+            <a:endParaRPr lang="en-US" sz="1000" dirty="0"/>
           </a:p>
         </p:txBody>
       </p:sp>
@@ -6577,12 +6577,12 @@
         </p:nvSpPr>
         <p:spPr>
           <a:xfrm>
-            <a:off x="4626864" y="1143000"/>
-            <a:ext cx="1920240" cy="2926080"/>
+            <a:off x="4663440" y="1051560"/>
+            <a:ext cx="1920240" cy="1645920"/>
           </a:xfrm>
           <a:prstGeom prst="roundRect">
             <a:avLst>
-              <a:gd name="adj" fmla="val 5714"/>
+              <a:gd name="adj" fmla="val 6667"/>
             </a:avLst>
           </a:prstGeom>
           <a:solidFill>
@@ -6604,16 +6604,16 @@
         </p:nvSpPr>
         <p:spPr>
           <a:xfrm>
-            <a:off x="5221224" y="1325880"/>
-            <a:ext cx="731520" cy="731520"/>
+            <a:off x="4800600" y="1216152"/>
+            <a:ext cx="502920" cy="502920"/>
           </a:xfrm>
           <a:prstGeom prst="ellipse">
             <a:avLst/>
           </a:prstGeom>
           <a:solidFill>
-            <a:srgbClr val="E8892B"/>
+            <a:srgbClr val="2F5D8A"/>
           </a:solidFill>
-          <a:ln w="25400">
+          <a:ln w="19050">
             <a:solidFill>
               <a:srgbClr val="FFFFFF"/>
             </a:solidFill>
@@ -6629,8 +6629,8 @@
         </p:nvSpPr>
         <p:spPr>
           <a:xfrm>
-            <a:off x="5221224" y="1325880"/>
-            <a:ext cx="731520" cy="731520"/>
+            <a:off x="4800600" y="1216152"/>
+            <a:ext cx="502920" cy="502920"/>
           </a:xfrm>
           <a:prstGeom prst="rect">
             <a:avLst/>
@@ -6646,14 +6646,14 @@
               <a:buNone/>
             </a:pPr>
             <a:r>
-              <a:rPr lang="en-US" sz="1800" b="1" dirty="0">
+              <a:rPr lang="en-US" sz="1300" b="1" dirty="0">
                 <a:solidFill>
                   <a:schemeClr val="bg1"/>
                 </a:solidFill>
               </a:rPr>
-              <a:t>У3</a:t>
-            </a:r>
-            <a:endParaRPr lang="en-US" sz="1800" dirty="0"/>
+              <a:t>КЯ</a:t>
+            </a:r>
+            <a:endParaRPr lang="en-US" sz="1300" dirty="0"/>
           </a:p>
         </p:txBody>
       </p:sp>
@@ -6665,8 +6665,8 @@
         </p:nvSpPr>
         <p:spPr>
           <a:xfrm>
-            <a:off x="4718304" y="2194560"/>
-            <a:ext cx="1737360" cy="365760"/>
+            <a:off x="5394960" y="1161288"/>
+            <a:ext cx="1097280" cy="640080"/>
           </a:xfrm>
           <a:prstGeom prst="rect">
             <a:avLst/>
@@ -6678,18 +6678,18 @@
           <a:bodyPr wrap="square" lIns="0" tIns="0" rIns="0" bIns="0" rtlCol="0" anchor="ctr"/>
           <a:lstStyle/>
           <a:p>
-            <a:pPr algn="ctr" indent="0" marL="0">
+            <a:pPr indent="0" marL="0">
               <a:buNone/>
             </a:pPr>
             <a:r>
-              <a:rPr lang="en-US" sz="1400" b="1" dirty="0">
+              <a:rPr lang="en-US" sz="1300" b="1" dirty="0">
                 <a:solidFill>
                   <a:schemeClr val="tx1"/>
                 </a:solidFill>
               </a:rPr>
-              <a:t>Участник 3</a:t>
-            </a:r>
-            <a:endParaRPr lang="en-US" sz="1400" dirty="0"/>
+              <a:t>Ксюша Яковлева</a:t>
+            </a:r>
+            <a:endParaRPr lang="en-US" sz="1300" dirty="0"/>
           </a:p>
         </p:txBody>
       </p:sp>
@@ -6701,8 +6701,8 @@
         </p:nvSpPr>
         <p:spPr>
           <a:xfrm>
-            <a:off x="4718304" y="2560320"/>
-            <a:ext cx="1737360" cy="320040"/>
+            <a:off x="4800600" y="1828800"/>
+            <a:ext cx="1645920" cy="274320"/>
           </a:xfrm>
           <a:prstGeom prst="rect">
             <a:avLst/>
@@ -6714,18 +6714,18 @@
           <a:bodyPr wrap="square" lIns="0" tIns="0" rIns="0" bIns="0" rtlCol="0" anchor="ctr"/>
           <a:lstStyle/>
           <a:p>
-            <a:pPr algn="ctr" indent="0" marL="0">
+            <a:pPr indent="0" marL="0">
               <a:buNone/>
             </a:pPr>
             <a:r>
-              <a:rPr lang="en-US" sz="1200" b="1" dirty="0">
+              <a:rPr lang="en-US" sz="1100" b="1" dirty="0">
                 <a:solidFill>
                   <a:schemeClr val="accent1"/>
                 </a:solidFill>
               </a:rPr>
-              <a:t>Фронт и маскот</a:t>
-            </a:r>
-            <a:endParaRPr lang="en-US" sz="1200" dirty="0"/>
+              <a:t>ML-engineer / Frontend</a:t>
+            </a:r>
+            <a:endParaRPr lang="en-US" sz="1100" dirty="0"/>
           </a:p>
         </p:txBody>
       </p:sp>
@@ -6737,8 +6737,8 @@
         </p:nvSpPr>
         <p:spPr>
           <a:xfrm>
-            <a:off x="4764024" y="2926080"/>
-            <a:ext cx="1645920" cy="1051560"/>
+            <a:off x="4800600" y="2103120"/>
+            <a:ext cx="1645920" cy="548640"/>
           </a:xfrm>
           <a:prstGeom prst="rect">
             <a:avLst/>
@@ -6750,18 +6750,18 @@
           <a:bodyPr wrap="square" lIns="0" tIns="0" rIns="0" bIns="0" rtlCol="0" anchor="t"/>
           <a:lstStyle/>
           <a:p>
-            <a:pPr algn="ctr" indent="0" marL="0">
+            <a:pPr indent="0" marL="0">
               <a:buNone/>
             </a:pPr>
             <a:r>
-              <a:rPr lang="en-US" sz="1100" dirty="0">
+              <a:rPr lang="en-US" sz="1000" dirty="0">
                 <a:solidFill>
                   <a:schemeClr val="accent6"/>
                 </a:solidFill>
               </a:rPr>
-              <a:t>грамота-рукопись, карта, SSE-летопись, Амба</a:t>
-            </a:r>
-            <a:endParaRPr lang="en-US" sz="1100" dirty="0"/>
+              <a:t>эвал и метрики, грамота и карта</a:t>
+            </a:r>
+            <a:endParaRPr lang="en-US" sz="1000" dirty="0"/>
           </a:p>
         </p:txBody>
       </p:sp>
@@ -6773,12 +6773,12 @@
         </p:nvSpPr>
         <p:spPr>
           <a:xfrm>
-            <a:off x="6711696" y="1143000"/>
-            <a:ext cx="1920240" cy="2926080"/>
+            <a:off x="6766560" y="1051560"/>
+            <a:ext cx="1920240" cy="1645920"/>
           </a:xfrm>
           <a:prstGeom prst="roundRect">
             <a:avLst>
-              <a:gd name="adj" fmla="val 5714"/>
+              <a:gd name="adj" fmla="val 6667"/>
             </a:avLst>
           </a:prstGeom>
           <a:solidFill>
@@ -6800,16 +6800,16 @@
         </p:nvSpPr>
         <p:spPr>
           <a:xfrm>
-            <a:off x="7306056" y="1325880"/>
-            <a:ext cx="731520" cy="731520"/>
+            <a:off x="6903720" y="1216152"/>
+            <a:ext cx="502920" cy="502920"/>
           </a:xfrm>
           <a:prstGeom prst="ellipse">
             <a:avLst/>
           </a:prstGeom>
           <a:solidFill>
-            <a:srgbClr val="2F6B3A"/>
+            <a:srgbClr val="8A5A00"/>
           </a:solidFill>
-          <a:ln w="25400">
+          <a:ln w="19050">
             <a:solidFill>
               <a:srgbClr val="FFFFFF"/>
             </a:solidFill>
@@ -6825,8 +6825,8 @@
         </p:nvSpPr>
         <p:spPr>
           <a:xfrm>
-            <a:off x="7306056" y="1325880"/>
-            <a:ext cx="731520" cy="731520"/>
+            <a:off x="6903720" y="1216152"/>
+            <a:ext cx="502920" cy="502920"/>
           </a:xfrm>
           <a:prstGeom prst="rect">
             <a:avLst/>
@@ -6842,14 +6842,14 @@
               <a:buNone/>
             </a:pPr>
             <a:r>
-              <a:rPr lang="en-US" sz="1800" b="1" dirty="0">
+              <a:rPr lang="en-US" sz="1300" b="1" dirty="0">
                 <a:solidFill>
                   <a:schemeClr val="bg1"/>
                 </a:solidFill>
               </a:rPr>
-              <a:t>У4</a:t>
-            </a:r>
-            <a:endParaRPr lang="en-US" sz="1800" dirty="0"/>
+              <a:t>ГБ</a:t>
+            </a:r>
+            <a:endParaRPr lang="en-US" sz="1300" dirty="0"/>
           </a:p>
         </p:txBody>
       </p:sp>
@@ -6861,8 +6861,8 @@
         </p:nvSpPr>
         <p:spPr>
           <a:xfrm>
-            <a:off x="6803136" y="2194560"/>
-            <a:ext cx="1737360" cy="365760"/>
+            <a:off x="7498080" y="1161288"/>
+            <a:ext cx="1097280" cy="640080"/>
           </a:xfrm>
           <a:prstGeom prst="rect">
             <a:avLst/>
@@ -6874,31 +6874,191 @@
           <a:bodyPr wrap="square" lIns="0" tIns="0" rIns="0" bIns="0" rtlCol="0" anchor="ctr"/>
           <a:lstStyle/>
           <a:p>
+            <a:pPr indent="0" marL="0">
+              <a:buNone/>
+            </a:pPr>
+            <a:r>
+              <a:rPr lang="en-US" sz="1300" b="1" dirty="0">
+                <a:solidFill>
+                  <a:schemeClr val="tx1"/>
+                </a:solidFill>
+              </a:rPr>
+              <a:t>Глеб Бессолицин</a:t>
+            </a:r>
+            <a:endParaRPr lang="en-US" sz="1300" dirty="0"/>
+          </a:p>
+        </p:txBody>
+      </p:sp>
+      <p:sp>
+        <p:nvSpPr>
+          <p:cNvPr id="25" name="Text 23"/>
+          <p:cNvSpPr txBox="1"/>
+          <p:nvPr/>
+        </p:nvSpPr>
+        <p:spPr>
+          <a:xfrm>
+            <a:off x="6903720" y="1828800"/>
+            <a:ext cx="1645920" cy="274320"/>
+          </a:xfrm>
+          <a:prstGeom prst="rect">
+            <a:avLst/>
+          </a:prstGeom>
+          <a:noFill/>
+          <a:ln/>
+        </p:spPr>
+        <p:txBody>
+          <a:bodyPr wrap="square" lIns="0" tIns="0" rIns="0" bIns="0" rtlCol="0" anchor="ctr"/>
+          <a:lstStyle/>
+          <a:p>
+            <a:pPr indent="0" marL="0">
+              <a:buNone/>
+            </a:pPr>
+            <a:r>
+              <a:rPr lang="en-US" sz="1100" b="1" dirty="0">
+                <a:solidFill>
+                  <a:schemeClr val="accent1"/>
+                </a:solidFill>
+              </a:rPr>
+              <a:t>Backend developer</a:t>
+            </a:r>
+            <a:endParaRPr lang="en-US" sz="1100" dirty="0"/>
+          </a:p>
+        </p:txBody>
+      </p:sp>
+      <p:sp>
+        <p:nvSpPr>
+          <p:cNvPr id="26" name="Text 24"/>
+          <p:cNvSpPr txBox="1"/>
+          <p:nvPr/>
+        </p:nvSpPr>
+        <p:spPr>
+          <a:xfrm>
+            <a:off x="6903720" y="2103120"/>
+            <a:ext cx="1645920" cy="548640"/>
+          </a:xfrm>
+          <a:prstGeom prst="rect">
+            <a:avLst/>
+          </a:prstGeom>
+          <a:noFill/>
+          <a:ln/>
+        </p:spPr>
+        <p:txBody>
+          <a:bodyPr wrap="square" lIns="0" tIns="0" rIns="0" bIns="0" rtlCol="0" anchor="t"/>
+          <a:lstStyle/>
+          <a:p>
+            <a:pPr indent="0" marL="0">
+              <a:buNone/>
+            </a:pPr>
+            <a:r>
+              <a:rPr lang="en-US" sz="1000" dirty="0">
+                <a:solidFill>
+                  <a:schemeClr val="accent6"/>
+                </a:solidFill>
+              </a:rPr>
+              <a:t>тулы и источники данных, деплой</a:t>
+            </a:r>
+            <a:endParaRPr lang="en-US" sz="1000" dirty="0"/>
+          </a:p>
+        </p:txBody>
+      </p:sp>
+      <p:sp>
+        <p:nvSpPr>
+          <p:cNvPr id="27" name="member-5"/>
+          <p:cNvSpPr/>
+          <p:nvPr/>
+        </p:nvSpPr>
+        <p:spPr>
+          <a:xfrm>
+            <a:off x="1508760" y="2880360"/>
+            <a:ext cx="1920240" cy="1645920"/>
+          </a:xfrm>
+          <a:prstGeom prst="roundRect">
+            <a:avLst>
+              <a:gd name="adj" fmla="val 6667"/>
+            </a:avLst>
+          </a:prstGeom>
+          <a:solidFill>
+            <a:schemeClr val="bg2"/>
+          </a:solidFill>
+          <a:ln w="12700">
+            <a:solidFill>
+              <a:schemeClr val="bg2"/>
+            </a:solidFill>
+            <a:prstDash val="solid"/>
+          </a:ln>
+        </p:spPr>
+      </p:sp>
+      <p:sp>
+        <p:nvSpPr>
+          <p:cNvPr id="28" name="avatar-5"/>
+          <p:cNvSpPr/>
+          <p:nvPr/>
+        </p:nvSpPr>
+        <p:spPr>
+          <a:xfrm>
+            <a:off x="1645920" y="3044952"/>
+            <a:ext cx="502920" cy="502920"/>
+          </a:xfrm>
+          <a:prstGeom prst="ellipse">
+            <a:avLst/>
+          </a:prstGeom>
+          <a:solidFill>
+            <a:srgbClr val="6B3FA0"/>
+          </a:solidFill>
+          <a:ln w="19050">
+            <a:solidFill>
+              <a:srgbClr val="FFFFFF"/>
+            </a:solidFill>
+            <a:prstDash val="solid"/>
+          </a:ln>
+        </p:spPr>
+      </p:sp>
+      <p:sp>
+        <p:nvSpPr>
+          <p:cNvPr id="29" name="Text 27"/>
+          <p:cNvSpPr txBox="1"/>
+          <p:nvPr/>
+        </p:nvSpPr>
+        <p:spPr>
+          <a:xfrm>
+            <a:off x="1645920" y="3044952"/>
+            <a:ext cx="502920" cy="502920"/>
+          </a:xfrm>
+          <a:prstGeom prst="rect">
+            <a:avLst/>
+          </a:prstGeom>
+          <a:noFill/>
+          <a:ln/>
+        </p:spPr>
+        <p:txBody>
+          <a:bodyPr wrap="square" lIns="0" tIns="0" rIns="0" bIns="0" rtlCol="0" anchor="ctr"/>
+          <a:lstStyle/>
+          <a:p>
             <a:pPr algn="ctr" indent="0" marL="0">
               <a:buNone/>
             </a:pPr>
             <a:r>
-              <a:rPr lang="en-US" sz="1400" b="1" dirty="0">
-                <a:solidFill>
-                  <a:schemeClr val="tx1"/>
-                </a:solidFill>
-              </a:rPr>
-              <a:t>Участник 4</a:t>
-            </a:r>
-            <a:endParaRPr lang="en-US" sz="1400" dirty="0"/>
-          </a:p>
-        </p:txBody>
-      </p:sp>
-      <p:sp>
-        <p:nvSpPr>
-          <p:cNvPr id="25" name="Text 23"/>
+              <a:rPr lang="en-US" sz="1300" b="1" dirty="0">
+                <a:solidFill>
+                  <a:schemeClr val="bg1"/>
+                </a:solidFill>
+              </a:rPr>
+              <a:t>АГ</a:t>
+            </a:r>
+            <a:endParaRPr lang="en-US" sz="1300" dirty="0"/>
+          </a:p>
+        </p:txBody>
+      </p:sp>
+      <p:sp>
+        <p:nvSpPr>
+          <p:cNvPr id="30" name="Text 28"/>
           <p:cNvSpPr txBox="1"/>
           <p:nvPr/>
         </p:nvSpPr>
         <p:spPr>
           <a:xfrm>
-            <a:off x="6803136" y="2560320"/>
-            <a:ext cx="1737360" cy="320040"/>
+            <a:off x="2240280" y="2990088"/>
+            <a:ext cx="1097280" cy="640080"/>
           </a:xfrm>
           <a:prstGeom prst="rect">
             <a:avLst/>
@@ -6910,31 +7070,191 @@
           <a:bodyPr wrap="square" lIns="0" tIns="0" rIns="0" bIns="0" rtlCol="0" anchor="ctr"/>
           <a:lstStyle/>
           <a:p>
+            <a:pPr indent="0" marL="0">
+              <a:buNone/>
+            </a:pPr>
+            <a:r>
+              <a:rPr lang="en-US" sz="1300" b="1" dirty="0">
+                <a:solidFill>
+                  <a:schemeClr val="tx1"/>
+                </a:solidFill>
+              </a:rPr>
+              <a:t>Арнольд Гончаров</a:t>
+            </a:r>
+            <a:endParaRPr lang="en-US" sz="1300" dirty="0"/>
+          </a:p>
+        </p:txBody>
+      </p:sp>
+      <p:sp>
+        <p:nvSpPr>
+          <p:cNvPr id="31" name="Text 29"/>
+          <p:cNvSpPr txBox="1"/>
+          <p:nvPr/>
+        </p:nvSpPr>
+        <p:spPr>
+          <a:xfrm>
+            <a:off x="1645920" y="3657600"/>
+            <a:ext cx="1645920" cy="274320"/>
+          </a:xfrm>
+          <a:prstGeom prst="rect">
+            <a:avLst/>
+          </a:prstGeom>
+          <a:noFill/>
+          <a:ln/>
+        </p:spPr>
+        <p:txBody>
+          <a:bodyPr wrap="square" lIns="0" tIns="0" rIns="0" bIns="0" rtlCol="0" anchor="ctr"/>
+          <a:lstStyle/>
+          <a:p>
+            <a:pPr indent="0" marL="0">
+              <a:buNone/>
+            </a:pPr>
+            <a:r>
+              <a:rPr lang="en-US" sz="1100" b="1" dirty="0">
+                <a:solidFill>
+                  <a:schemeClr val="accent1"/>
+                </a:solidFill>
+              </a:rPr>
+              <a:t>QA-engineer</a:t>
+            </a:r>
+            <a:endParaRPr lang="en-US" sz="1100" dirty="0"/>
+          </a:p>
+        </p:txBody>
+      </p:sp>
+      <p:sp>
+        <p:nvSpPr>
+          <p:cNvPr id="32" name="Text 30"/>
+          <p:cNvSpPr txBox="1"/>
+          <p:nvPr/>
+        </p:nvSpPr>
+        <p:spPr>
+          <a:xfrm>
+            <a:off x="1645920" y="3931920"/>
+            <a:ext cx="1645920" cy="548640"/>
+          </a:xfrm>
+          <a:prstGeom prst="rect">
+            <a:avLst/>
+          </a:prstGeom>
+          <a:noFill/>
+          <a:ln/>
+        </p:spPr>
+        <p:txBody>
+          <a:bodyPr wrap="square" lIns="0" tIns="0" rIns="0" bIns="0" rtlCol="0" anchor="t"/>
+          <a:lstStyle/>
+          <a:p>
+            <a:pPr indent="0" marL="0">
+              <a:buNone/>
+            </a:pPr>
+            <a:r>
+              <a:rPr lang="en-US" sz="1000" dirty="0">
+                <a:solidFill>
+                  <a:schemeClr val="accent6"/>
+                </a:solidFill>
+              </a:rPr>
+              <a:t>тесты, guardrails, сценарии эвала</a:t>
+            </a:r>
+            <a:endParaRPr lang="en-US" sz="1000" dirty="0"/>
+          </a:p>
+        </p:txBody>
+      </p:sp>
+      <p:sp>
+        <p:nvSpPr>
+          <p:cNvPr id="33" name="member-6"/>
+          <p:cNvSpPr/>
+          <p:nvPr/>
+        </p:nvSpPr>
+        <p:spPr>
+          <a:xfrm>
+            <a:off x="3611880" y="2880360"/>
+            <a:ext cx="1920240" cy="1645920"/>
+          </a:xfrm>
+          <a:prstGeom prst="roundRect">
+            <a:avLst>
+              <a:gd name="adj" fmla="val 6667"/>
+            </a:avLst>
+          </a:prstGeom>
+          <a:solidFill>
+            <a:schemeClr val="bg2"/>
+          </a:solidFill>
+          <a:ln w="12700">
+            <a:solidFill>
+              <a:schemeClr val="bg2"/>
+            </a:solidFill>
+            <a:prstDash val="solid"/>
+          </a:ln>
+        </p:spPr>
+      </p:sp>
+      <p:sp>
+        <p:nvSpPr>
+          <p:cNvPr id="34" name="avatar-6"/>
+          <p:cNvSpPr/>
+          <p:nvPr/>
+        </p:nvSpPr>
+        <p:spPr>
+          <a:xfrm>
+            <a:off x="3749040" y="3044952"/>
+            <a:ext cx="502920" cy="502920"/>
+          </a:xfrm>
+          <a:prstGeom prst="ellipse">
+            <a:avLst/>
+          </a:prstGeom>
+          <a:solidFill>
+            <a:srgbClr val="0F2D3A"/>
+          </a:solidFill>
+          <a:ln w="19050">
+            <a:solidFill>
+              <a:srgbClr val="FFFFFF"/>
+            </a:solidFill>
+            <a:prstDash val="solid"/>
+          </a:ln>
+        </p:spPr>
+      </p:sp>
+      <p:sp>
+        <p:nvSpPr>
+          <p:cNvPr id="35" name="Text 33"/>
+          <p:cNvSpPr txBox="1"/>
+          <p:nvPr/>
+        </p:nvSpPr>
+        <p:spPr>
+          <a:xfrm>
+            <a:off x="3749040" y="3044952"/>
+            <a:ext cx="502920" cy="502920"/>
+          </a:xfrm>
+          <a:prstGeom prst="rect">
+            <a:avLst/>
+          </a:prstGeom>
+          <a:noFill/>
+          <a:ln/>
+        </p:spPr>
+        <p:txBody>
+          <a:bodyPr wrap="square" lIns="0" tIns="0" rIns="0" bIns="0" rtlCol="0" anchor="ctr"/>
+          <a:lstStyle/>
+          <a:p>
             <a:pPr algn="ctr" indent="0" marL="0">
               <a:buNone/>
             </a:pPr>
             <a:r>
-              <a:rPr lang="en-US" sz="1200" b="1" dirty="0">
-                <a:solidFill>
-                  <a:schemeClr val="accent1"/>
-                </a:solidFill>
-              </a:rPr>
-              <a:t>Эвал и деплой</a:t>
-            </a:r>
-            <a:endParaRPr lang="en-US" sz="1200" dirty="0"/>
-          </a:p>
-        </p:txBody>
-      </p:sp>
-      <p:sp>
-        <p:nvSpPr>
-          <p:cNvPr id="26" name="Text 24"/>
+              <a:rPr lang="en-US" sz="1300" b="1" dirty="0">
+                <a:solidFill>
+                  <a:schemeClr val="bg1"/>
+                </a:solidFill>
+              </a:rPr>
+              <a:t>O5</a:t>
+            </a:r>
+            <a:endParaRPr lang="en-US" sz="1300" dirty="0"/>
+          </a:p>
+        </p:txBody>
+      </p:sp>
+      <p:sp>
+        <p:nvSpPr>
+          <p:cNvPr id="36" name="Text 34"/>
           <p:cNvSpPr txBox="1"/>
           <p:nvPr/>
         </p:nvSpPr>
         <p:spPr>
           <a:xfrm>
-            <a:off x="6848856" y="2926080"/>
-            <a:ext cx="1645920" cy="1051560"/>
+            <a:off x="4343400" y="2990088"/>
+            <a:ext cx="1097280" cy="640080"/>
           </a:xfrm>
           <a:prstGeom prst="rect">
             <a:avLst/>
@@ -6943,58 +7263,194 @@
           <a:ln/>
         </p:spPr>
         <p:txBody>
+          <a:bodyPr wrap="square" lIns="0" tIns="0" rIns="0" bIns="0" rtlCol="0" anchor="ctr"/>
+          <a:lstStyle/>
+          <a:p>
+            <a:pPr indent="0" marL="0">
+              <a:buNone/>
+            </a:pPr>
+            <a:r>
+              <a:rPr lang="en-US" sz="1300" b="1" dirty="0">
+                <a:solidFill>
+                  <a:schemeClr val="tx1"/>
+                </a:solidFill>
+              </a:rPr>
+              <a:t>Opus 5.5</a:t>
+            </a:r>
+            <a:endParaRPr lang="en-US" sz="1300" dirty="0"/>
+          </a:p>
+        </p:txBody>
+      </p:sp>
+      <p:sp>
+        <p:nvSpPr>
+          <p:cNvPr id="37" name="Text 35"/>
+          <p:cNvSpPr txBox="1"/>
+          <p:nvPr/>
+        </p:nvSpPr>
+        <p:spPr>
+          <a:xfrm>
+            <a:off x="3749040" y="3657600"/>
+            <a:ext cx="1645920" cy="274320"/>
+          </a:xfrm>
+          <a:prstGeom prst="rect">
+            <a:avLst/>
+          </a:prstGeom>
+          <a:noFill/>
+          <a:ln/>
+        </p:spPr>
+        <p:txBody>
+          <a:bodyPr wrap="square" lIns="0" tIns="0" rIns="0" bIns="0" rtlCol="0" anchor="ctr"/>
+          <a:lstStyle/>
+          <a:p>
+            <a:pPr indent="0" marL="0">
+              <a:buNone/>
+            </a:pPr>
+            <a:r>
+              <a:rPr lang="en-US" sz="1100" b="1" dirty="0">
+                <a:solidFill>
+                  <a:schemeClr val="accent1"/>
+                </a:solidFill>
+              </a:rPr>
+              <a:t>Team Lead</a:t>
+            </a:r>
+            <a:endParaRPr lang="en-US" sz="1100" dirty="0"/>
+          </a:p>
+        </p:txBody>
+      </p:sp>
+      <p:sp>
+        <p:nvSpPr>
+          <p:cNvPr id="38" name="Text 36"/>
+          <p:cNvSpPr txBox="1"/>
+          <p:nvPr/>
+        </p:nvSpPr>
+        <p:spPr>
+          <a:xfrm>
+            <a:off x="3749040" y="3931920"/>
+            <a:ext cx="1645920" cy="548640"/>
+          </a:xfrm>
+          <a:prstGeom prst="rect">
+            <a:avLst/>
+          </a:prstGeom>
+          <a:noFill/>
+          <a:ln/>
+        </p:spPr>
+        <p:txBody>
           <a:bodyPr wrap="square" lIns="0" tIns="0" rIns="0" bIns="0" rtlCol="0" anchor="t"/>
+          <a:lstStyle/>
+          <a:p>
+            <a:pPr indent="0" marL="0">
+              <a:buNone/>
+            </a:pPr>
+            <a:r>
+              <a:rPr lang="en-US" sz="1000" dirty="0">
+                <a:solidFill>
+                  <a:schemeClr val="accent6"/>
+                </a:solidFill>
+              </a:rPr>
+              <a:t>архитектура, координация, ревью</a:t>
+            </a:r>
+            <a:endParaRPr lang="en-US" sz="1000" dirty="0"/>
+          </a:p>
+        </p:txBody>
+      </p:sp>
+      <p:sp>
+        <p:nvSpPr>
+          <p:cNvPr id="39" name="member-7"/>
+          <p:cNvSpPr/>
+          <p:nvPr/>
+        </p:nvSpPr>
+        <p:spPr>
+          <a:xfrm>
+            <a:off x="5715000" y="2880360"/>
+            <a:ext cx="1920240" cy="1645920"/>
+          </a:xfrm>
+          <a:prstGeom prst="roundRect">
+            <a:avLst>
+              <a:gd name="adj" fmla="val 6667"/>
+            </a:avLst>
+          </a:prstGeom>
+          <a:solidFill>
+            <a:schemeClr val="bg2"/>
+          </a:solidFill>
+          <a:ln w="12700">
+            <a:solidFill>
+              <a:schemeClr val="bg2"/>
+            </a:solidFill>
+            <a:prstDash val="solid"/>
+          </a:ln>
+        </p:spPr>
+      </p:sp>
+      <p:sp>
+        <p:nvSpPr>
+          <p:cNvPr id="40" name="avatar-7"/>
+          <p:cNvSpPr/>
+          <p:nvPr/>
+        </p:nvSpPr>
+        <p:spPr>
+          <a:xfrm>
+            <a:off x="5852160" y="3044952"/>
+            <a:ext cx="502920" cy="502920"/>
+          </a:xfrm>
+          <a:prstGeom prst="ellipse">
+            <a:avLst/>
+          </a:prstGeom>
+          <a:solidFill>
+            <a:srgbClr val="9C2F6B"/>
+          </a:solidFill>
+          <a:ln w="19050">
+            <a:solidFill>
+              <a:srgbClr val="FFFFFF"/>
+            </a:solidFill>
+            <a:prstDash val="solid"/>
+          </a:ln>
+        </p:spPr>
+      </p:sp>
+      <p:sp>
+        <p:nvSpPr>
+          <p:cNvPr id="41" name="Text 39"/>
+          <p:cNvSpPr txBox="1"/>
+          <p:nvPr/>
+        </p:nvSpPr>
+        <p:spPr>
+          <a:xfrm>
+            <a:off x="5852160" y="3044952"/>
+            <a:ext cx="502920" cy="502920"/>
+          </a:xfrm>
+          <a:prstGeom prst="rect">
+            <a:avLst/>
+          </a:prstGeom>
+          <a:noFill/>
+          <a:ln/>
+        </p:spPr>
+        <p:txBody>
+          <a:bodyPr wrap="square" lIns="0" tIns="0" rIns="0" bIns="0" rtlCol="0" anchor="ctr"/>
           <a:lstStyle/>
           <a:p>
             <a:pPr algn="ctr" indent="0" marL="0">
               <a:buNone/>
             </a:pPr>
             <a:r>
-              <a:rPr lang="en-US" sz="1100" dirty="0">
-                <a:solidFill>
-                  <a:schemeClr val="accent6"/>
-                </a:solidFill>
-              </a:rPr>
-              <a:t>20 запросов, метрики, сравнение версий, VM и Docker</a:t>
-            </a:r>
-            <a:endParaRPr lang="en-US" sz="1100" dirty="0"/>
-          </a:p>
-        </p:txBody>
-      </p:sp>
-      <p:pic>
-        <p:nvPicPr>
-          <p:cNvPr id="27" name="mascot-small" descr="preencoded.png">    </p:cNvPr>
-          <p:cNvPicPr>
-            <a:picLocks noChangeAspect="1"/>
-          </p:cNvPicPr>
-          <p:nvPr/>
-        </p:nvPicPr>
-        <p:blipFill>
-          <a:blip r:embed="rId1"/>
-          <a:stretch>
-            <a:fillRect/>
-          </a:stretch>
-        </p:blipFill>
-        <p:spPr>
-          <a:xfrm>
-            <a:off x="7955280" y="4069080"/>
-            <a:ext cx="640080" cy="694944"/>
-          </a:xfrm>
-          <a:prstGeom prst="rect">
-            <a:avLst/>
-          </a:prstGeom>
-        </p:spPr>
-      </p:pic>
-      <p:sp>
-        <p:nvSpPr>
-          <p:cNvPr id="28" name="Text 25"/>
+              <a:rPr lang="en-US" sz="1300" b="1" dirty="0">
+                <a:solidFill>
+                  <a:schemeClr val="bg1"/>
+                </a:solidFill>
+              </a:rPr>
+              <a:t>L6</a:t>
+            </a:r>
+            <a:endParaRPr lang="en-US" sz="1300" dirty="0"/>
+          </a:p>
+        </p:txBody>
+      </p:sp>
+      <p:sp>
+        <p:nvSpPr>
+          <p:cNvPr id="42" name="Text 40"/>
           <p:cNvSpPr txBox="1"/>
           <p:nvPr/>
         </p:nvSpPr>
         <p:spPr>
           <a:xfrm>
-            <a:off x="4754880" y="4251960"/>
-            <a:ext cx="3108960" cy="320040"/>
+            <a:off x="6446520" y="2990088"/>
+            <a:ext cx="1097280" cy="640080"/>
           </a:xfrm>
           <a:prstGeom prst="rect">
             <a:avLst/>
@@ -7006,18 +7462,90 @@
           <a:bodyPr wrap="square" lIns="0" tIns="0" rIns="0" bIns="0" rtlCol="0" anchor="ctr"/>
           <a:lstStyle/>
           <a:p>
-            <a:pPr algn="r" indent="0" marL="0">
+            <a:pPr indent="0" marL="0">
               <a:buNone/>
             </a:pPr>
             <a:r>
-              <a:rPr lang="en-US" sz="1100" i="1" dirty="0">
+              <a:rPr lang="en-US" sz="1300" b="1" dirty="0">
+                <a:solidFill>
+                  <a:schemeClr val="tx1"/>
+                </a:solidFill>
+              </a:rPr>
+              <a:t>Luna 6</a:t>
+            </a:r>
+            <a:endParaRPr lang="en-US" sz="1300" dirty="0"/>
+          </a:p>
+        </p:txBody>
+      </p:sp>
+      <p:sp>
+        <p:nvSpPr>
+          <p:cNvPr id="43" name="Text 41"/>
+          <p:cNvSpPr txBox="1"/>
+          <p:nvPr/>
+        </p:nvSpPr>
+        <p:spPr>
+          <a:xfrm>
+            <a:off x="5852160" y="3657600"/>
+            <a:ext cx="1645920" cy="274320"/>
+          </a:xfrm>
+          <a:prstGeom prst="rect">
+            <a:avLst/>
+          </a:prstGeom>
+          <a:noFill/>
+          <a:ln/>
+        </p:spPr>
+        <p:txBody>
+          <a:bodyPr wrap="square" lIns="0" tIns="0" rIns="0" bIns="0" rtlCol="0" anchor="ctr"/>
+          <a:lstStyle/>
+          <a:p>
+            <a:pPr indent="0" marL="0">
+              <a:buNone/>
+            </a:pPr>
+            <a:r>
+              <a:rPr lang="en-US" sz="1100" b="1" dirty="0">
+                <a:solidFill>
+                  <a:schemeClr val="accent1"/>
+                </a:solidFill>
+              </a:rPr>
+              <a:t>Debug-engineer</a:t>
+            </a:r>
+            <a:endParaRPr lang="en-US" sz="1100" dirty="0"/>
+          </a:p>
+        </p:txBody>
+      </p:sp>
+      <p:sp>
+        <p:nvSpPr>
+          <p:cNvPr id="44" name="Text 42"/>
+          <p:cNvSpPr txBox="1"/>
+          <p:nvPr/>
+        </p:nvSpPr>
+        <p:spPr>
+          <a:xfrm>
+            <a:off x="5852160" y="3931920"/>
+            <a:ext cx="1645920" cy="548640"/>
+          </a:xfrm>
+          <a:prstGeom prst="rect">
+            <a:avLst/>
+          </a:prstGeom>
+          <a:noFill/>
+          <a:ln/>
+        </p:spPr>
+        <p:txBody>
+          <a:bodyPr wrap="square" lIns="0" tIns="0" rIns="0" bIns="0" rtlCol="0" anchor="t"/>
+          <a:lstStyle/>
+          <a:p>
+            <a:pPr indent="0" marL="0">
+              <a:buNone/>
+            </a:pPr>
+            <a:r>
+              <a:rPr lang="en-US" sz="1000" dirty="0">
                 <a:solidFill>
                   <a:schemeClr val="accent6"/>
                 </a:solidFill>
               </a:rPr>
-              <a:t>и Амба — талисман и голос грамот</a:t>
-            </a:r>
-            <a:endParaRPr lang="en-US" sz="1100" dirty="0"/>
+              <a:t>отладка, поиск и разбор багов</a:t>
+            </a:r>
+            <a:endParaRPr lang="en-US" sz="1000" dirty="0"/>
           </a:p>
         </p:txBody>
       </p:sp>
@@ -7051,7 +7579,7 @@
             <a:lvl1pPr>
               <a:defRPr sz="900">
                 <a:solidFill>
-                  <a:srgbClr val="7D6650"/>
+                  <a:srgbClr val="6B8590"/>
                 </a:solidFill>
               </a:defRPr>
             </a:lvl1pPr>
@@ -7122,9 +7650,9 @@
                 <a:solidFill>
                   <a:schemeClr val="tx2"/>
                 </a:solidFill>
-                <a:latin typeface="Bookman Old Style" pitchFamily="34" charset="0"/>
-                <a:ea typeface="Bookman Old Style" pitchFamily="34" charset="-122"/>
-                <a:cs typeface="Bookman Old Style" pitchFamily="34" charset="-120"/>
+                <a:latin typeface="Arial" pitchFamily="34" charset="0"/>
+                <a:ea typeface="Arial" pitchFamily="34" charset="-122"/>
+                <a:cs typeface="Arial" pitchFamily="34" charset="-120"/>
               </a:rPr>
               <a:t>Как повторить самостоятельно</a:t>
             </a:r>
@@ -8176,7 +8704,7 @@
             <a:lvl1pPr>
               <a:defRPr sz="900">
                 <a:solidFill>
-                  <a:srgbClr val="7D6650"/>
+                  <a:srgbClr val="6B8590"/>
                 </a:solidFill>
               </a:defRPr>
             </a:lvl1pPr>
@@ -8247,9 +8775,9 @@
                 <a:solidFill>
                   <a:schemeClr val="bg2"/>
                 </a:solidFill>
-                <a:latin typeface="Bookman Old Style" pitchFamily="34" charset="0"/>
-                <a:ea typeface="Bookman Old Style" pitchFamily="34" charset="-122"/>
-                <a:cs typeface="Bookman Old Style" pitchFamily="34" charset="-120"/>
+                <a:latin typeface="Arial" pitchFamily="34" charset="0"/>
+                <a:ea typeface="Arial" pitchFamily="34" charset="-122"/>
+                <a:cs typeface="Arial" pitchFamily="34" charset="-120"/>
               </a:rPr>
               <a:t>Вопросы? И в путь!</a:t>
             </a:r>
@@ -8349,11 +8877,11 @@
             <a:r>
               <a:rPr lang="en-US" sz="1200" i="1" dirty="0">
                 <a:solidFill>
-                  <a:srgbClr val="D4A63A"/>
-                </a:solidFill>
-                <a:latin typeface="Bookman Old Style" pitchFamily="34" charset="0"/>
-                <a:ea typeface="Bookman Old Style" pitchFamily="34" charset="-122"/>
-                <a:cs typeface="Bookman Old Style" pitchFamily="34" charset="-120"/>
+                  <a:srgbClr val="F5A15F"/>
+                </a:solidFill>
+                <a:latin typeface="Arial" pitchFamily="34" charset="0"/>
+                <a:ea typeface="Arial" pitchFamily="34" charset="-122"/>
+                <a:cs typeface="Arial" pitchFamily="34" charset="-120"/>
               </a:rPr>
               <a:t>Писано тигрёнкомъ Амбою лѣта 7535</a:t>
             </a:r>
@@ -8417,9 +8945,9 @@
                 <a:solidFill>
                   <a:schemeClr val="tx2"/>
                 </a:solidFill>
-                <a:latin typeface="Bookman Old Style" pitchFamily="34" charset="0"/>
-                <a:ea typeface="Bookman Old Style" pitchFamily="34" charset="-122"/>
-                <a:cs typeface="Bookman Old Style" pitchFamily="34" charset="-120"/>
+                <a:latin typeface="Arial" pitchFamily="34" charset="0"/>
+                <a:ea typeface="Arial" pitchFamily="34" charset="-122"/>
+                <a:cs typeface="Arial" pitchFamily="34" charset="-120"/>
               </a:rPr>
               <a:t>Какую проблему решаем</a:t>
             </a:r>
@@ -8882,9 +9410,9 @@
                 <a:solidFill>
                   <a:schemeClr val="accent1"/>
                 </a:solidFill>
-                <a:latin typeface="Bookman Old Style" pitchFamily="34" charset="0"/>
-                <a:ea typeface="Bookman Old Style" pitchFamily="34" charset="-122"/>
-                <a:cs typeface="Bookman Old Style" pitchFamily="34" charset="-120"/>
+                <a:latin typeface="Arial" pitchFamily="34" charset="0"/>
+                <a:ea typeface="Arial" pitchFamily="34" charset="-122"/>
+                <a:cs typeface="Arial" pitchFamily="34" charset="-120"/>
               </a:rPr>
               <a:t>Для кого</a:t>
             </a:r>
@@ -9016,7 +9544,7 @@
             <a:lvl1pPr>
               <a:defRPr sz="900">
                 <a:solidFill>
-                  <a:srgbClr val="7D6650"/>
+                  <a:srgbClr val="6B8590"/>
                 </a:solidFill>
               </a:defRPr>
             </a:lvl1pPr>
@@ -9087,9 +9615,9 @@
                 <a:solidFill>
                   <a:schemeClr val="tx2"/>
                 </a:solidFill>
-                <a:latin typeface="Bookman Old Style" pitchFamily="34" charset="0"/>
-                <a:ea typeface="Bookman Old Style" pitchFamily="34" charset="-122"/>
-                <a:cs typeface="Bookman Old Style" pitchFamily="34" charset="-120"/>
+                <a:latin typeface="Arial" pitchFamily="34" charset="0"/>
+                <a:ea typeface="Arial" pitchFamily="34" charset="-122"/>
+                <a:cs typeface="Arial" pitchFamily="34" charset="-120"/>
               </a:rPr>
               <a:t>Чем отличаемся от существующих решений</a:t>
             </a:r>
@@ -9141,7 +9669,7 @@
                   <a:tcPr marL="73152" marR="73152" marT="73152" marB="73152" anchor="ctr">
                     <a:lnL w="6350" cap="flat" cmpd="sng" algn="ctr">
                       <a:solidFill>
-                        <a:srgbClr val="E2D3B0"/>
+                        <a:srgbClr val="D5E0E3"/>
                       </a:solidFill>
                       <a:prstDash val="solid"/>
                       <a:round/>
@@ -9150,7 +9678,7 @@
                     </a:lnL>
                     <a:lnR w="6350" cap="flat" cmpd="sng" algn="ctr">
                       <a:solidFill>
-                        <a:srgbClr val="E2D3B0"/>
+                        <a:srgbClr val="D5E0E3"/>
                       </a:solidFill>
                       <a:prstDash val="solid"/>
                       <a:round/>
@@ -9159,7 +9687,7 @@
                     </a:lnR>
                     <a:lnT w="6350" cap="flat" cmpd="sng" algn="ctr">
                       <a:solidFill>
-                        <a:srgbClr val="E2D3B0"/>
+                        <a:srgbClr val="D5E0E3"/>
                       </a:solidFill>
                       <a:prstDash val="solid"/>
                       <a:round/>
@@ -9168,7 +9696,7 @@
                     </a:lnT>
                     <a:lnB w="6350" cap="flat" cmpd="sng" algn="ctr">
                       <a:solidFill>
-                        <a:srgbClr val="E2D3B0"/>
+                        <a:srgbClr val="D5E0E3"/>
                       </a:solidFill>
                       <a:prstDash val="solid"/>
                       <a:round/>
@@ -9176,7 +9704,7 @@
                       <a:tailEnd type="none" w="med" len="med"/>
                     </a:lnB>
                     <a:solidFill>
-                      <a:srgbClr val="0C2630"/>
+                      <a:srgbClr val="0F2D3A"/>
                     </a:solidFill>
                   </a:tcPr>
                 </a:tc>
@@ -9202,7 +9730,7 @@
                   <a:tcPr marL="73152" marR="73152" marT="73152" marB="73152" anchor="ctr">
                     <a:lnL w="6350" cap="flat" cmpd="sng" algn="ctr">
                       <a:solidFill>
-                        <a:srgbClr val="E2D3B0"/>
+                        <a:srgbClr val="D5E0E3"/>
                       </a:solidFill>
                       <a:prstDash val="solid"/>
                       <a:round/>
@@ -9211,7 +9739,7 @@
                     </a:lnL>
                     <a:lnR w="6350" cap="flat" cmpd="sng" algn="ctr">
                       <a:solidFill>
-                        <a:srgbClr val="E2D3B0"/>
+                        <a:srgbClr val="D5E0E3"/>
                       </a:solidFill>
                       <a:prstDash val="solid"/>
                       <a:round/>
@@ -9220,7 +9748,7 @@
                     </a:lnR>
                     <a:lnT w="6350" cap="flat" cmpd="sng" algn="ctr">
                       <a:solidFill>
-                        <a:srgbClr val="E2D3B0"/>
+                        <a:srgbClr val="D5E0E3"/>
                       </a:solidFill>
                       <a:prstDash val="solid"/>
                       <a:round/>
@@ -9229,7 +9757,7 @@
                     </a:lnT>
                     <a:lnB w="6350" cap="flat" cmpd="sng" algn="ctr">
                       <a:solidFill>
-                        <a:srgbClr val="E2D3B0"/>
+                        <a:srgbClr val="D5E0E3"/>
                       </a:solidFill>
                       <a:prstDash val="solid"/>
                       <a:round/>
@@ -9237,7 +9765,7 @@
                       <a:tailEnd type="none" w="med" len="med"/>
                     </a:lnB>
                     <a:solidFill>
-                      <a:srgbClr val="0C2630"/>
+                      <a:srgbClr val="0F2D3A"/>
                     </a:solidFill>
                   </a:tcPr>
                 </a:tc>
@@ -9263,7 +9791,7 @@
                   <a:tcPr marL="73152" marR="73152" marT="73152" marB="73152" anchor="ctr">
                     <a:lnL w="6350" cap="flat" cmpd="sng" algn="ctr">
                       <a:solidFill>
-                        <a:srgbClr val="E2D3B0"/>
+                        <a:srgbClr val="D5E0E3"/>
                       </a:solidFill>
                       <a:prstDash val="solid"/>
                       <a:round/>
@@ -9272,7 +9800,7 @@
                     </a:lnL>
                     <a:lnR w="6350" cap="flat" cmpd="sng" algn="ctr">
                       <a:solidFill>
-                        <a:srgbClr val="E2D3B0"/>
+                        <a:srgbClr val="D5E0E3"/>
                       </a:solidFill>
                       <a:prstDash val="solid"/>
                       <a:round/>
@@ -9281,7 +9809,7 @@
                     </a:lnR>
                     <a:lnT w="6350" cap="flat" cmpd="sng" algn="ctr">
                       <a:solidFill>
-                        <a:srgbClr val="E2D3B0"/>
+                        <a:srgbClr val="D5E0E3"/>
                       </a:solidFill>
                       <a:prstDash val="solid"/>
                       <a:round/>
@@ -9290,7 +9818,7 @@
                     </a:lnT>
                     <a:lnB w="6350" cap="flat" cmpd="sng" algn="ctr">
                       <a:solidFill>
-                        <a:srgbClr val="E2D3B0"/>
+                        <a:srgbClr val="D5E0E3"/>
                       </a:solidFill>
                       <a:prstDash val="solid"/>
                       <a:round/>
@@ -9298,7 +9826,7 @@
                       <a:tailEnd type="none" w="med" len="med"/>
                     </a:lnB>
                     <a:solidFill>
-                      <a:srgbClr val="0C2630"/>
+                      <a:srgbClr val="0F2D3A"/>
                     </a:solidFill>
                   </a:tcPr>
                 </a:tc>
@@ -9324,7 +9852,7 @@
                   <a:tcPr marL="73152" marR="73152" marT="73152" marB="73152" anchor="ctr">
                     <a:lnL w="6350" cap="flat" cmpd="sng" algn="ctr">
                       <a:solidFill>
-                        <a:srgbClr val="E2D3B0"/>
+                        <a:srgbClr val="D5E0E3"/>
                       </a:solidFill>
                       <a:prstDash val="solid"/>
                       <a:round/>
@@ -9333,7 +9861,7 @@
                     </a:lnL>
                     <a:lnR w="6350" cap="flat" cmpd="sng" algn="ctr">
                       <a:solidFill>
-                        <a:srgbClr val="E2D3B0"/>
+                        <a:srgbClr val="D5E0E3"/>
                       </a:solidFill>
                       <a:prstDash val="solid"/>
                       <a:round/>
@@ -9342,7 +9870,7 @@
                     </a:lnR>
                     <a:lnT w="6350" cap="flat" cmpd="sng" algn="ctr">
                       <a:solidFill>
-                        <a:srgbClr val="E2D3B0"/>
+                        <a:srgbClr val="D5E0E3"/>
                       </a:solidFill>
                       <a:prstDash val="solid"/>
                       <a:round/>
@@ -9351,7 +9879,7 @@
                     </a:lnT>
                     <a:lnB w="6350" cap="flat" cmpd="sng" algn="ctr">
                       <a:solidFill>
-                        <a:srgbClr val="E2D3B0"/>
+                        <a:srgbClr val="D5E0E3"/>
                       </a:solidFill>
                       <a:prstDash val="solid"/>
                       <a:round/>
@@ -9359,7 +9887,7 @@
                       <a:tailEnd type="none" w="med" len="med"/>
                     </a:lnB>
                     <a:solidFill>
-                      <a:srgbClr val="0C2630"/>
+                      <a:srgbClr val="0F2D3A"/>
                     </a:solidFill>
                   </a:tcPr>
                 </a:tc>
@@ -9385,7 +9913,7 @@
                   <a:tcPr marL="73152" marR="73152" marT="73152" marB="73152" anchor="ctr">
                     <a:lnL w="6350" cap="flat" cmpd="sng" algn="ctr">
                       <a:solidFill>
-                        <a:srgbClr val="E2D3B0"/>
+                        <a:srgbClr val="D5E0E3"/>
                       </a:solidFill>
                       <a:prstDash val="solid"/>
                       <a:round/>
@@ -9394,7 +9922,7 @@
                     </a:lnL>
                     <a:lnR w="6350" cap="flat" cmpd="sng" algn="ctr">
                       <a:solidFill>
-                        <a:srgbClr val="E2D3B0"/>
+                        <a:srgbClr val="D5E0E3"/>
                       </a:solidFill>
                       <a:prstDash val="solid"/>
                       <a:round/>
@@ -9403,7 +9931,7 @@
                     </a:lnR>
                     <a:lnT w="6350" cap="flat" cmpd="sng" algn="ctr">
                       <a:solidFill>
-                        <a:srgbClr val="E2D3B0"/>
+                        <a:srgbClr val="D5E0E3"/>
                       </a:solidFill>
                       <a:prstDash val="solid"/>
                       <a:round/>
@@ -9412,7 +9940,7 @@
                     </a:lnT>
                     <a:lnB w="6350" cap="flat" cmpd="sng" algn="ctr">
                       <a:solidFill>
-                        <a:srgbClr val="E2D3B0"/>
+                        <a:srgbClr val="D5E0E3"/>
                       </a:solidFill>
                       <a:prstDash val="solid"/>
                       <a:round/>
@@ -9420,7 +9948,7 @@
                       <a:tailEnd type="none" w="med" len="med"/>
                     </a:lnB>
                     <a:solidFill>
-                      <a:srgbClr val="0C2630"/>
+                      <a:srgbClr val="0F2D3A"/>
                     </a:solidFill>
                   </a:tcPr>
                 </a:tc>
@@ -9437,7 +9965,7 @@
                       <a:r>
                         <a:rPr lang="en-US" sz="1300" dirty="0">
                           <a:solidFill>
-                            <a:srgbClr val="2A1A10"/>
+                            <a:srgbClr val="0F2D3A"/>
                           </a:solidFill>
                         </a:rPr>
                         <a:t>Запрос свободным текстом</a:t>
@@ -9448,7 +9976,7 @@
                   <a:tcPr marL="73152" marR="73152" marT="73152" marB="73152" anchor="ctr">
                     <a:lnL w="6350" cap="flat" cmpd="sng" algn="ctr">
                       <a:solidFill>
-                        <a:srgbClr val="E2D3B0"/>
+                        <a:srgbClr val="D5E0E3"/>
                       </a:solidFill>
                       <a:prstDash val="solid"/>
                       <a:round/>
@@ -9457,7 +9985,7 @@
                     </a:lnL>
                     <a:lnR w="6350" cap="flat" cmpd="sng" algn="ctr">
                       <a:solidFill>
-                        <a:srgbClr val="E2D3B0"/>
+                        <a:srgbClr val="D5E0E3"/>
                       </a:solidFill>
                       <a:prstDash val="solid"/>
                       <a:round/>
@@ -9466,7 +9994,7 @@
                     </a:lnR>
                     <a:lnT w="6350" cap="flat" cmpd="sng" algn="ctr">
                       <a:solidFill>
-                        <a:srgbClr val="E2D3B0"/>
+                        <a:srgbClr val="D5E0E3"/>
                       </a:solidFill>
                       <a:prstDash val="solid"/>
                       <a:round/>
@@ -9475,7 +10003,7 @@
                     </a:lnT>
                     <a:lnB w="6350" cap="flat" cmpd="sng" algn="ctr">
                       <a:solidFill>
-                        <a:srgbClr val="E2D3B0"/>
+                        <a:srgbClr val="D5E0E3"/>
                       </a:solidFill>
                       <a:prstDash val="solid"/>
                       <a:round/>
@@ -9498,7 +10026,7 @@
                       <a:r>
                         <a:rPr lang="en-US" sz="1600" dirty="0">
                           <a:solidFill>
-                            <a:srgbClr val="2A1A10"/>
+                            <a:srgbClr val="0F2D3A"/>
                           </a:solidFill>
                         </a:rPr>
                         <a:t>✓</a:t>
@@ -9509,7 +10037,7 @@
                   <a:tcPr marL="73152" marR="73152" marT="73152" marB="73152" anchor="ctr">
                     <a:lnL w="6350" cap="flat" cmpd="sng" algn="ctr">
                       <a:solidFill>
-                        <a:srgbClr val="E2D3B0"/>
+                        <a:srgbClr val="D5E0E3"/>
                       </a:solidFill>
                       <a:prstDash val="solid"/>
                       <a:round/>
@@ -9518,7 +10046,7 @@
                     </a:lnL>
                     <a:lnR w="6350" cap="flat" cmpd="sng" algn="ctr">
                       <a:solidFill>
-                        <a:srgbClr val="E2D3B0"/>
+                        <a:srgbClr val="D5E0E3"/>
                       </a:solidFill>
                       <a:prstDash val="solid"/>
                       <a:round/>
@@ -9527,7 +10055,7 @@
                     </a:lnR>
                     <a:lnT w="6350" cap="flat" cmpd="sng" algn="ctr">
                       <a:solidFill>
-                        <a:srgbClr val="E2D3B0"/>
+                        <a:srgbClr val="D5E0E3"/>
                       </a:solidFill>
                       <a:prstDash val="solid"/>
                       <a:round/>
@@ -9536,7 +10064,7 @@
                     </a:lnT>
                     <a:lnB w="6350" cap="flat" cmpd="sng" algn="ctr">
                       <a:solidFill>
-                        <a:srgbClr val="E2D3B0"/>
+                        <a:srgbClr val="D5E0E3"/>
                       </a:solidFill>
                       <a:prstDash val="solid"/>
                       <a:round/>
@@ -9559,7 +10087,7 @@
                       <a:r>
                         <a:rPr lang="en-US" sz="1600" dirty="0">
                           <a:solidFill>
-                            <a:srgbClr val="2A1A10"/>
+                            <a:srgbClr val="0F2D3A"/>
                           </a:solidFill>
                         </a:rPr>
                         <a:t>—</a:t>
@@ -9570,7 +10098,7 @@
                   <a:tcPr marL="73152" marR="73152" marT="73152" marB="73152" anchor="ctr">
                     <a:lnL w="6350" cap="flat" cmpd="sng" algn="ctr">
                       <a:solidFill>
-                        <a:srgbClr val="E2D3B0"/>
+                        <a:srgbClr val="D5E0E3"/>
                       </a:solidFill>
                       <a:prstDash val="solid"/>
                       <a:round/>
@@ -9579,7 +10107,7 @@
                     </a:lnL>
                     <a:lnR w="6350" cap="flat" cmpd="sng" algn="ctr">
                       <a:solidFill>
-                        <a:srgbClr val="E2D3B0"/>
+                        <a:srgbClr val="D5E0E3"/>
                       </a:solidFill>
                       <a:prstDash val="solid"/>
                       <a:round/>
@@ -9588,7 +10116,7 @@
                     </a:lnR>
                     <a:lnT w="6350" cap="flat" cmpd="sng" algn="ctr">
                       <a:solidFill>
-                        <a:srgbClr val="E2D3B0"/>
+                        <a:srgbClr val="D5E0E3"/>
                       </a:solidFill>
                       <a:prstDash val="solid"/>
                       <a:round/>
@@ -9597,7 +10125,7 @@
                     </a:lnT>
                     <a:lnB w="6350" cap="flat" cmpd="sng" algn="ctr">
                       <a:solidFill>
-                        <a:srgbClr val="E2D3B0"/>
+                        <a:srgbClr val="D5E0E3"/>
                       </a:solidFill>
                       <a:prstDash val="solid"/>
                       <a:round/>
@@ -9620,7 +10148,7 @@
                       <a:r>
                         <a:rPr lang="en-US" sz="1600" dirty="0">
                           <a:solidFill>
-                            <a:srgbClr val="2A1A10"/>
+                            <a:srgbClr val="0F2D3A"/>
                           </a:solidFill>
                         </a:rPr>
                         <a:t>—</a:t>
@@ -9631,7 +10159,7 @@
                   <a:tcPr marL="73152" marR="73152" marT="73152" marB="73152" anchor="ctr">
                     <a:lnL w="6350" cap="flat" cmpd="sng" algn="ctr">
                       <a:solidFill>
-                        <a:srgbClr val="E2D3B0"/>
+                        <a:srgbClr val="D5E0E3"/>
                       </a:solidFill>
                       <a:prstDash val="solid"/>
                       <a:round/>
@@ -9640,7 +10168,7 @@
                     </a:lnL>
                     <a:lnR w="6350" cap="flat" cmpd="sng" algn="ctr">
                       <a:solidFill>
-                        <a:srgbClr val="E2D3B0"/>
+                        <a:srgbClr val="D5E0E3"/>
                       </a:solidFill>
                       <a:prstDash val="solid"/>
                       <a:round/>
@@ -9649,7 +10177,7 @@
                     </a:lnR>
                     <a:lnT w="6350" cap="flat" cmpd="sng" algn="ctr">
                       <a:solidFill>
-                        <a:srgbClr val="E2D3B0"/>
+                        <a:srgbClr val="D5E0E3"/>
                       </a:solidFill>
                       <a:prstDash val="solid"/>
                       <a:round/>
@@ -9658,7 +10186,7 @@
                     </a:lnT>
                     <a:lnB w="6350" cap="flat" cmpd="sng" algn="ctr">
                       <a:solidFill>
-                        <a:srgbClr val="E2D3B0"/>
+                        <a:srgbClr val="D5E0E3"/>
                       </a:solidFill>
                       <a:prstDash val="solid"/>
                       <a:round/>
@@ -9681,7 +10209,7 @@
                       <a:r>
                         <a:rPr lang="en-US" sz="1600" b="1" dirty="0">
                           <a:solidFill>
-                            <a:srgbClr val="B3261E"/>
+                            <a:srgbClr val="F0641E"/>
                           </a:solidFill>
                         </a:rPr>
                         <a:t>✓</a:t>
@@ -9692,7 +10220,7 @@
                   <a:tcPr marL="73152" marR="73152" marT="73152" marB="73152" anchor="ctr">
                     <a:lnL w="6350" cap="flat" cmpd="sng" algn="ctr">
                       <a:solidFill>
-                        <a:srgbClr val="E2D3B0"/>
+                        <a:srgbClr val="D5E0E3"/>
                       </a:solidFill>
                       <a:prstDash val="solid"/>
                       <a:round/>
@@ -9701,7 +10229,7 @@
                     </a:lnL>
                     <a:lnR w="6350" cap="flat" cmpd="sng" algn="ctr">
                       <a:solidFill>
-                        <a:srgbClr val="E2D3B0"/>
+                        <a:srgbClr val="D5E0E3"/>
                       </a:solidFill>
                       <a:prstDash val="solid"/>
                       <a:round/>
@@ -9710,7 +10238,7 @@
                     </a:lnR>
                     <a:lnT w="6350" cap="flat" cmpd="sng" algn="ctr">
                       <a:solidFill>
-                        <a:srgbClr val="E2D3B0"/>
+                        <a:srgbClr val="D5E0E3"/>
                       </a:solidFill>
                       <a:prstDash val="solid"/>
                       <a:round/>
@@ -9719,7 +10247,7 @@
                     </a:lnT>
                     <a:lnB w="6350" cap="flat" cmpd="sng" algn="ctr">
                       <a:solidFill>
-                        <a:srgbClr val="E2D3B0"/>
+                        <a:srgbClr val="D5E0E3"/>
                       </a:solidFill>
                       <a:prstDash val="solid"/>
                       <a:round/>
@@ -9727,7 +10255,7 @@
                       <a:tailEnd type="none" w="med" len="med"/>
                     </a:lnB>
                     <a:solidFill>
-                      <a:srgbClr val="FBEFD9"/>
+                      <a:srgbClr val="FFF0E7"/>
                     </a:solidFill>
                   </a:tcPr>
                 </a:tc>
@@ -9744,7 +10272,7 @@
                       <a:r>
                         <a:rPr lang="en-US" sz="1300" dirty="0">
                           <a:solidFill>
-                            <a:srgbClr val="2A1A10"/>
+                            <a:srgbClr val="0F2D3A"/>
                           </a:solidFill>
                         </a:rPr>
                         <a:t>План целиком: места, путь, ночлег</a:t>
@@ -9755,7 +10283,7 @@
                   <a:tcPr marL="73152" marR="73152" marT="73152" marB="73152" anchor="ctr">
                     <a:lnL w="6350" cap="flat" cmpd="sng" algn="ctr">
                       <a:solidFill>
-                        <a:srgbClr val="E2D3B0"/>
+                        <a:srgbClr val="D5E0E3"/>
                       </a:solidFill>
                       <a:prstDash val="solid"/>
                       <a:round/>
@@ -9764,7 +10292,7 @@
                     </a:lnL>
                     <a:lnR w="6350" cap="flat" cmpd="sng" algn="ctr">
                       <a:solidFill>
-                        <a:srgbClr val="E2D3B0"/>
+                        <a:srgbClr val="D5E0E3"/>
                       </a:solidFill>
                       <a:prstDash val="solid"/>
                       <a:round/>
@@ -9773,7 +10301,7 @@
                     </a:lnR>
                     <a:lnT w="6350" cap="flat" cmpd="sng" algn="ctr">
                       <a:solidFill>
-                        <a:srgbClr val="E2D3B0"/>
+                        <a:srgbClr val="D5E0E3"/>
                       </a:solidFill>
                       <a:prstDash val="solid"/>
                       <a:round/>
@@ -9782,7 +10310,7 @@
                     </a:lnT>
                     <a:lnB w="6350" cap="flat" cmpd="sng" algn="ctr">
                       <a:solidFill>
-                        <a:srgbClr val="E2D3B0"/>
+                        <a:srgbClr val="D5E0E3"/>
                       </a:solidFill>
                       <a:prstDash val="solid"/>
                       <a:round/>
@@ -9790,7 +10318,7 @@
                       <a:tailEnd type="none" w="med" len="med"/>
                     </a:lnB>
                     <a:solidFill>
-                      <a:srgbClr val="F7F1E3"/>
+                      <a:srgbClr val="F3F6F7"/>
                     </a:solidFill>
                   </a:tcPr>
                 </a:tc>
@@ -9805,7 +10333,7 @@
                       <a:r>
                         <a:rPr lang="en-US" sz="1600" dirty="0">
                           <a:solidFill>
-                            <a:srgbClr val="2A1A10"/>
+                            <a:srgbClr val="0F2D3A"/>
                           </a:solidFill>
                         </a:rPr>
                         <a:t>✓</a:t>
@@ -9816,7 +10344,7 @@
                   <a:tcPr marL="73152" marR="73152" marT="73152" marB="73152" anchor="ctr">
                     <a:lnL w="6350" cap="flat" cmpd="sng" algn="ctr">
                       <a:solidFill>
-                        <a:srgbClr val="E2D3B0"/>
+                        <a:srgbClr val="D5E0E3"/>
                       </a:solidFill>
                       <a:prstDash val="solid"/>
                       <a:round/>
@@ -9825,7 +10353,7 @@
                     </a:lnL>
                     <a:lnR w="6350" cap="flat" cmpd="sng" algn="ctr">
                       <a:solidFill>
-                        <a:srgbClr val="E2D3B0"/>
+                        <a:srgbClr val="D5E0E3"/>
                       </a:solidFill>
                       <a:prstDash val="solid"/>
                       <a:round/>
@@ -9834,7 +10362,7 @@
                     </a:lnR>
                     <a:lnT w="6350" cap="flat" cmpd="sng" algn="ctr">
                       <a:solidFill>
-                        <a:srgbClr val="E2D3B0"/>
+                        <a:srgbClr val="D5E0E3"/>
                       </a:solidFill>
                       <a:prstDash val="solid"/>
                       <a:round/>
@@ -9843,7 +10371,7 @@
                     </a:lnT>
                     <a:lnB w="6350" cap="flat" cmpd="sng" algn="ctr">
                       <a:solidFill>
-                        <a:srgbClr val="E2D3B0"/>
+                        <a:srgbClr val="D5E0E3"/>
                       </a:solidFill>
                       <a:prstDash val="solid"/>
                       <a:round/>
@@ -9851,7 +10379,7 @@
                       <a:tailEnd type="none" w="med" len="med"/>
                     </a:lnB>
                     <a:solidFill>
-                      <a:srgbClr val="F7F1E3"/>
+                      <a:srgbClr val="F3F6F7"/>
                     </a:solidFill>
                   </a:tcPr>
                 </a:tc>
@@ -9866,7 +10394,7 @@
                       <a:r>
                         <a:rPr lang="en-US" sz="1600" dirty="0">
                           <a:solidFill>
-                            <a:srgbClr val="2A1A10"/>
+                            <a:srgbClr val="0F2D3A"/>
                           </a:solidFill>
                         </a:rPr>
                         <a:t>≈</a:t>
@@ -9877,7 +10405,7 @@
                   <a:tcPr marL="73152" marR="73152" marT="73152" marB="73152" anchor="ctr">
                     <a:lnL w="6350" cap="flat" cmpd="sng" algn="ctr">
                       <a:solidFill>
-                        <a:srgbClr val="E2D3B0"/>
+                        <a:srgbClr val="D5E0E3"/>
                       </a:solidFill>
                       <a:prstDash val="solid"/>
                       <a:round/>
@@ -9886,7 +10414,7 @@
                     </a:lnL>
                     <a:lnR w="6350" cap="flat" cmpd="sng" algn="ctr">
                       <a:solidFill>
-                        <a:srgbClr val="E2D3B0"/>
+                        <a:srgbClr val="D5E0E3"/>
                       </a:solidFill>
                       <a:prstDash val="solid"/>
                       <a:round/>
@@ -9895,7 +10423,7 @@
                     </a:lnR>
                     <a:lnT w="6350" cap="flat" cmpd="sng" algn="ctr">
                       <a:solidFill>
-                        <a:srgbClr val="E2D3B0"/>
+                        <a:srgbClr val="D5E0E3"/>
                       </a:solidFill>
                       <a:prstDash val="solid"/>
                       <a:round/>
@@ -9904,7 +10432,7 @@
                     </a:lnT>
                     <a:lnB w="6350" cap="flat" cmpd="sng" algn="ctr">
                       <a:solidFill>
-                        <a:srgbClr val="E2D3B0"/>
+                        <a:srgbClr val="D5E0E3"/>
                       </a:solidFill>
                       <a:prstDash val="solid"/>
                       <a:round/>
@@ -9912,7 +10440,7 @@
                       <a:tailEnd type="none" w="med" len="med"/>
                     </a:lnB>
                     <a:solidFill>
-                      <a:srgbClr val="F7F1E3"/>
+                      <a:srgbClr val="F3F6F7"/>
                     </a:solidFill>
                   </a:tcPr>
                 </a:tc>
@@ -9927,7 +10455,7 @@
                       <a:r>
                         <a:rPr lang="en-US" sz="1600" dirty="0">
                           <a:solidFill>
-                            <a:srgbClr val="2A1A10"/>
+                            <a:srgbClr val="0F2D3A"/>
                           </a:solidFill>
                         </a:rPr>
                         <a:t>≈</a:t>
@@ -9938,7 +10466,7 @@
                   <a:tcPr marL="73152" marR="73152" marT="73152" marB="73152" anchor="ctr">
                     <a:lnL w="6350" cap="flat" cmpd="sng" algn="ctr">
                       <a:solidFill>
-                        <a:srgbClr val="E2D3B0"/>
+                        <a:srgbClr val="D5E0E3"/>
                       </a:solidFill>
                       <a:prstDash val="solid"/>
                       <a:round/>
@@ -9947,7 +10475,7 @@
                     </a:lnL>
                     <a:lnR w="6350" cap="flat" cmpd="sng" algn="ctr">
                       <a:solidFill>
-                        <a:srgbClr val="E2D3B0"/>
+                        <a:srgbClr val="D5E0E3"/>
                       </a:solidFill>
                       <a:prstDash val="solid"/>
                       <a:round/>
@@ -9956,7 +10484,7 @@
                     </a:lnR>
                     <a:lnT w="6350" cap="flat" cmpd="sng" algn="ctr">
                       <a:solidFill>
-                        <a:srgbClr val="E2D3B0"/>
+                        <a:srgbClr val="D5E0E3"/>
                       </a:solidFill>
                       <a:prstDash val="solid"/>
                       <a:round/>
@@ -9965,7 +10493,7 @@
                     </a:lnT>
                     <a:lnB w="6350" cap="flat" cmpd="sng" algn="ctr">
                       <a:solidFill>
-                        <a:srgbClr val="E2D3B0"/>
+                        <a:srgbClr val="D5E0E3"/>
                       </a:solidFill>
                       <a:prstDash val="solid"/>
                       <a:round/>
@@ -9973,7 +10501,7 @@
                       <a:tailEnd type="none" w="med" len="med"/>
                     </a:lnB>
                     <a:solidFill>
-                      <a:srgbClr val="F7F1E3"/>
+                      <a:srgbClr val="F3F6F7"/>
                     </a:solidFill>
                   </a:tcPr>
                 </a:tc>
@@ -9988,7 +10516,7 @@
                       <a:r>
                         <a:rPr lang="en-US" sz="1600" b="1" dirty="0">
                           <a:solidFill>
-                            <a:srgbClr val="B3261E"/>
+                            <a:srgbClr val="F0641E"/>
                           </a:solidFill>
                         </a:rPr>
                         <a:t>✓</a:t>
@@ -9999,7 +10527,7 @@
                   <a:tcPr marL="73152" marR="73152" marT="73152" marB="73152" anchor="ctr">
                     <a:lnL w="6350" cap="flat" cmpd="sng" algn="ctr">
                       <a:solidFill>
-                        <a:srgbClr val="E2D3B0"/>
+                        <a:srgbClr val="D5E0E3"/>
                       </a:solidFill>
                       <a:prstDash val="solid"/>
                       <a:round/>
@@ -10008,7 +10536,7 @@
                     </a:lnL>
                     <a:lnR w="6350" cap="flat" cmpd="sng" algn="ctr">
                       <a:solidFill>
-                        <a:srgbClr val="E2D3B0"/>
+                        <a:srgbClr val="D5E0E3"/>
                       </a:solidFill>
                       <a:prstDash val="solid"/>
                       <a:round/>
@@ -10017,7 +10545,7 @@
                     </a:lnR>
                     <a:lnT w="6350" cap="flat" cmpd="sng" algn="ctr">
                       <a:solidFill>
-                        <a:srgbClr val="E2D3B0"/>
+                        <a:srgbClr val="D5E0E3"/>
                       </a:solidFill>
                       <a:prstDash val="solid"/>
                       <a:round/>
@@ -10026,7 +10554,7 @@
                     </a:lnT>
                     <a:lnB w="6350" cap="flat" cmpd="sng" algn="ctr">
                       <a:solidFill>
-                        <a:srgbClr val="E2D3B0"/>
+                        <a:srgbClr val="D5E0E3"/>
                       </a:solidFill>
                       <a:prstDash val="solid"/>
                       <a:round/>
@@ -10034,7 +10562,7 @@
                       <a:tailEnd type="none" w="med" len="med"/>
                     </a:lnB>
                     <a:solidFill>
-                      <a:srgbClr val="FBEFD9"/>
+                      <a:srgbClr val="FFF0E7"/>
                     </a:solidFill>
                   </a:tcPr>
                 </a:tc>
@@ -10051,7 +10579,7 @@
                       <a:r>
                         <a:rPr lang="en-US" sz="1300" dirty="0">
                           <a:solidFill>
-                            <a:srgbClr val="2A1A10"/>
+                            <a:srgbClr val="0F2D3A"/>
                           </a:solidFill>
                         </a:rPr>
                         <a:t>Сверка с погодой и режимом работы</a:t>
@@ -10062,7 +10590,7 @@
                   <a:tcPr marL="73152" marR="73152" marT="73152" marB="73152" anchor="ctr">
                     <a:lnL w="6350" cap="flat" cmpd="sng" algn="ctr">
                       <a:solidFill>
-                        <a:srgbClr val="E2D3B0"/>
+                        <a:srgbClr val="D5E0E3"/>
                       </a:solidFill>
                       <a:prstDash val="solid"/>
                       <a:round/>
@@ -10071,7 +10599,7 @@
                     </a:lnL>
                     <a:lnR w="6350" cap="flat" cmpd="sng" algn="ctr">
                       <a:solidFill>
-                        <a:srgbClr val="E2D3B0"/>
+                        <a:srgbClr val="D5E0E3"/>
                       </a:solidFill>
                       <a:prstDash val="solid"/>
                       <a:round/>
@@ -10080,7 +10608,7 @@
                     </a:lnR>
                     <a:lnT w="6350" cap="flat" cmpd="sng" algn="ctr">
                       <a:solidFill>
-                        <a:srgbClr val="E2D3B0"/>
+                        <a:srgbClr val="D5E0E3"/>
                       </a:solidFill>
                       <a:prstDash val="solid"/>
                       <a:round/>
@@ -10089,7 +10617,7 @@
                     </a:lnT>
                     <a:lnB w="6350" cap="flat" cmpd="sng" algn="ctr">
                       <a:solidFill>
-                        <a:srgbClr val="E2D3B0"/>
+                        <a:srgbClr val="D5E0E3"/>
                       </a:solidFill>
                       <a:prstDash val="solid"/>
                       <a:round/>
@@ -10112,7 +10640,7 @@
                       <a:r>
                         <a:rPr lang="en-US" sz="1600" dirty="0">
                           <a:solidFill>
-                            <a:srgbClr val="2A1A10"/>
+                            <a:srgbClr val="0F2D3A"/>
                           </a:solidFill>
                         </a:rPr>
                         <a:t>—</a:t>
@@ -10123,7 +10651,7 @@
                   <a:tcPr marL="73152" marR="73152" marT="73152" marB="73152" anchor="ctr">
                     <a:lnL w="6350" cap="flat" cmpd="sng" algn="ctr">
                       <a:solidFill>
-                        <a:srgbClr val="E2D3B0"/>
+                        <a:srgbClr val="D5E0E3"/>
                       </a:solidFill>
                       <a:prstDash val="solid"/>
                       <a:round/>
@@ -10132,7 +10660,7 @@
                     </a:lnL>
                     <a:lnR w="6350" cap="flat" cmpd="sng" algn="ctr">
                       <a:solidFill>
-                        <a:srgbClr val="E2D3B0"/>
+                        <a:srgbClr val="D5E0E3"/>
                       </a:solidFill>
                       <a:prstDash val="solid"/>
                       <a:round/>
@@ -10141,7 +10669,7 @@
                     </a:lnR>
                     <a:lnT w="6350" cap="flat" cmpd="sng" algn="ctr">
                       <a:solidFill>
-                        <a:srgbClr val="E2D3B0"/>
+                        <a:srgbClr val="D5E0E3"/>
                       </a:solidFill>
                       <a:prstDash val="solid"/>
                       <a:round/>
@@ -10150,7 +10678,7 @@
                     </a:lnT>
                     <a:lnB w="6350" cap="flat" cmpd="sng" algn="ctr">
                       <a:solidFill>
-                        <a:srgbClr val="E2D3B0"/>
+                        <a:srgbClr val="D5E0E3"/>
                       </a:solidFill>
                       <a:prstDash val="solid"/>
                       <a:round/>
@@ -10173,7 +10701,7 @@
                       <a:r>
                         <a:rPr lang="en-US" sz="1600" dirty="0">
                           <a:solidFill>
-                            <a:srgbClr val="2A1A10"/>
+                            <a:srgbClr val="0F2D3A"/>
                           </a:solidFill>
                         </a:rPr>
                         <a:t>—</a:t>
@@ -10184,7 +10712,7 @@
                   <a:tcPr marL="73152" marR="73152" marT="73152" marB="73152" anchor="ctr">
                     <a:lnL w="6350" cap="flat" cmpd="sng" algn="ctr">
                       <a:solidFill>
-                        <a:srgbClr val="E2D3B0"/>
+                        <a:srgbClr val="D5E0E3"/>
                       </a:solidFill>
                       <a:prstDash val="solid"/>
                       <a:round/>
@@ -10193,7 +10721,7 @@
                     </a:lnL>
                     <a:lnR w="6350" cap="flat" cmpd="sng" algn="ctr">
                       <a:solidFill>
-                        <a:srgbClr val="E2D3B0"/>
+                        <a:srgbClr val="D5E0E3"/>
                       </a:solidFill>
                       <a:prstDash val="solid"/>
                       <a:round/>
@@ -10202,7 +10730,7 @@
                     </a:lnR>
                     <a:lnT w="6350" cap="flat" cmpd="sng" algn="ctr">
                       <a:solidFill>
-                        <a:srgbClr val="E2D3B0"/>
+                        <a:srgbClr val="D5E0E3"/>
                       </a:solidFill>
                       <a:prstDash val="solid"/>
                       <a:round/>
@@ -10211,7 +10739,7 @@
                     </a:lnT>
                     <a:lnB w="6350" cap="flat" cmpd="sng" algn="ctr">
                       <a:solidFill>
-                        <a:srgbClr val="E2D3B0"/>
+                        <a:srgbClr val="D5E0E3"/>
                       </a:solidFill>
                       <a:prstDash val="solid"/>
                       <a:round/>
@@ -10234,7 +10762,7 @@
                       <a:r>
                         <a:rPr lang="en-US" sz="1600" dirty="0">
                           <a:solidFill>
-                            <a:srgbClr val="2A1A10"/>
+                            <a:srgbClr val="0F2D3A"/>
                           </a:solidFill>
                         </a:rPr>
                         <a:t>≈</a:t>
@@ -10245,7 +10773,7 @@
                   <a:tcPr marL="73152" marR="73152" marT="73152" marB="73152" anchor="ctr">
                     <a:lnL w="6350" cap="flat" cmpd="sng" algn="ctr">
                       <a:solidFill>
-                        <a:srgbClr val="E2D3B0"/>
+                        <a:srgbClr val="D5E0E3"/>
                       </a:solidFill>
                       <a:prstDash val="solid"/>
                       <a:round/>
@@ -10254,7 +10782,7 @@
                     </a:lnL>
                     <a:lnR w="6350" cap="flat" cmpd="sng" algn="ctr">
                       <a:solidFill>
-                        <a:srgbClr val="E2D3B0"/>
+                        <a:srgbClr val="D5E0E3"/>
                       </a:solidFill>
                       <a:prstDash val="solid"/>
                       <a:round/>
@@ -10263,7 +10791,7 @@
                     </a:lnR>
                     <a:lnT w="6350" cap="flat" cmpd="sng" algn="ctr">
                       <a:solidFill>
-                        <a:srgbClr val="E2D3B0"/>
+                        <a:srgbClr val="D5E0E3"/>
                       </a:solidFill>
                       <a:prstDash val="solid"/>
                       <a:round/>
@@ -10272,7 +10800,7 @@
                     </a:lnT>
                     <a:lnB w="6350" cap="flat" cmpd="sng" algn="ctr">
                       <a:solidFill>
-                        <a:srgbClr val="E2D3B0"/>
+                        <a:srgbClr val="D5E0E3"/>
                       </a:solidFill>
                       <a:prstDash val="solid"/>
                       <a:round/>
@@ -10295,7 +10823,7 @@
                       <a:r>
                         <a:rPr lang="en-US" sz="1600" b="1" dirty="0">
                           <a:solidFill>
-                            <a:srgbClr val="B3261E"/>
+                            <a:srgbClr val="F0641E"/>
                           </a:solidFill>
                         </a:rPr>
                         <a:t>✓</a:t>
@@ -10306,7 +10834,7 @@
                   <a:tcPr marL="73152" marR="73152" marT="73152" marB="73152" anchor="ctr">
                     <a:lnL w="6350" cap="flat" cmpd="sng" algn="ctr">
                       <a:solidFill>
-                        <a:srgbClr val="E2D3B0"/>
+                        <a:srgbClr val="D5E0E3"/>
                       </a:solidFill>
                       <a:prstDash val="solid"/>
                       <a:round/>
@@ -10315,7 +10843,7 @@
                     </a:lnL>
                     <a:lnR w="6350" cap="flat" cmpd="sng" algn="ctr">
                       <a:solidFill>
-                        <a:srgbClr val="E2D3B0"/>
+                        <a:srgbClr val="D5E0E3"/>
                       </a:solidFill>
                       <a:prstDash val="solid"/>
                       <a:round/>
@@ -10324,7 +10852,7 @@
                     </a:lnR>
                     <a:lnT w="6350" cap="flat" cmpd="sng" algn="ctr">
                       <a:solidFill>
-                        <a:srgbClr val="E2D3B0"/>
+                        <a:srgbClr val="D5E0E3"/>
                       </a:solidFill>
                       <a:prstDash val="solid"/>
                       <a:round/>
@@ -10333,7 +10861,7 @@
                     </a:lnT>
                     <a:lnB w="6350" cap="flat" cmpd="sng" algn="ctr">
                       <a:solidFill>
-                        <a:srgbClr val="E2D3B0"/>
+                        <a:srgbClr val="D5E0E3"/>
                       </a:solidFill>
                       <a:prstDash val="solid"/>
                       <a:round/>
@@ -10341,7 +10869,7 @@
                       <a:tailEnd type="none" w="med" len="med"/>
                     </a:lnB>
                     <a:solidFill>
-                      <a:srgbClr val="FBEFD9"/>
+                      <a:srgbClr val="FFF0E7"/>
                     </a:solidFill>
                   </a:tcPr>
                 </a:tc>
@@ -10358,7 +10886,7 @@
                       <a:r>
                         <a:rPr lang="en-US" sz="1300" dirty="0">
                           <a:solidFill>
-                            <a:srgbClr val="2A1A10"/>
+                            <a:srgbClr val="0F2D3A"/>
                           </a:solidFill>
                         </a:rPr>
                         <a:t>Ограничения транспорта (АЗС, рейсы)</a:t>
@@ -10369,7 +10897,7 @@
                   <a:tcPr marL="73152" marR="73152" marT="73152" marB="73152" anchor="ctr">
                     <a:lnL w="6350" cap="flat" cmpd="sng" algn="ctr">
                       <a:solidFill>
-                        <a:srgbClr val="E2D3B0"/>
+                        <a:srgbClr val="D5E0E3"/>
                       </a:solidFill>
                       <a:prstDash val="solid"/>
                       <a:round/>
@@ -10378,7 +10906,7 @@
                     </a:lnL>
                     <a:lnR w="6350" cap="flat" cmpd="sng" algn="ctr">
                       <a:solidFill>
-                        <a:srgbClr val="E2D3B0"/>
+                        <a:srgbClr val="D5E0E3"/>
                       </a:solidFill>
                       <a:prstDash val="solid"/>
                       <a:round/>
@@ -10387,7 +10915,7 @@
                     </a:lnR>
                     <a:lnT w="6350" cap="flat" cmpd="sng" algn="ctr">
                       <a:solidFill>
-                        <a:srgbClr val="E2D3B0"/>
+                        <a:srgbClr val="D5E0E3"/>
                       </a:solidFill>
                       <a:prstDash val="solid"/>
                       <a:round/>
@@ -10396,7 +10924,7 @@
                     </a:lnT>
                     <a:lnB w="6350" cap="flat" cmpd="sng" algn="ctr">
                       <a:solidFill>
-                        <a:srgbClr val="E2D3B0"/>
+                        <a:srgbClr val="D5E0E3"/>
                       </a:solidFill>
                       <a:prstDash val="solid"/>
                       <a:round/>
@@ -10404,7 +10932,7 @@
                       <a:tailEnd type="none" w="med" len="med"/>
                     </a:lnB>
                     <a:solidFill>
-                      <a:srgbClr val="F7F1E3"/>
+                      <a:srgbClr val="F3F6F7"/>
                     </a:solidFill>
                   </a:tcPr>
                 </a:tc>
@@ -10419,7 +10947,7 @@
                       <a:r>
                         <a:rPr lang="en-US" sz="1600" dirty="0">
                           <a:solidFill>
-                            <a:srgbClr val="2A1A10"/>
+                            <a:srgbClr val="0F2D3A"/>
                           </a:solidFill>
                         </a:rPr>
                         <a:t>—</a:t>
@@ -10430,7 +10958,7 @@
                   <a:tcPr marL="73152" marR="73152" marT="73152" marB="73152" anchor="ctr">
                     <a:lnL w="6350" cap="flat" cmpd="sng" algn="ctr">
                       <a:solidFill>
-                        <a:srgbClr val="E2D3B0"/>
+                        <a:srgbClr val="D5E0E3"/>
                       </a:solidFill>
                       <a:prstDash val="solid"/>
                       <a:round/>
@@ -10439,7 +10967,7 @@
                     </a:lnL>
                     <a:lnR w="6350" cap="flat" cmpd="sng" algn="ctr">
                       <a:solidFill>
-                        <a:srgbClr val="E2D3B0"/>
+                        <a:srgbClr val="D5E0E3"/>
                       </a:solidFill>
                       <a:prstDash val="solid"/>
                       <a:round/>
@@ -10448,7 +10976,7 @@
                     </a:lnR>
                     <a:lnT w="6350" cap="flat" cmpd="sng" algn="ctr">
                       <a:solidFill>
-                        <a:srgbClr val="E2D3B0"/>
+                        <a:srgbClr val="D5E0E3"/>
                       </a:solidFill>
                       <a:prstDash val="solid"/>
                       <a:round/>
@@ -10457,7 +10985,7 @@
                     </a:lnT>
                     <a:lnB w="6350" cap="flat" cmpd="sng" algn="ctr">
                       <a:solidFill>
-                        <a:srgbClr val="E2D3B0"/>
+                        <a:srgbClr val="D5E0E3"/>
                       </a:solidFill>
                       <a:prstDash val="solid"/>
                       <a:round/>
@@ -10465,7 +10993,7 @@
                       <a:tailEnd type="none" w="med" len="med"/>
                     </a:lnB>
                     <a:solidFill>
-                      <a:srgbClr val="F7F1E3"/>
+                      <a:srgbClr val="F3F6F7"/>
                     </a:solidFill>
                   </a:tcPr>
                 </a:tc>
@@ -10480,7 +11008,7 @@
                       <a:r>
                         <a:rPr lang="en-US" sz="1600" dirty="0">
                           <a:solidFill>
-                            <a:srgbClr val="2A1A10"/>
+                            <a:srgbClr val="0F2D3A"/>
                           </a:solidFill>
                         </a:rPr>
                         <a:t>≈</a:t>
@@ -10491,7 +11019,7 @@
                   <a:tcPr marL="73152" marR="73152" marT="73152" marB="73152" anchor="ctr">
                     <a:lnL w="6350" cap="flat" cmpd="sng" algn="ctr">
                       <a:solidFill>
-                        <a:srgbClr val="E2D3B0"/>
+                        <a:srgbClr val="D5E0E3"/>
                       </a:solidFill>
                       <a:prstDash val="solid"/>
                       <a:round/>
@@ -10500,7 +11028,7 @@
                     </a:lnL>
                     <a:lnR w="6350" cap="flat" cmpd="sng" algn="ctr">
                       <a:solidFill>
-                        <a:srgbClr val="E2D3B0"/>
+                        <a:srgbClr val="D5E0E3"/>
                       </a:solidFill>
                       <a:prstDash val="solid"/>
                       <a:round/>
@@ -10509,7 +11037,7 @@
                     </a:lnR>
                     <a:lnT w="6350" cap="flat" cmpd="sng" algn="ctr">
                       <a:solidFill>
-                        <a:srgbClr val="E2D3B0"/>
+                        <a:srgbClr val="D5E0E3"/>
                       </a:solidFill>
                       <a:prstDash val="solid"/>
                       <a:round/>
@@ -10518,7 +11046,7 @@
                     </a:lnT>
                     <a:lnB w="6350" cap="flat" cmpd="sng" algn="ctr">
                       <a:solidFill>
-                        <a:srgbClr val="E2D3B0"/>
+                        <a:srgbClr val="D5E0E3"/>
                       </a:solidFill>
                       <a:prstDash val="solid"/>
                       <a:round/>
@@ -10526,7 +11054,7 @@
                       <a:tailEnd type="none" w="med" len="med"/>
                     </a:lnB>
                     <a:solidFill>
-                      <a:srgbClr val="F7F1E3"/>
+                      <a:srgbClr val="F3F6F7"/>
                     </a:solidFill>
                   </a:tcPr>
                 </a:tc>
@@ -10541,7 +11069,7 @@
                       <a:r>
                         <a:rPr lang="en-US" sz="1600" dirty="0">
                           <a:solidFill>
-                            <a:srgbClr val="2A1A10"/>
+                            <a:srgbClr val="0F2D3A"/>
                           </a:solidFill>
                         </a:rPr>
                         <a:t>—</a:t>
@@ -10552,7 +11080,7 @@
                   <a:tcPr marL="73152" marR="73152" marT="73152" marB="73152" anchor="ctr">
                     <a:lnL w="6350" cap="flat" cmpd="sng" algn="ctr">
                       <a:solidFill>
-                        <a:srgbClr val="E2D3B0"/>
+                        <a:srgbClr val="D5E0E3"/>
                       </a:solidFill>
                       <a:prstDash val="solid"/>
                       <a:round/>
@@ -10561,7 +11089,7 @@
                     </a:lnL>
                     <a:lnR w="6350" cap="flat" cmpd="sng" algn="ctr">
                       <a:solidFill>
-                        <a:srgbClr val="E2D3B0"/>
+                        <a:srgbClr val="D5E0E3"/>
                       </a:solidFill>
                       <a:prstDash val="solid"/>
                       <a:round/>
@@ -10570,7 +11098,7 @@
                     </a:lnR>
                     <a:lnT w="6350" cap="flat" cmpd="sng" algn="ctr">
                       <a:solidFill>
-                        <a:srgbClr val="E2D3B0"/>
+                        <a:srgbClr val="D5E0E3"/>
                       </a:solidFill>
                       <a:prstDash val="solid"/>
                       <a:round/>
@@ -10579,7 +11107,7 @@
                     </a:lnT>
                     <a:lnB w="6350" cap="flat" cmpd="sng" algn="ctr">
                       <a:solidFill>
-                        <a:srgbClr val="E2D3B0"/>
+                        <a:srgbClr val="D5E0E3"/>
                       </a:solidFill>
                       <a:prstDash val="solid"/>
                       <a:round/>
@@ -10587,7 +11115,7 @@
                       <a:tailEnd type="none" w="med" len="med"/>
                     </a:lnB>
                     <a:solidFill>
-                      <a:srgbClr val="F7F1E3"/>
+                      <a:srgbClr val="F3F6F7"/>
                     </a:solidFill>
                   </a:tcPr>
                 </a:tc>
@@ -10602,7 +11130,7 @@
                       <a:r>
                         <a:rPr lang="en-US" sz="1600" b="1" dirty="0">
                           <a:solidFill>
-                            <a:srgbClr val="B3261E"/>
+                            <a:srgbClr val="F0641E"/>
                           </a:solidFill>
                         </a:rPr>
                         <a:t>✓</a:t>
@@ -10613,7 +11141,7 @@
                   <a:tcPr marL="73152" marR="73152" marT="73152" marB="73152" anchor="ctr">
                     <a:lnL w="6350" cap="flat" cmpd="sng" algn="ctr">
                       <a:solidFill>
-                        <a:srgbClr val="E2D3B0"/>
+                        <a:srgbClr val="D5E0E3"/>
                       </a:solidFill>
                       <a:prstDash val="solid"/>
                       <a:round/>
@@ -10622,7 +11150,7 @@
                     </a:lnL>
                     <a:lnR w="6350" cap="flat" cmpd="sng" algn="ctr">
                       <a:solidFill>
-                        <a:srgbClr val="E2D3B0"/>
+                        <a:srgbClr val="D5E0E3"/>
                       </a:solidFill>
                       <a:prstDash val="solid"/>
                       <a:round/>
@@ -10631,7 +11159,7 @@
                     </a:lnR>
                     <a:lnT w="6350" cap="flat" cmpd="sng" algn="ctr">
                       <a:solidFill>
-                        <a:srgbClr val="E2D3B0"/>
+                        <a:srgbClr val="D5E0E3"/>
                       </a:solidFill>
                       <a:prstDash val="solid"/>
                       <a:round/>
@@ -10640,7 +11168,7 @@
                     </a:lnT>
                     <a:lnB w="6350" cap="flat" cmpd="sng" algn="ctr">
                       <a:solidFill>
-                        <a:srgbClr val="E2D3B0"/>
+                        <a:srgbClr val="D5E0E3"/>
                       </a:solidFill>
                       <a:prstDash val="solid"/>
                       <a:round/>
@@ -10648,7 +11176,7 @@
                       <a:tailEnd type="none" w="med" len="med"/>
                     </a:lnB>
                     <a:solidFill>
-                      <a:srgbClr val="FBEFD9"/>
+                      <a:srgbClr val="FFF0E7"/>
                     </a:solidFill>
                   </a:tcPr>
                 </a:tc>
@@ -10665,7 +11193,7 @@
                       <a:r>
                         <a:rPr lang="en-US" sz="1300" dirty="0">
                           <a:solidFill>
-                            <a:srgbClr val="2A1A10"/>
+                            <a:srgbClr val="0F2D3A"/>
                           </a:solidFill>
                         </a:rPr>
                         <a:t>Показывает, на чём основан план</a:t>
@@ -10676,7 +11204,7 @@
                   <a:tcPr marL="73152" marR="73152" marT="73152" marB="73152" anchor="ctr">
                     <a:lnL w="6350" cap="flat" cmpd="sng" algn="ctr">
                       <a:solidFill>
-                        <a:srgbClr val="E2D3B0"/>
+                        <a:srgbClr val="D5E0E3"/>
                       </a:solidFill>
                       <a:prstDash val="solid"/>
                       <a:round/>
@@ -10685,7 +11213,7 @@
                     </a:lnL>
                     <a:lnR w="6350" cap="flat" cmpd="sng" algn="ctr">
                       <a:solidFill>
-                        <a:srgbClr val="E2D3B0"/>
+                        <a:srgbClr val="D5E0E3"/>
                       </a:solidFill>
                       <a:prstDash val="solid"/>
                       <a:round/>
@@ -10694,7 +11222,7 @@
                     </a:lnR>
                     <a:lnT w="6350" cap="flat" cmpd="sng" algn="ctr">
                       <a:solidFill>
-                        <a:srgbClr val="E2D3B0"/>
+                        <a:srgbClr val="D5E0E3"/>
                       </a:solidFill>
                       <a:prstDash val="solid"/>
                       <a:round/>
@@ -10703,7 +11231,7 @@
                     </a:lnT>
                     <a:lnB w="6350" cap="flat" cmpd="sng" algn="ctr">
                       <a:solidFill>
-                        <a:srgbClr val="E2D3B0"/>
+                        <a:srgbClr val="D5E0E3"/>
                       </a:solidFill>
                       <a:prstDash val="solid"/>
                       <a:round/>
@@ -10726,7 +11254,7 @@
                       <a:r>
                         <a:rPr lang="en-US" sz="1600" dirty="0">
                           <a:solidFill>
-                            <a:srgbClr val="2A1A10"/>
+                            <a:srgbClr val="0F2D3A"/>
                           </a:solidFill>
                         </a:rPr>
                         <a:t>—</a:t>
@@ -10737,7 +11265,7 @@
                   <a:tcPr marL="73152" marR="73152" marT="73152" marB="73152" anchor="ctr">
                     <a:lnL w="6350" cap="flat" cmpd="sng" algn="ctr">
                       <a:solidFill>
-                        <a:srgbClr val="E2D3B0"/>
+                        <a:srgbClr val="D5E0E3"/>
                       </a:solidFill>
                       <a:prstDash val="solid"/>
                       <a:round/>
@@ -10746,7 +11274,7 @@
                     </a:lnL>
                     <a:lnR w="6350" cap="flat" cmpd="sng" algn="ctr">
                       <a:solidFill>
-                        <a:srgbClr val="E2D3B0"/>
+                        <a:srgbClr val="D5E0E3"/>
                       </a:solidFill>
                       <a:prstDash val="solid"/>
                       <a:round/>
@@ -10755,7 +11283,7 @@
                     </a:lnR>
                     <a:lnT w="6350" cap="flat" cmpd="sng" algn="ctr">
                       <a:solidFill>
-                        <a:srgbClr val="E2D3B0"/>
+                        <a:srgbClr val="D5E0E3"/>
                       </a:solidFill>
                       <a:prstDash val="solid"/>
                       <a:round/>
@@ -10764,7 +11292,7 @@
                     </a:lnT>
                     <a:lnB w="6350" cap="flat" cmpd="sng" algn="ctr">
                       <a:solidFill>
-                        <a:srgbClr val="E2D3B0"/>
+                        <a:srgbClr val="D5E0E3"/>
                       </a:solidFill>
                       <a:prstDash val="solid"/>
                       <a:round/>
@@ -10787,7 +11315,7 @@
                       <a:r>
                         <a:rPr lang="en-US" sz="1600" dirty="0">
                           <a:solidFill>
-                            <a:srgbClr val="2A1A10"/>
+                            <a:srgbClr val="0F2D3A"/>
                           </a:solidFill>
                         </a:rPr>
                         <a:t>—</a:t>
@@ -10798,7 +11326,7 @@
                   <a:tcPr marL="73152" marR="73152" marT="73152" marB="73152" anchor="ctr">
                     <a:lnL w="6350" cap="flat" cmpd="sng" algn="ctr">
                       <a:solidFill>
-                        <a:srgbClr val="E2D3B0"/>
+                        <a:srgbClr val="D5E0E3"/>
                       </a:solidFill>
                       <a:prstDash val="solid"/>
                       <a:round/>
@@ -10807,7 +11335,7 @@
                     </a:lnL>
                     <a:lnR w="6350" cap="flat" cmpd="sng" algn="ctr">
                       <a:solidFill>
-                        <a:srgbClr val="E2D3B0"/>
+                        <a:srgbClr val="D5E0E3"/>
                       </a:solidFill>
                       <a:prstDash val="solid"/>
                       <a:round/>
@@ -10816,7 +11344,7 @@
                     </a:lnR>
                     <a:lnT w="6350" cap="flat" cmpd="sng" algn="ctr">
                       <a:solidFill>
-                        <a:srgbClr val="E2D3B0"/>
+                        <a:srgbClr val="D5E0E3"/>
                       </a:solidFill>
                       <a:prstDash val="solid"/>
                       <a:round/>
@@ -10825,7 +11353,7 @@
                     </a:lnT>
                     <a:lnB w="6350" cap="flat" cmpd="sng" algn="ctr">
                       <a:solidFill>
-                        <a:srgbClr val="E2D3B0"/>
+                        <a:srgbClr val="D5E0E3"/>
                       </a:solidFill>
                       <a:prstDash val="solid"/>
                       <a:round/>
@@ -10848,7 +11376,7 @@
                       <a:r>
                         <a:rPr lang="en-US" sz="1600" dirty="0">
                           <a:solidFill>
-                            <a:srgbClr val="2A1A10"/>
+                            <a:srgbClr val="0F2D3A"/>
                           </a:solidFill>
                         </a:rPr>
                         <a:t>✓</a:t>
@@ -10859,7 +11387,7 @@
                   <a:tcPr marL="73152" marR="73152" marT="73152" marB="73152" anchor="ctr">
                     <a:lnL w="6350" cap="flat" cmpd="sng" algn="ctr">
                       <a:solidFill>
-                        <a:srgbClr val="E2D3B0"/>
+                        <a:srgbClr val="D5E0E3"/>
                       </a:solidFill>
                       <a:prstDash val="solid"/>
                       <a:round/>
@@ -10868,7 +11396,7 @@
                     </a:lnL>
                     <a:lnR w="6350" cap="flat" cmpd="sng" algn="ctr">
                       <a:solidFill>
-                        <a:srgbClr val="E2D3B0"/>
+                        <a:srgbClr val="D5E0E3"/>
                       </a:solidFill>
                       <a:prstDash val="solid"/>
                       <a:round/>
@@ -10877,7 +11405,7 @@
                     </a:lnR>
                     <a:lnT w="6350" cap="flat" cmpd="sng" algn="ctr">
                       <a:solidFill>
-                        <a:srgbClr val="E2D3B0"/>
+                        <a:srgbClr val="D5E0E3"/>
                       </a:solidFill>
                       <a:prstDash val="solid"/>
                       <a:round/>
@@ -10886,7 +11414,7 @@
                     </a:lnT>
                     <a:lnB w="6350" cap="flat" cmpd="sng" algn="ctr">
                       <a:solidFill>
-                        <a:srgbClr val="E2D3B0"/>
+                        <a:srgbClr val="D5E0E3"/>
                       </a:solidFill>
                       <a:prstDash val="solid"/>
                       <a:round/>
@@ -10909,7 +11437,7 @@
                       <a:r>
                         <a:rPr lang="en-US" sz="1600" b="1" dirty="0">
                           <a:solidFill>
-                            <a:srgbClr val="B3261E"/>
+                            <a:srgbClr val="F0641E"/>
                           </a:solidFill>
                         </a:rPr>
                         <a:t>✓</a:t>
@@ -10920,7 +11448,7 @@
                   <a:tcPr marL="73152" marR="73152" marT="73152" marB="73152" anchor="ctr">
                     <a:lnL w="6350" cap="flat" cmpd="sng" algn="ctr">
                       <a:solidFill>
-                        <a:srgbClr val="E2D3B0"/>
+                        <a:srgbClr val="D5E0E3"/>
                       </a:solidFill>
                       <a:prstDash val="solid"/>
                       <a:round/>
@@ -10929,7 +11457,7 @@
                     </a:lnL>
                     <a:lnR w="6350" cap="flat" cmpd="sng" algn="ctr">
                       <a:solidFill>
-                        <a:srgbClr val="E2D3B0"/>
+                        <a:srgbClr val="D5E0E3"/>
                       </a:solidFill>
                       <a:prstDash val="solid"/>
                       <a:round/>
@@ -10938,7 +11466,7 @@
                     </a:lnR>
                     <a:lnT w="6350" cap="flat" cmpd="sng" algn="ctr">
                       <a:solidFill>
-                        <a:srgbClr val="E2D3B0"/>
+                        <a:srgbClr val="D5E0E3"/>
                       </a:solidFill>
                       <a:prstDash val="solid"/>
                       <a:round/>
@@ -10947,7 +11475,7 @@
                     </a:lnT>
                     <a:lnB w="6350" cap="flat" cmpd="sng" algn="ctr">
                       <a:solidFill>
-                        <a:srgbClr val="E2D3B0"/>
+                        <a:srgbClr val="D5E0E3"/>
                       </a:solidFill>
                       <a:prstDash val="solid"/>
                       <a:round/>
@@ -10955,7 +11483,7 @@
                       <a:tailEnd type="none" w="med" len="med"/>
                     </a:lnB>
                     <a:solidFill>
-                      <a:srgbClr val="FBEFD9"/>
+                      <a:srgbClr val="FFF0E7"/>
                     </a:solidFill>
                   </a:tcPr>
                 </a:tc>
@@ -11030,7 +11558,7 @@
             <a:lvl1pPr>
               <a:defRPr sz="900">
                 <a:solidFill>
-                  <a:srgbClr val="7D6650"/>
+                  <a:srgbClr val="6B8590"/>
                 </a:solidFill>
               </a:defRPr>
             </a:lvl1pPr>
@@ -11101,9 +11629,9 @@
                 <a:solidFill>
                   <a:schemeClr val="tx2"/>
                 </a:solidFill>
-                <a:latin typeface="Bookman Old Style" pitchFamily="34" charset="0"/>
-                <a:ea typeface="Bookman Old Style" pitchFamily="34" charset="-122"/>
-                <a:cs typeface="Bookman Old Style" pitchFamily="34" charset="-120"/>
+                <a:latin typeface="Arial" pitchFamily="34" charset="0"/>
+                <a:ea typeface="Arial" pitchFamily="34" charset="-122"/>
+                <a:cs typeface="Arial" pitchFamily="34" charset="-120"/>
               </a:rPr>
               <a:t>Как это выглядит</a:t>
             </a:r>
@@ -11128,23 +11656,47 @@
         <p:spPr>
           <a:xfrm>
             <a:off x="457200" y="1005840"/>
-            <a:ext cx="5669280" cy="3543300"/>
+            <a:ext cx="5394960" cy="3371850"/>
           </a:xfrm>
           <a:prstGeom prst="rect">
             <a:avLst/>
           </a:prstGeom>
         </p:spPr>
       </p:pic>
-      <p:sp>
-        <p:nvSpPr>
-          <p:cNvPr id="4" name="Text 1"/>
+      <p:pic>
+        <p:nvPicPr>
+          <p:cNvPr id="4" name="manuscript.png" descr="preencoded.png">    </p:cNvPr>
+          <p:cNvPicPr>
+            <a:picLocks noChangeAspect="1"/>
+          </p:cNvPicPr>
+          <p:nvPr/>
+        </p:nvPicPr>
+        <p:blipFill>
+          <a:blip r:embed="rId2"/>
+          <a:stretch>
+            <a:fillRect/>
+          </a:stretch>
+        </p:blipFill>
+        <p:spPr>
+          <a:xfrm>
+            <a:off x="6126480" y="1005840"/>
+            <a:ext cx="2560320" cy="1600200"/>
+          </a:xfrm>
+          <a:prstGeom prst="rect">
+            <a:avLst/>
+          </a:prstGeom>
+        </p:spPr>
+      </p:pic>
+      <p:sp>
+        <p:nvSpPr>
+          <p:cNvPr id="5" name="Text 1"/>
           <p:cNvSpPr txBox="1"/>
           <p:nvPr/>
         </p:nvSpPr>
         <p:spPr>
           <a:xfrm>
-            <a:off x="6400800" y="1051560"/>
-            <a:ext cx="2286000" cy="320040"/>
+            <a:off x="6126480" y="2788920"/>
+            <a:ext cx="2560320" cy="320040"/>
           </a:xfrm>
           <a:prstGeom prst="rect">
             <a:avLst/>
@@ -11160,27 +11712,27 @@
               <a:buNone/>
             </a:pPr>
             <a:r>
-              <a:rPr lang="en-US" sz="1500" b="1" dirty="0">
+              <a:rPr lang="en-US" sz="1400" b="1" dirty="0">
                 <a:solidFill>
                   <a:schemeClr val="accent1"/>
                 </a:solidFill>
               </a:rPr>
-              <a:t>Интенты</a:t>
-            </a:r>
-            <a:endParaRPr lang="en-US" sz="1500" dirty="0"/>
-          </a:p>
-        </p:txBody>
-      </p:sp>
-      <p:sp>
-        <p:nvSpPr>
-          <p:cNvPr id="5" name="Text 2"/>
+              <a:t>Режим «Грамота»</a:t>
+            </a:r>
+            <a:endParaRPr lang="en-US" sz="1400" dirty="0"/>
+          </a:p>
+        </p:txBody>
+      </p:sp>
+      <p:sp>
+        <p:nvSpPr>
+          <p:cNvPr id="6" name="Text 2"/>
           <p:cNvSpPr txBox="1"/>
           <p:nvPr/>
         </p:nvSpPr>
         <p:spPr>
           <a:xfrm>
-            <a:off x="6400800" y="1371600"/>
-            <a:ext cx="2286000" cy="502920"/>
+            <a:off x="6126480" y="3108960"/>
+            <a:ext cx="2560320" cy="1005840"/>
           </a:xfrm>
           <a:prstGeom prst="rect">
             <a:avLst/>
@@ -11196,27 +11748,27 @@
               <a:buNone/>
             </a:pPr>
             <a:r>
-              <a:rPr lang="en-US" sz="1200" dirty="0">
+              <a:rPr lang="en-US" sz="1100" dirty="0">
                 <a:solidFill>
                   <a:schemeClr val="tx1"/>
                 </a:solidFill>
               </a:rPr>
-              <a:t>сроки, ночёвка, транспорт — чипами над грамотой</a:t>
-            </a:r>
-            <a:endParaRPr lang="en-US" sz="1200" dirty="0"/>
-          </a:p>
-        </p:txBody>
-      </p:sp>
-      <p:sp>
-        <p:nvSpPr>
-          <p:cNvPr id="6" name="Text 3"/>
+              <a:t>Тот же план в виде старорусской рукописи: буквица, ѣ и ъ, цифирь с титлом, печать «Свѣрено». Переключается одной кнопкой</a:t>
+            </a:r>
+            <a:endParaRPr lang="en-US" sz="1100" dirty="0"/>
+          </a:p>
+        </p:txBody>
+      </p:sp>
+      <p:sp>
+        <p:nvSpPr>
+          <p:cNvPr id="7" name="Text 3"/>
           <p:cNvSpPr txBox="1"/>
           <p:nvPr/>
         </p:nvSpPr>
         <p:spPr>
           <a:xfrm>
-            <a:off x="6400800" y="1947672"/>
-            <a:ext cx="2286000" cy="320040"/>
+            <a:off x="6126480" y="4114800"/>
+            <a:ext cx="2560320" cy="548640"/>
           </a:xfrm>
           <a:prstGeom prst="rect">
             <a:avLst/>
@@ -11225,201 +11777,21 @@
           <a:ln/>
         </p:spPr>
         <p:txBody>
-          <a:bodyPr wrap="square" lIns="0" tIns="0" rIns="0" bIns="0" rtlCol="0" anchor="ctr"/>
+          <a:bodyPr wrap="square" lIns="0" tIns="0" rIns="0" bIns="0" rtlCol="0" anchor="t"/>
           <a:lstStyle/>
           <a:p>
             <a:pPr indent="0" marL="0">
               <a:buNone/>
             </a:pPr>
             <a:r>
-              <a:rPr lang="en-US" sz="1500" b="1" dirty="0">
-                <a:solidFill>
-                  <a:schemeClr val="accent1"/>
-                </a:solidFill>
-              </a:rPr>
-              <a:t>Грамота</a:t>
-            </a:r>
-            <a:endParaRPr lang="en-US" sz="1500" dirty="0"/>
-          </a:p>
-        </p:txBody>
-      </p:sp>
-      <p:sp>
-        <p:nvSpPr>
-          <p:cNvPr id="7" name="Text 4"/>
-          <p:cNvSpPr txBox="1"/>
-          <p:nvPr/>
-        </p:nvSpPr>
-        <p:spPr>
-          <a:xfrm>
-            <a:off x="6400800" y="2267712"/>
-            <a:ext cx="2286000" cy="502920"/>
-          </a:xfrm>
-          <a:prstGeom prst="rect">
-            <a:avLst/>
-          </a:prstGeom>
-          <a:noFill/>
-          <a:ln/>
-        </p:spPr>
-        <p:txBody>
-          <a:bodyPr wrap="square" lIns="0" tIns="0" rIns="0" bIns="0" rtlCol="0" anchor="t"/>
-          <a:lstStyle/>
-          <a:p>
-            <a:pPr indent="0" marL="0">
-              <a:buNone/>
-            </a:pPr>
-            <a:r>
-              <a:rPr lang="en-US" sz="1200" dirty="0">
-                <a:solidFill>
-                  <a:schemeClr val="tx1"/>
-                </a:solidFill>
-              </a:rPr>
-              <a:t>буквица, киноварь, ѣ и ъ, цифирь с титлом</a:t>
-            </a:r>
-            <a:endParaRPr lang="en-US" sz="1200" dirty="0"/>
-          </a:p>
-        </p:txBody>
-      </p:sp>
-      <p:sp>
-        <p:nvSpPr>
-          <p:cNvPr id="8" name="Text 5"/>
-          <p:cNvSpPr txBox="1"/>
-          <p:nvPr/>
-        </p:nvSpPr>
-        <p:spPr>
-          <a:xfrm>
-            <a:off x="6400800" y="2843784"/>
-            <a:ext cx="2286000" cy="320040"/>
-          </a:xfrm>
-          <a:prstGeom prst="rect">
-            <a:avLst/>
-          </a:prstGeom>
-          <a:noFill/>
-          <a:ln/>
-        </p:spPr>
-        <p:txBody>
-          <a:bodyPr wrap="square" lIns="0" tIns="0" rIns="0" bIns="0" rtlCol="0" anchor="ctr"/>
-          <a:lstStyle/>
-          <a:p>
-            <a:pPr indent="0" marL="0">
-              <a:buNone/>
-            </a:pPr>
-            <a:r>
-              <a:rPr lang="en-US" sz="1500" b="1" dirty="0">
-                <a:solidFill>
-                  <a:schemeClr val="accent1"/>
-                </a:solidFill>
-              </a:rPr>
-              <a:t>Чертёж пути</a:t>
-            </a:r>
-            <a:endParaRPr lang="en-US" sz="1500" dirty="0"/>
-          </a:p>
-        </p:txBody>
-      </p:sp>
-      <p:sp>
-        <p:nvSpPr>
-          <p:cNvPr id="9" name="Text 6"/>
-          <p:cNvSpPr txBox="1"/>
-          <p:nvPr/>
-        </p:nvSpPr>
-        <p:spPr>
-          <a:xfrm>
-            <a:off x="6400800" y="3163824"/>
-            <a:ext cx="2286000" cy="502920"/>
-          </a:xfrm>
-          <a:prstGeom prst="rect">
-            <a:avLst/>
-          </a:prstGeom>
-          <a:noFill/>
-          <a:ln/>
-        </p:spPr>
-        <p:txBody>
-          <a:bodyPr wrap="square" lIns="0" tIns="0" rIns="0" bIns="0" rtlCol="0" anchor="t"/>
-          <a:lstStyle/>
-          <a:p>
-            <a:pPr indent="0" marL="0">
-              <a:buNone/>
-            </a:pPr>
-            <a:r>
-              <a:rPr lang="en-US" sz="1200" dirty="0">
-                <a:solidFill>
-                  <a:schemeClr val="tx1"/>
-                </a:solidFill>
-              </a:rPr>
-              <a:t>маршрут по дням на OSM, АЗС</a:t>
-            </a:r>
-            <a:endParaRPr lang="en-US" sz="1200" dirty="0"/>
-          </a:p>
-        </p:txBody>
-      </p:sp>
-      <p:sp>
-        <p:nvSpPr>
-          <p:cNvPr id="10" name="Text 7"/>
-          <p:cNvSpPr txBox="1"/>
-          <p:nvPr/>
-        </p:nvSpPr>
-        <p:spPr>
-          <a:xfrm>
-            <a:off x="6400800" y="3739896"/>
-            <a:ext cx="2286000" cy="320040"/>
-          </a:xfrm>
-          <a:prstGeom prst="rect">
-            <a:avLst/>
-          </a:prstGeom>
-          <a:noFill/>
-          <a:ln/>
-        </p:spPr>
-        <p:txBody>
-          <a:bodyPr wrap="square" lIns="0" tIns="0" rIns="0" bIns="0" rtlCol="0" anchor="ctr"/>
-          <a:lstStyle/>
-          <a:p>
-            <a:pPr indent="0" marL="0">
-              <a:buNone/>
-            </a:pPr>
-            <a:r>
-              <a:rPr lang="en-US" sz="1500" b="1" dirty="0">
-                <a:solidFill>
-                  <a:schemeClr val="accent1"/>
-                </a:solidFill>
-              </a:rPr>
-              <a:t>Лѣтопись трудовъ</a:t>
-            </a:r>
-            <a:endParaRPr lang="en-US" sz="1500" dirty="0"/>
-          </a:p>
-        </p:txBody>
-      </p:sp>
-      <p:sp>
-        <p:nvSpPr>
-          <p:cNvPr id="11" name="Text 8"/>
-          <p:cNvSpPr txBox="1"/>
-          <p:nvPr/>
-        </p:nvSpPr>
-        <p:spPr>
-          <a:xfrm>
-            <a:off x="6400800" y="4059936"/>
-            <a:ext cx="2286000" cy="502920"/>
-          </a:xfrm>
-          <a:prstGeom prst="rect">
-            <a:avLst/>
-          </a:prstGeom>
-          <a:noFill/>
-          <a:ln/>
-        </p:spPr>
-        <p:txBody>
-          <a:bodyPr wrap="square" lIns="0" tIns="0" rIns="0" bIns="0" rtlCol="0" anchor="t"/>
-          <a:lstStyle/>
-          <a:p>
-            <a:pPr indent="0" marL="0">
-              <a:buNone/>
-            </a:pPr>
-            <a:r>
-              <a:rPr lang="en-US" sz="1200" dirty="0">
-                <a:solidFill>
-                  <a:schemeClr val="tx1"/>
-                </a:solidFill>
-              </a:rPr>
-              <a:t>шаги агента вживую по SSE</a:t>
-            </a:r>
-            <a:endParaRPr lang="en-US" sz="1200" dirty="0"/>
+              <a:rPr lang="en-US" sz="1000" i="1" dirty="0">
+                <a:solidFill>
+                  <a:schemeClr val="accent6"/>
+                </a:solidFill>
+              </a:rPr>
+              <a:t>Слева — обычный вид: интенты из запроса, статус сверки, дни таймлайном, карта и шаги агента вживую</a:t>
+            </a:r>
+            <a:endParaRPr lang="en-US" sz="1000" dirty="0"/>
           </a:p>
         </p:txBody>
       </p:sp>
@@ -11453,7 +11825,7 @@
             <a:lvl1pPr>
               <a:defRPr sz="900">
                 <a:solidFill>
-                  <a:srgbClr val="7D6650"/>
+                  <a:srgbClr val="6B8590"/>
                 </a:solidFill>
               </a:defRPr>
             </a:lvl1pPr>
@@ -11524,9 +11896,9 @@
                 <a:solidFill>
                   <a:schemeClr val="tx2"/>
                 </a:solidFill>
-                <a:latin typeface="Bookman Old Style" pitchFamily="34" charset="0"/>
-                <a:ea typeface="Bookman Old Style" pitchFamily="34" charset="-122"/>
-                <a:cs typeface="Bookman Old Style" pitchFamily="34" charset="-120"/>
+                <a:latin typeface="Arial" pitchFamily="34" charset="0"/>
+                <a:ea typeface="Arial" pitchFamily="34" charset="-122"/>
+                <a:cs typeface="Arial" pitchFamily="34" charset="-120"/>
               </a:rPr>
               <a:t>Архитектура</a:t>
             </a:r>
@@ -12292,7 +12664,7 @@
           <a:noFill/>
           <a:ln w="19050">
             <a:solidFill>
-              <a:srgbClr val="5B4431"/>
+              <a:srgbClr val="3D5A66"/>
             </a:solidFill>
             <a:prstDash val="solid"/>
             <a:headEnd type="triangle"/>
@@ -12317,7 +12689,7 @@
           <a:noFill/>
           <a:ln w="19050">
             <a:solidFill>
-              <a:srgbClr val="5B4431"/>
+              <a:srgbClr val="3D5A66"/>
             </a:solidFill>
             <a:prstDash val="solid"/>
             <a:headEnd type="triangle"/>
@@ -12342,7 +12714,7 @@
           <a:noFill/>
           <a:ln w="19050">
             <a:solidFill>
-              <a:srgbClr val="5B4431"/>
+              <a:srgbClr val="3D5A66"/>
             </a:solidFill>
             <a:prstDash val="solid"/>
             <a:headEnd type="triangle"/>
@@ -12416,7 +12788,7 @@
             <a:lvl1pPr>
               <a:defRPr sz="900">
                 <a:solidFill>
-                  <a:srgbClr val="7D6650"/>
+                  <a:srgbClr val="6B8590"/>
                 </a:solidFill>
               </a:defRPr>
             </a:lvl1pPr>
@@ -12487,9 +12859,9 @@
                 <a:solidFill>
                   <a:schemeClr val="tx2"/>
                 </a:solidFill>
-                <a:latin typeface="Bookman Old Style" pitchFamily="34" charset="0"/>
-                <a:ea typeface="Bookman Old Style" pitchFamily="34" charset="-122"/>
-                <a:cs typeface="Bookman Old Style" pitchFamily="34" charset="-120"/>
+                <a:latin typeface="Arial" pitchFamily="34" charset="0"/>
+                <a:ea typeface="Arial" pitchFamily="34" charset="-122"/>
+                <a:cs typeface="Arial" pitchFamily="34" charset="-120"/>
               </a:rPr>
               <a:t>Агентный цикл, а не один промпт</a:t>
             </a:r>
@@ -13154,11 +13526,11 @@
             </a:avLst>
           </a:prstGeom>
           <a:solidFill>
-            <a:srgbClr val="FBEFD9"/>
+            <a:srgbClr val="FFF0E7"/>
           </a:solidFill>
           <a:ln w="12700">
             <a:solidFill>
-              <a:srgbClr val="FBEFD9"/>
+              <a:srgbClr val="FFF0E7"/>
             </a:solidFill>
             <a:prstDash val="solid"/>
           </a:ln>
@@ -13314,11 +13686,11 @@
             </a:avLst>
           </a:prstGeom>
           <a:solidFill>
-            <a:srgbClr val="FBEFD9"/>
+            <a:srgbClr val="FFF0E7"/>
           </a:solidFill>
           <a:ln w="12700">
             <a:solidFill>
-              <a:srgbClr val="FBEFD9"/>
+              <a:srgbClr val="FFF0E7"/>
             </a:solidFill>
             <a:prstDash val="solid"/>
           </a:ln>
@@ -13474,11 +13846,11 @@
             </a:avLst>
           </a:prstGeom>
           <a:solidFill>
-            <a:srgbClr val="E7F0EF"/>
+            <a:srgbClr val="E3F0EC"/>
           </a:solidFill>
           <a:ln w="12700">
             <a:solidFill>
-              <a:srgbClr val="2F7482"/>
+              <a:srgbClr val="2E6B62"/>
             </a:solidFill>
             <a:prstDash val="solid"/>
           </a:ln>
@@ -13537,11 +13909,11 @@
             </a:avLst>
           </a:prstGeom>
           <a:solidFill>
-            <a:srgbClr val="FBE9E7"/>
+            <a:srgbClr val="FDECEA"/>
           </a:solidFill>
           <a:ln w="12700">
             <a:solidFill>
-              <a:srgbClr val="B3261E"/>
+              <a:srgbClr val="F0641E"/>
             </a:solidFill>
             <a:prstDash val="solid"/>
           </a:ln>
@@ -13649,7 +14021,7 @@
             <a:lvl1pPr>
               <a:defRPr sz="900">
                 <a:solidFill>
-                  <a:srgbClr val="7D6650"/>
+                  <a:srgbClr val="6B8590"/>
                 </a:solidFill>
               </a:defRPr>
             </a:lvl1pPr>
@@ -13720,9 +14092,9 @@
                 <a:solidFill>
                   <a:schemeClr val="tx2"/>
                 </a:solidFill>
-                <a:latin typeface="Bookman Old Style" pitchFamily="34" charset="0"/>
-                <a:ea typeface="Bookman Old Style" pitchFamily="34" charset="-122"/>
-                <a:cs typeface="Bookman Old Style" pitchFamily="34" charset="-120"/>
+                <a:latin typeface="Arial" pitchFamily="34" charset="0"/>
+                <a:ea typeface="Arial" pitchFamily="34" charset="-122"/>
+                <a:cs typeface="Arial" pitchFamily="34" charset="-120"/>
               </a:rPr>
               <a:t>Тулы и источники данных</a:t>
             </a:r>
@@ -13780,7 +14152,7 @@
                   <a:tcPr marL="54864" marR="54864" marT="54864" marB="54864" anchor="ctr">
                     <a:lnL w="6350" cap="flat" cmpd="sng" algn="ctr">
                       <a:solidFill>
-                        <a:srgbClr val="E2D3B0"/>
+                        <a:srgbClr val="D5E0E3"/>
                       </a:solidFill>
                       <a:prstDash val="solid"/>
                       <a:round/>
@@ -13789,7 +14161,7 @@
                     </a:lnL>
                     <a:lnR w="6350" cap="flat" cmpd="sng" algn="ctr">
                       <a:solidFill>
-                        <a:srgbClr val="E2D3B0"/>
+                        <a:srgbClr val="D5E0E3"/>
                       </a:solidFill>
                       <a:prstDash val="solid"/>
                       <a:round/>
@@ -13798,7 +14170,7 @@
                     </a:lnR>
                     <a:lnT w="6350" cap="flat" cmpd="sng" algn="ctr">
                       <a:solidFill>
-                        <a:srgbClr val="E2D3B0"/>
+                        <a:srgbClr val="D5E0E3"/>
                       </a:solidFill>
                       <a:prstDash val="solid"/>
                       <a:round/>
@@ -13807,7 +14179,7 @@
                     </a:lnT>
                     <a:lnB w="6350" cap="flat" cmpd="sng" algn="ctr">
                       <a:solidFill>
-                        <a:srgbClr val="E2D3B0"/>
+                        <a:srgbClr val="D5E0E3"/>
                       </a:solidFill>
                       <a:prstDash val="solid"/>
                       <a:round/>
@@ -13815,7 +14187,7 @@
                       <a:tailEnd type="none" w="med" len="med"/>
                     </a:lnB>
                     <a:solidFill>
-                      <a:srgbClr val="0C2630"/>
+                      <a:srgbClr val="0F2D3A"/>
                     </a:solidFill>
                   </a:tcPr>
                 </a:tc>
@@ -13841,7 +14213,7 @@
                   <a:tcPr marL="54864" marR="54864" marT="54864" marB="54864" anchor="ctr">
                     <a:lnL w="6350" cap="flat" cmpd="sng" algn="ctr">
                       <a:solidFill>
-                        <a:srgbClr val="E2D3B0"/>
+                        <a:srgbClr val="D5E0E3"/>
                       </a:solidFill>
                       <a:prstDash val="solid"/>
                       <a:round/>
@@ -13850,7 +14222,7 @@
                     </a:lnL>
                     <a:lnR w="6350" cap="flat" cmpd="sng" algn="ctr">
                       <a:solidFill>
-                        <a:srgbClr val="E2D3B0"/>
+                        <a:srgbClr val="D5E0E3"/>
                       </a:solidFill>
                       <a:prstDash val="solid"/>
                       <a:round/>
@@ -13859,7 +14231,7 @@
                     </a:lnR>
                     <a:lnT w="6350" cap="flat" cmpd="sng" algn="ctr">
                       <a:solidFill>
-                        <a:srgbClr val="E2D3B0"/>
+                        <a:srgbClr val="D5E0E3"/>
                       </a:solidFill>
                       <a:prstDash val="solid"/>
                       <a:round/>
@@ -13868,7 +14240,7 @@
                     </a:lnT>
                     <a:lnB w="6350" cap="flat" cmpd="sng" algn="ctr">
                       <a:solidFill>
-                        <a:srgbClr val="E2D3B0"/>
+                        <a:srgbClr val="D5E0E3"/>
                       </a:solidFill>
                       <a:prstDash val="solid"/>
                       <a:round/>
@@ -13876,7 +14248,7 @@
                       <a:tailEnd type="none" w="med" len="med"/>
                     </a:lnB>
                     <a:solidFill>
-                      <a:srgbClr val="0C2630"/>
+                      <a:srgbClr val="0F2D3A"/>
                     </a:solidFill>
                   </a:tcPr>
                 </a:tc>
@@ -13902,7 +14274,7 @@
                   <a:tcPr marL="54864" marR="54864" marT="54864" marB="54864" anchor="ctr">
                     <a:lnL w="6350" cap="flat" cmpd="sng" algn="ctr">
                       <a:solidFill>
-                        <a:srgbClr val="E2D3B0"/>
+                        <a:srgbClr val="D5E0E3"/>
                       </a:solidFill>
                       <a:prstDash val="solid"/>
                       <a:round/>
@@ -13911,7 +14283,7 @@
                     </a:lnL>
                     <a:lnR w="6350" cap="flat" cmpd="sng" algn="ctr">
                       <a:solidFill>
-                        <a:srgbClr val="E2D3B0"/>
+                        <a:srgbClr val="D5E0E3"/>
                       </a:solidFill>
                       <a:prstDash val="solid"/>
                       <a:round/>
@@ -13920,7 +14292,7 @@
                     </a:lnR>
                     <a:lnT w="6350" cap="flat" cmpd="sng" algn="ctr">
                       <a:solidFill>
-                        <a:srgbClr val="E2D3B0"/>
+                        <a:srgbClr val="D5E0E3"/>
                       </a:solidFill>
                       <a:prstDash val="solid"/>
                       <a:round/>
@@ -13929,7 +14301,7 @@
                     </a:lnT>
                     <a:lnB w="6350" cap="flat" cmpd="sng" algn="ctr">
                       <a:solidFill>
-                        <a:srgbClr val="E2D3B0"/>
+                        <a:srgbClr val="D5E0E3"/>
                       </a:solidFill>
                       <a:prstDash val="solid"/>
                       <a:round/>
@@ -13937,7 +14309,7 @@
                       <a:tailEnd type="none" w="med" len="med"/>
                     </a:lnB>
                     <a:solidFill>
-                      <a:srgbClr val="0C2630"/>
+                      <a:srgbClr val="0F2D3A"/>
                     </a:solidFill>
                   </a:tcPr>
                 </a:tc>
@@ -13954,7 +14326,7 @@
                       <a:r>
                         <a:rPr lang="en-US" sz="1100" dirty="0">
                           <a:solidFill>
-                            <a:srgbClr val="2A1A10"/>
+                            <a:srgbClr val="0F2D3A"/>
                           </a:solidFill>
                           <a:latin typeface="Courier New" pitchFamily="34" charset="0"/>
                           <a:ea typeface="Courier New" pitchFamily="34" charset="-122"/>
@@ -13972,7 +14344,7 @@
                   <a:tcPr marL="54864" marR="54864" marT="54864" marB="54864" anchor="ctr">
                     <a:lnL w="6350" cap="flat" cmpd="sng" algn="ctr">
                       <a:solidFill>
-                        <a:srgbClr val="E2D3B0"/>
+                        <a:srgbClr val="D5E0E3"/>
                       </a:solidFill>
                       <a:prstDash val="solid"/>
                       <a:round/>
@@ -13981,7 +14353,7 @@
                     </a:lnL>
                     <a:lnR w="6350" cap="flat" cmpd="sng" algn="ctr">
                       <a:solidFill>
-                        <a:srgbClr val="E2D3B0"/>
+                        <a:srgbClr val="D5E0E3"/>
                       </a:solidFill>
                       <a:prstDash val="solid"/>
                       <a:round/>
@@ -13990,7 +14362,7 @@
                     </a:lnR>
                     <a:lnT w="6350" cap="flat" cmpd="sng" algn="ctr">
                       <a:solidFill>
-                        <a:srgbClr val="E2D3B0"/>
+                        <a:srgbClr val="D5E0E3"/>
                       </a:solidFill>
                       <a:prstDash val="solid"/>
                       <a:round/>
@@ -13999,7 +14371,7 @@
                     </a:lnT>
                     <a:lnB w="6350" cap="flat" cmpd="sng" algn="ctr">
                       <a:solidFill>
-                        <a:srgbClr val="E2D3B0"/>
+                        <a:srgbClr val="D5E0E3"/>
                       </a:solidFill>
                       <a:prstDash val="solid"/>
                       <a:round/>
@@ -14007,7 +14379,7 @@
                       <a:tailEnd type="none" w="med" len="med"/>
                     </a:lnB>
                     <a:solidFill>
-                      <a:srgbClr val="F7F1E3"/>
+                      <a:srgbClr val="F3F6F7"/>
                     </a:solidFill>
                   </a:tcPr>
                 </a:tc>
@@ -14022,7 +14394,7 @@
                       <a:r>
                         <a:rPr lang="en-US" sz="1200" dirty="0">
                           <a:solidFill>
-                            <a:srgbClr val="2A1A10"/>
+                            <a:srgbClr val="0F2D3A"/>
                           </a:solidFill>
                         </a:rPr>
                         <a:t>Open-Meteo</a:t>
@@ -14033,7 +14405,7 @@
                   <a:tcPr marL="54864" marR="54864" marT="54864" marB="54864" anchor="ctr">
                     <a:lnL w="6350" cap="flat" cmpd="sng" algn="ctr">
                       <a:solidFill>
-                        <a:srgbClr val="E2D3B0"/>
+                        <a:srgbClr val="D5E0E3"/>
                       </a:solidFill>
                       <a:prstDash val="solid"/>
                       <a:round/>
@@ -14042,7 +14414,7 @@
                     </a:lnL>
                     <a:lnR w="6350" cap="flat" cmpd="sng" algn="ctr">
                       <a:solidFill>
-                        <a:srgbClr val="E2D3B0"/>
+                        <a:srgbClr val="D5E0E3"/>
                       </a:solidFill>
                       <a:prstDash val="solid"/>
                       <a:round/>
@@ -14051,7 +14423,7 @@
                     </a:lnR>
                     <a:lnT w="6350" cap="flat" cmpd="sng" algn="ctr">
                       <a:solidFill>
-                        <a:srgbClr val="E2D3B0"/>
+                        <a:srgbClr val="D5E0E3"/>
                       </a:solidFill>
                       <a:prstDash val="solid"/>
                       <a:round/>
@@ -14060,7 +14432,7 @@
                     </a:lnT>
                     <a:lnB w="6350" cap="flat" cmpd="sng" algn="ctr">
                       <a:solidFill>
-                        <a:srgbClr val="E2D3B0"/>
+                        <a:srgbClr val="D5E0E3"/>
                       </a:solidFill>
                       <a:prstDash val="solid"/>
                       <a:round/>
@@ -14068,7 +14440,7 @@
                       <a:tailEnd type="none" w="med" len="med"/>
                     </a:lnB>
                     <a:solidFill>
-                      <a:srgbClr val="F7F1E3"/>
+                      <a:srgbClr val="F3F6F7"/>
                     </a:solidFill>
                   </a:tcPr>
                 </a:tc>
@@ -14083,7 +14455,7 @@
                       <a:r>
                         <a:rPr lang="en-US" sz="1200" b="1" dirty="0">
                           <a:solidFill>
-                            <a:srgbClr val="2F6B3A"/>
+                            <a:srgbClr val="2E6B62"/>
                           </a:solidFill>
                         </a:rPr>
                         <a:t>реальный</a:t>
@@ -14094,7 +14466,7 @@
                   <a:tcPr marL="54864" marR="54864" marT="54864" marB="54864" anchor="ctr">
                     <a:lnL w="6350" cap="flat" cmpd="sng" algn="ctr">
                       <a:solidFill>
-                        <a:srgbClr val="E2D3B0"/>
+                        <a:srgbClr val="D5E0E3"/>
                       </a:solidFill>
                       <a:prstDash val="solid"/>
                       <a:round/>
@@ -14103,7 +14475,7 @@
                     </a:lnL>
                     <a:lnR w="6350" cap="flat" cmpd="sng" algn="ctr">
                       <a:solidFill>
-                        <a:srgbClr val="E2D3B0"/>
+                        <a:srgbClr val="D5E0E3"/>
                       </a:solidFill>
                       <a:prstDash val="solid"/>
                       <a:round/>
@@ -14112,7 +14484,7 @@
                     </a:lnR>
                     <a:lnT w="6350" cap="flat" cmpd="sng" algn="ctr">
                       <a:solidFill>
-                        <a:srgbClr val="E2D3B0"/>
+                        <a:srgbClr val="D5E0E3"/>
                       </a:solidFill>
                       <a:prstDash val="solid"/>
                       <a:round/>
@@ -14121,7 +14493,7 @@
                     </a:lnT>
                     <a:lnB w="6350" cap="flat" cmpd="sng" algn="ctr">
                       <a:solidFill>
-                        <a:srgbClr val="E2D3B0"/>
+                        <a:srgbClr val="D5E0E3"/>
                       </a:solidFill>
                       <a:prstDash val="solid"/>
                       <a:round/>
@@ -14129,7 +14501,7 @@
                       <a:tailEnd type="none" w="med" len="med"/>
                     </a:lnB>
                     <a:solidFill>
-                      <a:srgbClr val="F7F1E3"/>
+                      <a:srgbClr val="F3F6F7"/>
                     </a:solidFill>
                   </a:tcPr>
                 </a:tc>
@@ -14146,7 +14518,7 @@
                       <a:r>
                         <a:rPr lang="en-US" sz="1100" dirty="0">
                           <a:solidFill>
-                            <a:srgbClr val="2A1A10"/>
+                            <a:srgbClr val="0F2D3A"/>
                           </a:solidFill>
                           <a:latin typeface="Courier New" pitchFamily="34" charset="0"/>
                           <a:ea typeface="Courier New" pitchFamily="34" charset="-122"/>
@@ -14164,7 +14536,7 @@
                   <a:tcPr marL="54864" marR="54864" marT="54864" marB="54864" anchor="ctr">
                     <a:lnL w="6350" cap="flat" cmpd="sng" algn="ctr">
                       <a:solidFill>
-                        <a:srgbClr val="E2D3B0"/>
+                        <a:srgbClr val="D5E0E3"/>
                       </a:solidFill>
                       <a:prstDash val="solid"/>
                       <a:round/>
@@ -14173,7 +14545,7 @@
                     </a:lnL>
                     <a:lnR w="6350" cap="flat" cmpd="sng" algn="ctr">
                       <a:solidFill>
-                        <a:srgbClr val="E2D3B0"/>
+                        <a:srgbClr val="D5E0E3"/>
                       </a:solidFill>
                       <a:prstDash val="solid"/>
                       <a:round/>
@@ -14182,7 +14554,7 @@
                     </a:lnR>
                     <a:lnT w="6350" cap="flat" cmpd="sng" algn="ctr">
                       <a:solidFill>
-                        <a:srgbClr val="E2D3B0"/>
+                        <a:srgbClr val="D5E0E3"/>
                       </a:solidFill>
                       <a:prstDash val="solid"/>
                       <a:round/>
@@ -14191,7 +14563,7 @@
                     </a:lnT>
                     <a:lnB w="6350" cap="flat" cmpd="sng" algn="ctr">
                       <a:solidFill>
-                        <a:srgbClr val="E2D3B0"/>
+                        <a:srgbClr val="D5E0E3"/>
                       </a:solidFill>
                       <a:prstDash val="solid"/>
                       <a:round/>
@@ -14214,7 +14586,7 @@
                       <a:r>
                         <a:rPr lang="en-US" sz="1200" dirty="0">
                           <a:solidFill>
-                            <a:srgbClr val="2A1A10"/>
+                            <a:srgbClr val="0F2D3A"/>
                           </a:solidFill>
                         </a:rPr>
                         <a:t>OSRM (OSM): машина, вело, пешком</a:t>
@@ -14225,7 +14597,7 @@
                   <a:tcPr marL="54864" marR="54864" marT="54864" marB="54864" anchor="ctr">
                     <a:lnL w="6350" cap="flat" cmpd="sng" algn="ctr">
                       <a:solidFill>
-                        <a:srgbClr val="E2D3B0"/>
+                        <a:srgbClr val="D5E0E3"/>
                       </a:solidFill>
                       <a:prstDash val="solid"/>
                       <a:round/>
@@ -14234,7 +14606,7 @@
                     </a:lnL>
                     <a:lnR w="6350" cap="flat" cmpd="sng" algn="ctr">
                       <a:solidFill>
-                        <a:srgbClr val="E2D3B0"/>
+                        <a:srgbClr val="D5E0E3"/>
                       </a:solidFill>
                       <a:prstDash val="solid"/>
                       <a:round/>
@@ -14243,7 +14615,7 @@
                     </a:lnR>
                     <a:lnT w="6350" cap="flat" cmpd="sng" algn="ctr">
                       <a:solidFill>
-                        <a:srgbClr val="E2D3B0"/>
+                        <a:srgbClr val="D5E0E3"/>
                       </a:solidFill>
                       <a:prstDash val="solid"/>
                       <a:round/>
@@ -14252,7 +14624,7 @@
                     </a:lnT>
                     <a:lnB w="6350" cap="flat" cmpd="sng" algn="ctr">
                       <a:solidFill>
-                        <a:srgbClr val="E2D3B0"/>
+                        <a:srgbClr val="D5E0E3"/>
                       </a:solidFill>
                       <a:prstDash val="solid"/>
                       <a:round/>
@@ -14275,7 +14647,7 @@
                       <a:r>
                         <a:rPr lang="en-US" sz="1200" b="1" dirty="0">
                           <a:solidFill>
-                            <a:srgbClr val="2F6B3A"/>
+                            <a:srgbClr val="2E6B62"/>
                           </a:solidFill>
                         </a:rPr>
                         <a:t>реальный</a:t>
@@ -14286,7 +14658,7 @@
                   <a:tcPr marL="54864" marR="54864" marT="54864" marB="54864" anchor="ctr">
                     <a:lnL w="6350" cap="flat" cmpd="sng" algn="ctr">
                       <a:solidFill>
-                        <a:srgbClr val="E2D3B0"/>
+                        <a:srgbClr val="D5E0E3"/>
                       </a:solidFill>
                       <a:prstDash val="solid"/>
                       <a:round/>
@@ -14295,7 +14667,7 @@
                     </a:lnL>
                     <a:lnR w="6350" cap="flat" cmpd="sng" algn="ctr">
                       <a:solidFill>
-                        <a:srgbClr val="E2D3B0"/>
+                        <a:srgbClr val="D5E0E3"/>
                       </a:solidFill>
                       <a:prstDash val="solid"/>
                       <a:round/>
@@ -14304,7 +14676,7 @@
                     </a:lnR>
                     <a:lnT w="6350" cap="flat" cmpd="sng" algn="ctr">
                       <a:solidFill>
-                        <a:srgbClr val="E2D3B0"/>
+                        <a:srgbClr val="D5E0E3"/>
                       </a:solidFill>
                       <a:prstDash val="solid"/>
                       <a:round/>
@@ -14313,7 +14685,7 @@
                     </a:lnT>
                     <a:lnB w="6350" cap="flat" cmpd="sng" algn="ctr">
                       <a:solidFill>
-                        <a:srgbClr val="E2D3B0"/>
+                        <a:srgbClr val="D5E0E3"/>
                       </a:solidFill>
                       <a:prstDash val="solid"/>
                       <a:round/>
@@ -14338,7 +14710,7 @@
                       <a:r>
                         <a:rPr lang="en-US" sz="1100" dirty="0">
                           <a:solidFill>
-                            <a:srgbClr val="2A1A10"/>
+                            <a:srgbClr val="0F2D3A"/>
                           </a:solidFill>
                           <a:latin typeface="Courier New" pitchFamily="34" charset="0"/>
                           <a:ea typeface="Courier New" pitchFamily="34" charset="-122"/>
@@ -14356,7 +14728,7 @@
                   <a:tcPr marL="54864" marR="54864" marT="54864" marB="54864" anchor="ctr">
                     <a:lnL w="6350" cap="flat" cmpd="sng" algn="ctr">
                       <a:solidFill>
-                        <a:srgbClr val="E2D3B0"/>
+                        <a:srgbClr val="D5E0E3"/>
                       </a:solidFill>
                       <a:prstDash val="solid"/>
                       <a:round/>
@@ -14365,7 +14737,7 @@
                     </a:lnL>
                     <a:lnR w="6350" cap="flat" cmpd="sng" algn="ctr">
                       <a:solidFill>
-                        <a:srgbClr val="E2D3B0"/>
+                        <a:srgbClr val="D5E0E3"/>
                       </a:solidFill>
                       <a:prstDash val="solid"/>
                       <a:round/>
@@ -14374,7 +14746,7 @@
                     </a:lnR>
                     <a:lnT w="6350" cap="flat" cmpd="sng" algn="ctr">
                       <a:solidFill>
-                        <a:srgbClr val="E2D3B0"/>
+                        <a:srgbClr val="D5E0E3"/>
                       </a:solidFill>
                       <a:prstDash val="solid"/>
                       <a:round/>
@@ -14383,7 +14755,7 @@
                     </a:lnT>
                     <a:lnB w="6350" cap="flat" cmpd="sng" algn="ctr">
                       <a:solidFill>
-                        <a:srgbClr val="E2D3B0"/>
+                        <a:srgbClr val="D5E0E3"/>
                       </a:solidFill>
                       <a:prstDash val="solid"/>
                       <a:round/>
@@ -14391,7 +14763,7 @@
                       <a:tailEnd type="none" w="med" len="med"/>
                     </a:lnB>
                     <a:solidFill>
-                      <a:srgbClr val="F7F1E3"/>
+                      <a:srgbClr val="F3F6F7"/>
                     </a:solidFill>
                   </a:tcPr>
                 </a:tc>
@@ -14406,7 +14778,7 @@
                       <a:r>
                         <a:rPr lang="en-US" sz="1200" dirty="0">
                           <a:solidFill>
-                            <a:srgbClr val="2A1A10"/>
+                            <a:srgbClr val="0F2D3A"/>
                           </a:solidFill>
                         </a:rPr>
                         <a:t>Nominatim (OSM)</a:t>
@@ -14417,7 +14789,7 @@
                   <a:tcPr marL="54864" marR="54864" marT="54864" marB="54864" anchor="ctr">
                     <a:lnL w="6350" cap="flat" cmpd="sng" algn="ctr">
                       <a:solidFill>
-                        <a:srgbClr val="E2D3B0"/>
+                        <a:srgbClr val="D5E0E3"/>
                       </a:solidFill>
                       <a:prstDash val="solid"/>
                       <a:round/>
@@ -14426,7 +14798,7 @@
                     </a:lnL>
                     <a:lnR w="6350" cap="flat" cmpd="sng" algn="ctr">
                       <a:solidFill>
-                        <a:srgbClr val="E2D3B0"/>
+                        <a:srgbClr val="D5E0E3"/>
                       </a:solidFill>
                       <a:prstDash val="solid"/>
                       <a:round/>
@@ -14435,7 +14807,7 @@
                     </a:lnR>
                     <a:lnT w="6350" cap="flat" cmpd="sng" algn="ctr">
                       <a:solidFill>
-                        <a:srgbClr val="E2D3B0"/>
+                        <a:srgbClr val="D5E0E3"/>
                       </a:solidFill>
                       <a:prstDash val="solid"/>
                       <a:round/>
@@ -14444,7 +14816,7 @@
                     </a:lnT>
                     <a:lnB w="6350" cap="flat" cmpd="sng" algn="ctr">
                       <a:solidFill>
-                        <a:srgbClr val="E2D3B0"/>
+                        <a:srgbClr val="D5E0E3"/>
                       </a:solidFill>
                       <a:prstDash val="solid"/>
                       <a:round/>
@@ -14452,7 +14824,7 @@
                       <a:tailEnd type="none" w="med" len="med"/>
                     </a:lnB>
                     <a:solidFill>
-                      <a:srgbClr val="F7F1E3"/>
+                      <a:srgbClr val="F3F6F7"/>
                     </a:solidFill>
                   </a:tcPr>
                 </a:tc>
@@ -14467,7 +14839,7 @@
                       <a:r>
                         <a:rPr lang="en-US" sz="1200" b="1" dirty="0">
                           <a:solidFill>
-                            <a:srgbClr val="2F6B3A"/>
+                            <a:srgbClr val="2E6B62"/>
                           </a:solidFill>
                         </a:rPr>
                         <a:t>реальный</a:t>
@@ -14478,7 +14850,7 @@
                   <a:tcPr marL="54864" marR="54864" marT="54864" marB="54864" anchor="ctr">
                     <a:lnL w="6350" cap="flat" cmpd="sng" algn="ctr">
                       <a:solidFill>
-                        <a:srgbClr val="E2D3B0"/>
+                        <a:srgbClr val="D5E0E3"/>
                       </a:solidFill>
                       <a:prstDash val="solid"/>
                       <a:round/>
@@ -14487,7 +14859,7 @@
                     </a:lnL>
                     <a:lnR w="6350" cap="flat" cmpd="sng" algn="ctr">
                       <a:solidFill>
-                        <a:srgbClr val="E2D3B0"/>
+                        <a:srgbClr val="D5E0E3"/>
                       </a:solidFill>
                       <a:prstDash val="solid"/>
                       <a:round/>
@@ -14496,7 +14868,7 @@
                     </a:lnR>
                     <a:lnT w="6350" cap="flat" cmpd="sng" algn="ctr">
                       <a:solidFill>
-                        <a:srgbClr val="E2D3B0"/>
+                        <a:srgbClr val="D5E0E3"/>
                       </a:solidFill>
                       <a:prstDash val="solid"/>
                       <a:round/>
@@ -14505,7 +14877,7 @@
                     </a:lnT>
                     <a:lnB w="6350" cap="flat" cmpd="sng" algn="ctr">
                       <a:solidFill>
-                        <a:srgbClr val="E2D3B0"/>
+                        <a:srgbClr val="D5E0E3"/>
                       </a:solidFill>
                       <a:prstDash val="solid"/>
                       <a:round/>
@@ -14513,7 +14885,7 @@
                       <a:tailEnd type="none" w="med" len="med"/>
                     </a:lnB>
                     <a:solidFill>
-                      <a:srgbClr val="F7F1E3"/>
+                      <a:srgbClr val="F3F6F7"/>
                     </a:solidFill>
                   </a:tcPr>
                 </a:tc>
@@ -14530,7 +14902,7 @@
                       <a:r>
                         <a:rPr lang="en-US" sz="1100" dirty="0">
                           <a:solidFill>
-                            <a:srgbClr val="2A1A10"/>
+                            <a:srgbClr val="0F2D3A"/>
                           </a:solidFill>
                           <a:latin typeface="Courier New" pitchFamily="34" charset="0"/>
                           <a:ea typeface="Courier New" pitchFamily="34" charset="-122"/>
@@ -14548,7 +14920,7 @@
                   <a:tcPr marL="54864" marR="54864" marT="54864" marB="54864" anchor="ctr">
                     <a:lnL w="6350" cap="flat" cmpd="sng" algn="ctr">
                       <a:solidFill>
-                        <a:srgbClr val="E2D3B0"/>
+                        <a:srgbClr val="D5E0E3"/>
                       </a:solidFill>
                       <a:prstDash val="solid"/>
                       <a:round/>
@@ -14557,7 +14929,7 @@
                     </a:lnL>
                     <a:lnR w="6350" cap="flat" cmpd="sng" algn="ctr">
                       <a:solidFill>
-                        <a:srgbClr val="E2D3B0"/>
+                        <a:srgbClr val="D5E0E3"/>
                       </a:solidFill>
                       <a:prstDash val="solid"/>
                       <a:round/>
@@ -14566,7 +14938,7 @@
                     </a:lnR>
                     <a:lnT w="6350" cap="flat" cmpd="sng" algn="ctr">
                       <a:solidFill>
-                        <a:srgbClr val="E2D3B0"/>
+                        <a:srgbClr val="D5E0E3"/>
                       </a:solidFill>
                       <a:prstDash val="solid"/>
                       <a:round/>
@@ -14575,7 +14947,7 @@
                     </a:lnT>
                     <a:lnB w="6350" cap="flat" cmpd="sng" algn="ctr">
                       <a:solidFill>
-                        <a:srgbClr val="E2D3B0"/>
+                        <a:srgbClr val="D5E0E3"/>
                       </a:solidFill>
                       <a:prstDash val="solid"/>
                       <a:round/>
@@ -14598,7 +14970,7 @@
                       <a:r>
                         <a:rPr lang="en-US" sz="1200" dirty="0">
                           <a:solidFill>
-                            <a:srgbClr val="2A1A10"/>
+                            <a:srgbClr val="0F2D3A"/>
                           </a:solidFill>
                         </a:rPr>
                         <a:t>OSM Overpass + наличие топлива</a:t>
@@ -14609,7 +14981,7 @@
                   <a:tcPr marL="54864" marR="54864" marT="54864" marB="54864" anchor="ctr">
                     <a:lnL w="6350" cap="flat" cmpd="sng" algn="ctr">
                       <a:solidFill>
-                        <a:srgbClr val="E2D3B0"/>
+                        <a:srgbClr val="D5E0E3"/>
                       </a:solidFill>
                       <a:prstDash val="solid"/>
                       <a:round/>
@@ -14618,7 +14990,7 @@
                     </a:lnL>
                     <a:lnR w="6350" cap="flat" cmpd="sng" algn="ctr">
                       <a:solidFill>
-                        <a:srgbClr val="E2D3B0"/>
+                        <a:srgbClr val="D5E0E3"/>
                       </a:solidFill>
                       <a:prstDash val="solid"/>
                       <a:round/>
@@ -14627,7 +14999,7 @@
                     </a:lnR>
                     <a:lnT w="6350" cap="flat" cmpd="sng" algn="ctr">
                       <a:solidFill>
-                        <a:srgbClr val="E2D3B0"/>
+                        <a:srgbClr val="D5E0E3"/>
                       </a:solidFill>
                       <a:prstDash val="solid"/>
                       <a:round/>
@@ -14636,7 +15008,7 @@
                     </a:lnT>
                     <a:lnB w="6350" cap="flat" cmpd="sng" algn="ctr">
                       <a:solidFill>
-                        <a:srgbClr val="E2D3B0"/>
+                        <a:srgbClr val="D5E0E3"/>
                       </a:solidFill>
                       <a:prstDash val="solid"/>
                       <a:round/>
@@ -14659,7 +15031,7 @@
                       <a:r>
                         <a:rPr lang="en-US" sz="1200" b="1" dirty="0">
                           <a:solidFill>
-                            <a:srgbClr val="2F6B3A"/>
+                            <a:srgbClr val="2E6B62"/>
                           </a:solidFill>
                         </a:rPr>
                         <a:t>реальный + мок</a:t>
@@ -14670,7 +15042,7 @@
                   <a:tcPr marL="54864" marR="54864" marT="54864" marB="54864" anchor="ctr">
                     <a:lnL w="6350" cap="flat" cmpd="sng" algn="ctr">
                       <a:solidFill>
-                        <a:srgbClr val="E2D3B0"/>
+                        <a:srgbClr val="D5E0E3"/>
                       </a:solidFill>
                       <a:prstDash val="solid"/>
                       <a:round/>
@@ -14679,7 +15051,7 @@
                     </a:lnL>
                     <a:lnR w="6350" cap="flat" cmpd="sng" algn="ctr">
                       <a:solidFill>
-                        <a:srgbClr val="E2D3B0"/>
+                        <a:srgbClr val="D5E0E3"/>
                       </a:solidFill>
                       <a:prstDash val="solid"/>
                       <a:round/>
@@ -14688,7 +15060,7 @@
                     </a:lnR>
                     <a:lnT w="6350" cap="flat" cmpd="sng" algn="ctr">
                       <a:solidFill>
-                        <a:srgbClr val="E2D3B0"/>
+                        <a:srgbClr val="D5E0E3"/>
                       </a:solidFill>
                       <a:prstDash val="solid"/>
                       <a:round/>
@@ -14697,7 +15069,7 @@
                     </a:lnT>
                     <a:lnB w="6350" cap="flat" cmpd="sng" algn="ctr">
                       <a:solidFill>
-                        <a:srgbClr val="E2D3B0"/>
+                        <a:srgbClr val="D5E0E3"/>
                       </a:solidFill>
                       <a:prstDash val="solid"/>
                       <a:round/>
@@ -14722,7 +15094,7 @@
                       <a:r>
                         <a:rPr lang="en-US" sz="1100" dirty="0">
                           <a:solidFill>
-                            <a:srgbClr val="2A1A10"/>
+                            <a:srgbClr val="0F2D3A"/>
                           </a:solidFill>
                           <a:latin typeface="Courier New" pitchFamily="34" charset="0"/>
                           <a:ea typeface="Courier New" pitchFamily="34" charset="-122"/>
@@ -14740,7 +15112,7 @@
                   <a:tcPr marL="54864" marR="54864" marT="54864" marB="54864" anchor="ctr">
                     <a:lnL w="6350" cap="flat" cmpd="sng" algn="ctr">
                       <a:solidFill>
-                        <a:srgbClr val="E2D3B0"/>
+                        <a:srgbClr val="D5E0E3"/>
                       </a:solidFill>
                       <a:prstDash val="solid"/>
                       <a:round/>
@@ -14749,7 +15121,7 @@
                     </a:lnL>
                     <a:lnR w="6350" cap="flat" cmpd="sng" algn="ctr">
                       <a:solidFill>
-                        <a:srgbClr val="E2D3B0"/>
+                        <a:srgbClr val="D5E0E3"/>
                       </a:solidFill>
                       <a:prstDash val="solid"/>
                       <a:round/>
@@ -14758,7 +15130,7 @@
                     </a:lnR>
                     <a:lnT w="6350" cap="flat" cmpd="sng" algn="ctr">
                       <a:solidFill>
-                        <a:srgbClr val="E2D3B0"/>
+                        <a:srgbClr val="D5E0E3"/>
                       </a:solidFill>
                       <a:prstDash val="solid"/>
                       <a:round/>
@@ -14767,7 +15139,7 @@
                     </a:lnT>
                     <a:lnB w="6350" cap="flat" cmpd="sng" algn="ctr">
                       <a:solidFill>
-                        <a:srgbClr val="E2D3B0"/>
+                        <a:srgbClr val="D5E0E3"/>
                       </a:solidFill>
                       <a:prstDash val="solid"/>
                       <a:round/>
@@ -14775,7 +15147,7 @@
                       <a:tailEnd type="none" w="med" len="med"/>
                     </a:lnB>
                     <a:solidFill>
-                      <a:srgbClr val="F7F1E3"/>
+                      <a:srgbClr val="F3F6F7"/>
                     </a:solidFill>
                   </a:tcPr>
                 </a:tc>
@@ -14790,7 +15162,7 @@
                       <a:r>
                         <a:rPr lang="en-US" sz="1200" dirty="0">
                           <a:solidFill>
-                            <a:srgbClr val="2A1A10"/>
+                            <a:srgbClr val="0F2D3A"/>
                           </a:solidFill>
                         </a:rPr>
                         <a:t>Википедия REST</a:t>
@@ -14801,7 +15173,7 @@
                   <a:tcPr marL="54864" marR="54864" marT="54864" marB="54864" anchor="ctr">
                     <a:lnL w="6350" cap="flat" cmpd="sng" algn="ctr">
                       <a:solidFill>
-                        <a:srgbClr val="E2D3B0"/>
+                        <a:srgbClr val="D5E0E3"/>
                       </a:solidFill>
                       <a:prstDash val="solid"/>
                       <a:round/>
@@ -14810,7 +15182,7 @@
                     </a:lnL>
                     <a:lnR w="6350" cap="flat" cmpd="sng" algn="ctr">
                       <a:solidFill>
-                        <a:srgbClr val="E2D3B0"/>
+                        <a:srgbClr val="D5E0E3"/>
                       </a:solidFill>
                       <a:prstDash val="solid"/>
                       <a:round/>
@@ -14819,7 +15191,7 @@
                     </a:lnR>
                     <a:lnT w="6350" cap="flat" cmpd="sng" algn="ctr">
                       <a:solidFill>
-                        <a:srgbClr val="E2D3B0"/>
+                        <a:srgbClr val="D5E0E3"/>
                       </a:solidFill>
                       <a:prstDash val="solid"/>
                       <a:round/>
@@ -14828,7 +15200,7 @@
                     </a:lnT>
                     <a:lnB w="6350" cap="flat" cmpd="sng" algn="ctr">
                       <a:solidFill>
-                        <a:srgbClr val="E2D3B0"/>
+                        <a:srgbClr val="D5E0E3"/>
                       </a:solidFill>
                       <a:prstDash val="solid"/>
                       <a:round/>
@@ -14836,7 +15208,7 @@
                       <a:tailEnd type="none" w="med" len="med"/>
                     </a:lnB>
                     <a:solidFill>
-                      <a:srgbClr val="F7F1E3"/>
+                      <a:srgbClr val="F3F6F7"/>
                     </a:solidFill>
                   </a:tcPr>
                 </a:tc>
@@ -14851,7 +15223,7 @@
                       <a:r>
                         <a:rPr lang="en-US" sz="1200" b="1" dirty="0">
                           <a:solidFill>
-                            <a:srgbClr val="2F6B3A"/>
+                            <a:srgbClr val="2E6B62"/>
                           </a:solidFill>
                         </a:rPr>
                         <a:t>реальный</a:t>
@@ -14862,7 +15234,7 @@
                   <a:tcPr marL="54864" marR="54864" marT="54864" marB="54864" anchor="ctr">
                     <a:lnL w="6350" cap="flat" cmpd="sng" algn="ctr">
                       <a:solidFill>
-                        <a:srgbClr val="E2D3B0"/>
+                        <a:srgbClr val="D5E0E3"/>
                       </a:solidFill>
                       <a:prstDash val="solid"/>
                       <a:round/>
@@ -14871,7 +15243,7 @@
                     </a:lnL>
                     <a:lnR w="6350" cap="flat" cmpd="sng" algn="ctr">
                       <a:solidFill>
-                        <a:srgbClr val="E2D3B0"/>
+                        <a:srgbClr val="D5E0E3"/>
                       </a:solidFill>
                       <a:prstDash val="solid"/>
                       <a:round/>
@@ -14880,7 +15252,7 @@
                     </a:lnR>
                     <a:lnT w="6350" cap="flat" cmpd="sng" algn="ctr">
                       <a:solidFill>
-                        <a:srgbClr val="E2D3B0"/>
+                        <a:srgbClr val="D5E0E3"/>
                       </a:solidFill>
                       <a:prstDash val="solid"/>
                       <a:round/>
@@ -14889,7 +15261,7 @@
                     </a:lnT>
                     <a:lnB w="6350" cap="flat" cmpd="sng" algn="ctr">
                       <a:solidFill>
-                        <a:srgbClr val="E2D3B0"/>
+                        <a:srgbClr val="D5E0E3"/>
                       </a:solidFill>
                       <a:prstDash val="solid"/>
                       <a:round/>
@@ -14897,7 +15269,7 @@
                       <a:tailEnd type="none" w="med" len="med"/>
                     </a:lnB>
                     <a:solidFill>
-                      <a:srgbClr val="F7F1E3"/>
+                      <a:srgbClr val="F3F6F7"/>
                     </a:solidFill>
                   </a:tcPr>
                 </a:tc>
@@ -14914,7 +15286,7 @@
                       <a:r>
                         <a:rPr lang="en-US" sz="1100" dirty="0">
                           <a:solidFill>
-                            <a:srgbClr val="2A1A10"/>
+                            <a:srgbClr val="0F2D3A"/>
                           </a:solidFill>
                           <a:latin typeface="Courier New" pitchFamily="34" charset="0"/>
                           <a:ea typeface="Courier New" pitchFamily="34" charset="-122"/>
@@ -14932,7 +15304,7 @@
                   <a:tcPr marL="54864" marR="54864" marT="54864" marB="54864" anchor="ctr">
                     <a:lnL w="6350" cap="flat" cmpd="sng" algn="ctr">
                       <a:solidFill>
-                        <a:srgbClr val="E2D3B0"/>
+                        <a:srgbClr val="D5E0E3"/>
                       </a:solidFill>
                       <a:prstDash val="solid"/>
                       <a:round/>
@@ -14941,7 +15313,7 @@
                     </a:lnL>
                     <a:lnR w="6350" cap="flat" cmpd="sng" algn="ctr">
                       <a:solidFill>
-                        <a:srgbClr val="E2D3B0"/>
+                        <a:srgbClr val="D5E0E3"/>
                       </a:solidFill>
                       <a:prstDash val="solid"/>
                       <a:round/>
@@ -14950,7 +15322,7 @@
                     </a:lnR>
                     <a:lnT w="6350" cap="flat" cmpd="sng" algn="ctr">
                       <a:solidFill>
-                        <a:srgbClr val="E2D3B0"/>
+                        <a:srgbClr val="D5E0E3"/>
                       </a:solidFill>
                       <a:prstDash val="solid"/>
                       <a:round/>
@@ -14959,7 +15331,7 @@
                     </a:lnT>
                     <a:lnB w="6350" cap="flat" cmpd="sng" algn="ctr">
                       <a:solidFill>
-                        <a:srgbClr val="E2D3B0"/>
+                        <a:srgbClr val="D5E0E3"/>
                       </a:solidFill>
                       <a:prstDash val="solid"/>
                       <a:round/>
@@ -14982,7 +15354,7 @@
                       <a:r>
                         <a:rPr lang="en-US" sz="1200" dirty="0">
                           <a:solidFill>
-                            <a:srgbClr val="2A1A10"/>
+                            <a:srgbClr val="0F2D3A"/>
                           </a:solidFill>
                         </a:rPr>
                         <a:t>41 место Приморья, часы и выходные</a:t>
@@ -14993,7 +15365,7 @@
                   <a:tcPr marL="54864" marR="54864" marT="54864" marB="54864" anchor="ctr">
                     <a:lnL w="6350" cap="flat" cmpd="sng" algn="ctr">
                       <a:solidFill>
-                        <a:srgbClr val="E2D3B0"/>
+                        <a:srgbClr val="D5E0E3"/>
                       </a:solidFill>
                       <a:prstDash val="solid"/>
                       <a:round/>
@@ -15002,7 +15374,7 @@
                     </a:lnL>
                     <a:lnR w="6350" cap="flat" cmpd="sng" algn="ctr">
                       <a:solidFill>
-                        <a:srgbClr val="E2D3B0"/>
+                        <a:srgbClr val="D5E0E3"/>
                       </a:solidFill>
                       <a:prstDash val="solid"/>
                       <a:round/>
@@ -15011,7 +15383,7 @@
                     </a:lnR>
                     <a:lnT w="6350" cap="flat" cmpd="sng" algn="ctr">
                       <a:solidFill>
-                        <a:srgbClr val="E2D3B0"/>
+                        <a:srgbClr val="D5E0E3"/>
                       </a:solidFill>
                       <a:prstDash val="solid"/>
                       <a:round/>
@@ -15020,7 +15392,7 @@
                     </a:lnT>
                     <a:lnB w="6350" cap="flat" cmpd="sng" algn="ctr">
                       <a:solidFill>
-                        <a:srgbClr val="E2D3B0"/>
+                        <a:srgbClr val="D5E0E3"/>
                       </a:solidFill>
                       <a:prstDash val="solid"/>
                       <a:round/>
@@ -15043,7 +15415,7 @@
                       <a:r>
                         <a:rPr lang="en-US" sz="1200" b="1" dirty="0">
                           <a:solidFill>
-                            <a:srgbClr val="5B4431"/>
+                            <a:srgbClr val="3D5A66"/>
                           </a:solidFill>
                         </a:rPr>
                         <a:t>датасет</a:t>
@@ -15054,7 +15426,7 @@
                   <a:tcPr marL="54864" marR="54864" marT="54864" marB="54864" anchor="ctr">
                     <a:lnL w="6350" cap="flat" cmpd="sng" algn="ctr">
                       <a:solidFill>
-                        <a:srgbClr val="E2D3B0"/>
+                        <a:srgbClr val="D5E0E3"/>
                       </a:solidFill>
                       <a:prstDash val="solid"/>
                       <a:round/>
@@ -15063,7 +15435,7 @@
                     </a:lnL>
                     <a:lnR w="6350" cap="flat" cmpd="sng" algn="ctr">
                       <a:solidFill>
-                        <a:srgbClr val="E2D3B0"/>
+                        <a:srgbClr val="D5E0E3"/>
                       </a:solidFill>
                       <a:prstDash val="solid"/>
                       <a:round/>
@@ -15072,7 +15444,7 @@
                     </a:lnR>
                     <a:lnT w="6350" cap="flat" cmpd="sng" algn="ctr">
                       <a:solidFill>
-                        <a:srgbClr val="E2D3B0"/>
+                        <a:srgbClr val="D5E0E3"/>
                       </a:solidFill>
                       <a:prstDash val="solid"/>
                       <a:round/>
@@ -15081,7 +15453,7 @@
                     </a:lnT>
                     <a:lnB w="6350" cap="flat" cmpd="sng" algn="ctr">
                       <a:solidFill>
-                        <a:srgbClr val="E2D3B0"/>
+                        <a:srgbClr val="D5E0E3"/>
                       </a:solidFill>
                       <a:prstDash val="solid"/>
                       <a:round/>
@@ -15106,7 +15478,7 @@
                       <a:r>
                         <a:rPr lang="en-US" sz="1100" dirty="0">
                           <a:solidFill>
-                            <a:srgbClr val="2A1A10"/>
+                            <a:srgbClr val="0F2D3A"/>
                           </a:solidFill>
                           <a:latin typeface="Courier New" pitchFamily="34" charset="0"/>
                           <a:ea typeface="Courier New" pitchFamily="34" charset="-122"/>
@@ -15124,7 +15496,7 @@
                   <a:tcPr marL="54864" marR="54864" marT="54864" marB="54864" anchor="ctr">
                     <a:lnL w="6350" cap="flat" cmpd="sng" algn="ctr">
                       <a:solidFill>
-                        <a:srgbClr val="E2D3B0"/>
+                        <a:srgbClr val="D5E0E3"/>
                       </a:solidFill>
                       <a:prstDash val="solid"/>
                       <a:round/>
@@ -15133,7 +15505,7 @@
                     </a:lnL>
                     <a:lnR w="6350" cap="flat" cmpd="sng" algn="ctr">
                       <a:solidFill>
-                        <a:srgbClr val="E2D3B0"/>
+                        <a:srgbClr val="D5E0E3"/>
                       </a:solidFill>
                       <a:prstDash val="solid"/>
                       <a:round/>
@@ -15142,7 +15514,7 @@
                     </a:lnR>
                     <a:lnT w="6350" cap="flat" cmpd="sng" algn="ctr">
                       <a:solidFill>
-                        <a:srgbClr val="E2D3B0"/>
+                        <a:srgbClr val="D5E0E3"/>
                       </a:solidFill>
                       <a:prstDash val="solid"/>
                       <a:round/>
@@ -15151,7 +15523,7 @@
                     </a:lnT>
                     <a:lnB w="6350" cap="flat" cmpd="sng" algn="ctr">
                       <a:solidFill>
-                        <a:srgbClr val="E2D3B0"/>
+                        <a:srgbClr val="D5E0E3"/>
                       </a:solidFill>
                       <a:prstDash val="solid"/>
                       <a:round/>
@@ -15159,7 +15531,7 @@
                       <a:tailEnd type="none" w="med" len="med"/>
                     </a:lnB>
                     <a:solidFill>
-                      <a:srgbClr val="F7F1E3"/>
+                      <a:srgbClr val="F3F6F7"/>
                     </a:solidFill>
                   </a:tcPr>
                 </a:tc>
@@ -15174,7 +15546,7 @@
                       <a:r>
                         <a:rPr lang="en-US" sz="1200" dirty="0">
                           <a:solidFill>
-                            <a:srgbClr val="2A1A10"/>
+                            <a:srgbClr val="0F2D3A"/>
                           </a:solidFill>
                         </a:rPr>
                         <a:t>по мотивам Островка / Tvil</a:t>
@@ -15185,7 +15557,7 @@
                   <a:tcPr marL="54864" marR="54864" marT="54864" marB="54864" anchor="ctr">
                     <a:lnL w="6350" cap="flat" cmpd="sng" algn="ctr">
                       <a:solidFill>
-                        <a:srgbClr val="E2D3B0"/>
+                        <a:srgbClr val="D5E0E3"/>
                       </a:solidFill>
                       <a:prstDash val="solid"/>
                       <a:round/>
@@ -15194,7 +15566,7 @@
                     </a:lnL>
                     <a:lnR w="6350" cap="flat" cmpd="sng" algn="ctr">
                       <a:solidFill>
-                        <a:srgbClr val="E2D3B0"/>
+                        <a:srgbClr val="D5E0E3"/>
                       </a:solidFill>
                       <a:prstDash val="solid"/>
                       <a:round/>
@@ -15203,7 +15575,7 @@
                     </a:lnR>
                     <a:lnT w="6350" cap="flat" cmpd="sng" algn="ctr">
                       <a:solidFill>
-                        <a:srgbClr val="E2D3B0"/>
+                        <a:srgbClr val="D5E0E3"/>
                       </a:solidFill>
                       <a:prstDash val="solid"/>
                       <a:round/>
@@ -15212,7 +15584,7 @@
                     </a:lnT>
                     <a:lnB w="6350" cap="flat" cmpd="sng" algn="ctr">
                       <a:solidFill>
-                        <a:srgbClr val="E2D3B0"/>
+                        <a:srgbClr val="D5E0E3"/>
                       </a:solidFill>
                       <a:prstDash val="solid"/>
                       <a:round/>
@@ -15220,7 +15592,7 @@
                       <a:tailEnd type="none" w="med" len="med"/>
                     </a:lnB>
                     <a:solidFill>
-                      <a:srgbClr val="F7F1E3"/>
+                      <a:srgbClr val="F3F6F7"/>
                     </a:solidFill>
                   </a:tcPr>
                 </a:tc>
@@ -15235,7 +15607,7 @@
                       <a:r>
                         <a:rPr lang="en-US" sz="1200" b="1" dirty="0">
                           <a:solidFill>
-                            <a:srgbClr val="5B4431"/>
+                            <a:srgbClr val="3D5A66"/>
                           </a:solidFill>
                         </a:rPr>
                         <a:t>мок</a:t>
@@ -15246,7 +15618,7 @@
                   <a:tcPr marL="54864" marR="54864" marT="54864" marB="54864" anchor="ctr">
                     <a:lnL w="6350" cap="flat" cmpd="sng" algn="ctr">
                       <a:solidFill>
-                        <a:srgbClr val="E2D3B0"/>
+                        <a:srgbClr val="D5E0E3"/>
                       </a:solidFill>
                       <a:prstDash val="solid"/>
                       <a:round/>
@@ -15255,7 +15627,7 @@
                     </a:lnL>
                     <a:lnR w="6350" cap="flat" cmpd="sng" algn="ctr">
                       <a:solidFill>
-                        <a:srgbClr val="E2D3B0"/>
+                        <a:srgbClr val="D5E0E3"/>
                       </a:solidFill>
                       <a:prstDash val="solid"/>
                       <a:round/>
@@ -15264,7 +15636,7 @@
                     </a:lnR>
                     <a:lnT w="6350" cap="flat" cmpd="sng" algn="ctr">
                       <a:solidFill>
-                        <a:srgbClr val="E2D3B0"/>
+                        <a:srgbClr val="D5E0E3"/>
                       </a:solidFill>
                       <a:prstDash val="solid"/>
                       <a:round/>
@@ -15273,7 +15645,7 @@
                     </a:lnT>
                     <a:lnB w="6350" cap="flat" cmpd="sng" algn="ctr">
                       <a:solidFill>
-                        <a:srgbClr val="E2D3B0"/>
+                        <a:srgbClr val="D5E0E3"/>
                       </a:solidFill>
                       <a:prstDash val="solid"/>
                       <a:round/>
@@ -15281,7 +15653,7 @@
                       <a:tailEnd type="none" w="med" len="med"/>
                     </a:lnB>
                     <a:solidFill>
-                      <a:srgbClr val="F7F1E3"/>
+                      <a:srgbClr val="F3F6F7"/>
                     </a:solidFill>
                   </a:tcPr>
                 </a:tc>
@@ -15298,7 +15670,7 @@
                       <a:r>
                         <a:rPr lang="en-US" sz="1100" dirty="0">
                           <a:solidFill>
-                            <a:srgbClr val="2A1A10"/>
+                            <a:srgbClr val="0F2D3A"/>
                           </a:solidFill>
                           <a:latin typeface="Courier New" pitchFamily="34" charset="0"/>
                           <a:ea typeface="Courier New" pitchFamily="34" charset="-122"/>
@@ -15316,7 +15688,7 @@
                   <a:tcPr marL="54864" marR="54864" marT="54864" marB="54864" anchor="ctr">
                     <a:lnL w="6350" cap="flat" cmpd="sng" algn="ctr">
                       <a:solidFill>
-                        <a:srgbClr val="E2D3B0"/>
+                        <a:srgbClr val="D5E0E3"/>
                       </a:solidFill>
                       <a:prstDash val="solid"/>
                       <a:round/>
@@ -15325,7 +15697,7 @@
                     </a:lnL>
                     <a:lnR w="6350" cap="flat" cmpd="sng" algn="ctr">
                       <a:solidFill>
-                        <a:srgbClr val="E2D3B0"/>
+                        <a:srgbClr val="D5E0E3"/>
                       </a:solidFill>
                       <a:prstDash val="solid"/>
                       <a:round/>
@@ -15334,7 +15706,7 @@
                     </a:lnR>
                     <a:lnT w="6350" cap="flat" cmpd="sng" algn="ctr">
                       <a:solidFill>
-                        <a:srgbClr val="E2D3B0"/>
+                        <a:srgbClr val="D5E0E3"/>
                       </a:solidFill>
                       <a:prstDash val="solid"/>
                       <a:round/>
@@ -15343,7 +15715,7 @@
                     </a:lnT>
                     <a:lnB w="6350" cap="flat" cmpd="sng" algn="ctr">
                       <a:solidFill>
-                        <a:srgbClr val="E2D3B0"/>
+                        <a:srgbClr val="D5E0E3"/>
                       </a:solidFill>
                       <a:prstDash val="solid"/>
                       <a:round/>
@@ -15366,7 +15738,7 @@
                       <a:r>
                         <a:rPr lang="en-US" sz="1200" dirty="0">
                           <a:solidFill>
-                            <a:srgbClr val="2A1A10"/>
+                            <a:srgbClr val="0F2D3A"/>
                           </a:solidFill>
                         </a:rPr>
                         <a:t>по мотивам Яндекс Расписаний</a:t>
@@ -15377,7 +15749,7 @@
                   <a:tcPr marL="54864" marR="54864" marT="54864" marB="54864" anchor="ctr">
                     <a:lnL w="6350" cap="flat" cmpd="sng" algn="ctr">
                       <a:solidFill>
-                        <a:srgbClr val="E2D3B0"/>
+                        <a:srgbClr val="D5E0E3"/>
                       </a:solidFill>
                       <a:prstDash val="solid"/>
                       <a:round/>
@@ -15386,7 +15758,7 @@
                     </a:lnL>
                     <a:lnR w="6350" cap="flat" cmpd="sng" algn="ctr">
                       <a:solidFill>
-                        <a:srgbClr val="E2D3B0"/>
+                        <a:srgbClr val="D5E0E3"/>
                       </a:solidFill>
                       <a:prstDash val="solid"/>
                       <a:round/>
@@ -15395,7 +15767,7 @@
                     </a:lnR>
                     <a:lnT w="6350" cap="flat" cmpd="sng" algn="ctr">
                       <a:solidFill>
-                        <a:srgbClr val="E2D3B0"/>
+                        <a:srgbClr val="D5E0E3"/>
                       </a:solidFill>
                       <a:prstDash val="solid"/>
                       <a:round/>
@@ -15404,7 +15776,7 @@
                     </a:lnT>
                     <a:lnB w="6350" cap="flat" cmpd="sng" algn="ctr">
                       <a:solidFill>
-                        <a:srgbClr val="E2D3B0"/>
+                        <a:srgbClr val="D5E0E3"/>
                       </a:solidFill>
                       <a:prstDash val="solid"/>
                       <a:round/>
@@ -15427,7 +15799,7 @@
                       <a:r>
                         <a:rPr lang="en-US" sz="1200" b="1" dirty="0">
                           <a:solidFill>
-                            <a:srgbClr val="5B4431"/>
+                            <a:srgbClr val="3D5A66"/>
                           </a:solidFill>
                         </a:rPr>
                         <a:t>датасет</a:t>
@@ -15438,7 +15810,7 @@
                   <a:tcPr marL="54864" marR="54864" marT="54864" marB="54864" anchor="ctr">
                     <a:lnL w="6350" cap="flat" cmpd="sng" algn="ctr">
                       <a:solidFill>
-                        <a:srgbClr val="E2D3B0"/>
+                        <a:srgbClr val="D5E0E3"/>
                       </a:solidFill>
                       <a:prstDash val="solid"/>
                       <a:round/>
@@ -15447,7 +15819,7 @@
                     </a:lnL>
                     <a:lnR w="6350" cap="flat" cmpd="sng" algn="ctr">
                       <a:solidFill>
-                        <a:srgbClr val="E2D3B0"/>
+                        <a:srgbClr val="D5E0E3"/>
                       </a:solidFill>
                       <a:prstDash val="solid"/>
                       <a:round/>
@@ -15456,7 +15828,7 @@
                     </a:lnR>
                     <a:lnT w="6350" cap="flat" cmpd="sng" algn="ctr">
                       <a:solidFill>
-                        <a:srgbClr val="E2D3B0"/>
+                        <a:srgbClr val="D5E0E3"/>
                       </a:solidFill>
                       <a:prstDash val="solid"/>
                       <a:round/>
@@ -15465,7 +15837,7 @@
                     </a:lnT>
                     <a:lnB w="6350" cap="flat" cmpd="sng" algn="ctr">
                       <a:solidFill>
-                        <a:srgbClr val="E2D3B0"/>
+                        <a:srgbClr val="D5E0E3"/>
                       </a:solidFill>
                       <a:prstDash val="solid"/>
                       <a:round/>
@@ -15490,7 +15862,7 @@
                       <a:r>
                         <a:rPr lang="en-US" sz="1100" dirty="0">
                           <a:solidFill>
-                            <a:srgbClr val="2A1A10"/>
+                            <a:srgbClr val="0F2D3A"/>
                           </a:solidFill>
                           <a:latin typeface="Courier New" pitchFamily="34" charset="0"/>
                           <a:ea typeface="Courier New" pitchFamily="34" charset="-122"/>
@@ -15508,7 +15880,7 @@
                   <a:tcPr marL="54864" marR="54864" marT="54864" marB="54864" anchor="ctr">
                     <a:lnL w="6350" cap="flat" cmpd="sng" algn="ctr">
                       <a:solidFill>
-                        <a:srgbClr val="E2D3B0"/>
+                        <a:srgbClr val="D5E0E3"/>
                       </a:solidFill>
                       <a:prstDash val="solid"/>
                       <a:round/>
@@ -15517,7 +15889,7 @@
                     </a:lnL>
                     <a:lnR w="6350" cap="flat" cmpd="sng" algn="ctr">
                       <a:solidFill>
-                        <a:srgbClr val="E2D3B0"/>
+                        <a:srgbClr val="D5E0E3"/>
                       </a:solidFill>
                       <a:prstDash val="solid"/>
                       <a:round/>
@@ -15526,7 +15898,7 @@
                     </a:lnR>
                     <a:lnT w="6350" cap="flat" cmpd="sng" algn="ctr">
                       <a:solidFill>
-                        <a:srgbClr val="E2D3B0"/>
+                        <a:srgbClr val="D5E0E3"/>
                       </a:solidFill>
                       <a:prstDash val="solid"/>
                       <a:round/>
@@ -15535,7 +15907,7 @@
                     </a:lnT>
                     <a:lnB w="6350" cap="flat" cmpd="sng" algn="ctr">
                       <a:solidFill>
-                        <a:srgbClr val="E2D3B0"/>
+                        <a:srgbClr val="D5E0E3"/>
                       </a:solidFill>
                       <a:prstDash val="solid"/>
                       <a:round/>
@@ -15543,7 +15915,7 @@
                       <a:tailEnd type="none" w="med" len="med"/>
                     </a:lnB>
                     <a:solidFill>
-                      <a:srgbClr val="F7F1E3"/>
+                      <a:srgbClr val="F3F6F7"/>
                     </a:solidFill>
                   </a:tcPr>
                 </a:tc>
@@ -15558,7 +15930,7 @@
                       <a:r>
                         <a:rPr lang="en-US" sz="1200" dirty="0">
                           <a:solidFill>
-                            <a:srgbClr val="2A1A10"/>
+                            <a:srgbClr val="0F2D3A"/>
                           </a:solidFill>
                         </a:rPr>
                         <a:t>ярмарки, театр, кормление тигров</a:t>
@@ -15569,7 +15941,7 @@
                   <a:tcPr marL="54864" marR="54864" marT="54864" marB="54864" anchor="ctr">
                     <a:lnL w="6350" cap="flat" cmpd="sng" algn="ctr">
                       <a:solidFill>
-                        <a:srgbClr val="E2D3B0"/>
+                        <a:srgbClr val="D5E0E3"/>
                       </a:solidFill>
                       <a:prstDash val="solid"/>
                       <a:round/>
@@ -15578,7 +15950,7 @@
                     </a:lnL>
                     <a:lnR w="6350" cap="flat" cmpd="sng" algn="ctr">
                       <a:solidFill>
-                        <a:srgbClr val="E2D3B0"/>
+                        <a:srgbClr val="D5E0E3"/>
                       </a:solidFill>
                       <a:prstDash val="solid"/>
                       <a:round/>
@@ -15587,7 +15959,7 @@
                     </a:lnR>
                     <a:lnT w="6350" cap="flat" cmpd="sng" algn="ctr">
                       <a:solidFill>
-                        <a:srgbClr val="E2D3B0"/>
+                        <a:srgbClr val="D5E0E3"/>
                       </a:solidFill>
                       <a:prstDash val="solid"/>
                       <a:round/>
@@ -15596,7 +15968,7 @@
                     </a:lnT>
                     <a:lnB w="6350" cap="flat" cmpd="sng" algn="ctr">
                       <a:solidFill>
-                        <a:srgbClr val="E2D3B0"/>
+                        <a:srgbClr val="D5E0E3"/>
                       </a:solidFill>
                       <a:prstDash val="solid"/>
                       <a:round/>
@@ -15604,7 +15976,7 @@
                       <a:tailEnd type="none" w="med" len="med"/>
                     </a:lnB>
                     <a:solidFill>
-                      <a:srgbClr val="F7F1E3"/>
+                      <a:srgbClr val="F3F6F7"/>
                     </a:solidFill>
                   </a:tcPr>
                 </a:tc>
@@ -15619,7 +15991,7 @@
                       <a:r>
                         <a:rPr lang="en-US" sz="1200" b="1" dirty="0">
                           <a:solidFill>
-                            <a:srgbClr val="5B4431"/>
+                            <a:srgbClr val="3D5A66"/>
                           </a:solidFill>
                         </a:rPr>
                         <a:t>датасет</a:t>
@@ -15630,7 +16002,7 @@
                   <a:tcPr marL="54864" marR="54864" marT="54864" marB="54864" anchor="ctr">
                     <a:lnL w="6350" cap="flat" cmpd="sng" algn="ctr">
                       <a:solidFill>
-                        <a:srgbClr val="E2D3B0"/>
+                        <a:srgbClr val="D5E0E3"/>
                       </a:solidFill>
                       <a:prstDash val="solid"/>
                       <a:round/>
@@ -15639,7 +16011,7 @@
                     </a:lnL>
                     <a:lnR w="6350" cap="flat" cmpd="sng" algn="ctr">
                       <a:solidFill>
-                        <a:srgbClr val="E2D3B0"/>
+                        <a:srgbClr val="D5E0E3"/>
                       </a:solidFill>
                       <a:prstDash val="solid"/>
                       <a:round/>
@@ -15648,7 +16020,7 @@
                     </a:lnR>
                     <a:lnT w="6350" cap="flat" cmpd="sng" algn="ctr">
                       <a:solidFill>
-                        <a:srgbClr val="E2D3B0"/>
+                        <a:srgbClr val="D5E0E3"/>
                       </a:solidFill>
                       <a:prstDash val="solid"/>
                       <a:round/>
@@ -15657,7 +16029,7 @@
                     </a:lnT>
                     <a:lnB w="6350" cap="flat" cmpd="sng" algn="ctr">
                       <a:solidFill>
-                        <a:srgbClr val="E2D3B0"/>
+                        <a:srgbClr val="D5E0E3"/>
                       </a:solidFill>
                       <a:prstDash val="solid"/>
                       <a:round/>
@@ -15665,7 +16037,7 @@
                       <a:tailEnd type="none" w="med" len="med"/>
                     </a:lnB>
                     <a:solidFill>
-                      <a:srgbClr val="F7F1E3"/>
+                      <a:srgbClr val="F3F6F7"/>
                     </a:solidFill>
                   </a:tcPr>
                 </a:tc>
@@ -15839,7 +16211,7 @@
             <a:lvl1pPr>
               <a:defRPr sz="900">
                 <a:solidFill>
-                  <a:srgbClr val="7D6650"/>
+                  <a:srgbClr val="6B8590"/>
                 </a:solidFill>
               </a:defRPr>
             </a:lvl1pPr>
@@ -15910,9 +16282,9 @@
                 <a:solidFill>
                   <a:schemeClr val="tx2"/>
                 </a:solidFill>
-                <a:latin typeface="Bookman Old Style" pitchFamily="34" charset="0"/>
-                <a:ea typeface="Bookman Old Style" pitchFamily="34" charset="-122"/>
-                <a:cs typeface="Bookman Old Style" pitchFamily="34" charset="-120"/>
+                <a:latin typeface="Arial" pitchFamily="34" charset="0"/>
+                <a:ea typeface="Arial" pitchFamily="34" charset="-122"/>
+                <a:cs typeface="Arial" pitchFamily="34" charset="-120"/>
               </a:rPr>
               <a:t>План должен сходиться</a:t>
             </a:r>
@@ -16369,7 +16741,7 @@
         <p:spPr>
           <a:xfrm>
             <a:off x="5349240" y="1097280"/>
-            <a:ext cx="3337560" cy="1692688"/>
+            <a:ext cx="3337560" cy="2001571"/>
           </a:xfrm>
           <a:prstGeom prst="rect">
             <a:avLst/>
@@ -16406,7 +16778,7 @@
             <a:lvl1pPr>
               <a:defRPr sz="900">
                 <a:solidFill>
-                  <a:srgbClr val="7D6650"/>
+                  <a:srgbClr val="6B8590"/>
                 </a:solidFill>
               </a:defRPr>
             </a:lvl1pPr>
@@ -16477,9 +16849,9 @@
                 <a:solidFill>
                   <a:schemeClr val="tx2"/>
                 </a:solidFill>
-                <a:latin typeface="Bookman Old Style" pitchFamily="34" charset="0"/>
-                <a:ea typeface="Bookman Old Style" pitchFamily="34" charset="-122"/>
-                <a:cs typeface="Bookman Old Style" pitchFamily="34" charset="-120"/>
+                <a:latin typeface="Arial" pitchFamily="34" charset="0"/>
+                <a:ea typeface="Arial" pitchFamily="34" charset="-122"/>
+                <a:cs typeface="Arial" pitchFamily="34" charset="-120"/>
               </a:rPr>
               <a:t>Guardrails: только Приморье</a:t>
             </a:r>
@@ -16885,14 +17257,41 @@
       </p:sp>
       <p:sp>
         <p:nvSpPr>
-          <p:cNvPr id="15" name="Text 13"/>
+          <p:cNvPr id="15" name="layers"/>
+          <p:cNvSpPr/>
+          <p:nvPr/>
+        </p:nvSpPr>
+        <p:spPr>
+          <a:xfrm>
+            <a:off x="5486400" y="1097280"/>
+            <a:ext cx="3200400" cy="2926080"/>
+          </a:xfrm>
+          <a:prstGeom prst="roundRect">
+            <a:avLst>
+              <a:gd name="adj" fmla="val 3750"/>
+            </a:avLst>
+          </a:prstGeom>
+          <a:solidFill>
+            <a:schemeClr val="bg2"/>
+          </a:solidFill>
+          <a:ln w="12700">
+            <a:solidFill>
+              <a:schemeClr val="bg2"/>
+            </a:solidFill>
+            <a:prstDash val="solid"/>
+          </a:ln>
+        </p:spPr>
+      </p:sp>
+      <p:sp>
+        <p:nvSpPr>
+          <p:cNvPr id="16" name="Text 14"/>
           <p:cNvSpPr txBox="1"/>
           <p:nvPr/>
         </p:nvSpPr>
         <p:spPr>
           <a:xfrm>
-            <a:off x="457200" y="4160520"/>
-            <a:ext cx="4754880" cy="548640"/>
+            <a:off x="5669280" y="1207008"/>
+            <a:ext cx="2834640" cy="365760"/>
           </a:xfrm>
           <a:prstGeom prst="rect">
             <a:avLst/>
@@ -16901,19 +17300,418 @@
           <a:ln/>
         </p:spPr>
         <p:txBody>
-          <a:bodyPr wrap="square" lIns="0" tIns="0" rIns="0" bIns="0" rtlCol="0" anchor="t"/>
+          <a:bodyPr wrap="square" lIns="0" tIns="0" rIns="0" bIns="0" rtlCol="0" anchor="ctr"/>
           <a:lstStyle/>
           <a:p>
             <a:pPr indent="0" marL="0">
               <a:buNone/>
             </a:pPr>
             <a:r>
+              <a:rPr lang="en-US" sz="1500" b="1" dirty="0">
+                <a:solidFill>
+                  <a:schemeClr val="tx1"/>
+                </a:solidFill>
+              </a:rPr>
+              <a:t>Три слоя защиты</a:t>
+            </a:r>
+            <a:endParaRPr lang="en-US" sz="1500" dirty="0"/>
+          </a:p>
+        </p:txBody>
+      </p:sp>
+      <p:sp>
+        <p:nvSpPr>
+          <p:cNvPr id="17" name="num-1"/>
+          <p:cNvSpPr/>
+          <p:nvPr/>
+        </p:nvSpPr>
+        <p:spPr>
+          <a:xfrm>
+            <a:off x="5669280" y="1691640"/>
+            <a:ext cx="384048" cy="384048"/>
+          </a:xfrm>
+          <a:prstGeom prst="ellipse">
+            <a:avLst/>
+          </a:prstGeom>
+          <a:solidFill>
+            <a:schemeClr val="accent1"/>
+          </a:solidFill>
+          <a:ln w="12700">
+            <a:solidFill>
+              <a:schemeClr val="accent1"/>
+            </a:solidFill>
+            <a:prstDash val="solid"/>
+          </a:ln>
+        </p:spPr>
+      </p:sp>
+      <p:sp>
+        <p:nvSpPr>
+          <p:cNvPr id="18" name="Text 16"/>
+          <p:cNvSpPr txBox="1"/>
+          <p:nvPr/>
+        </p:nvSpPr>
+        <p:spPr>
+          <a:xfrm>
+            <a:off x="5669280" y="1691640"/>
+            <a:ext cx="384048" cy="384048"/>
+          </a:xfrm>
+          <a:prstGeom prst="rect">
+            <a:avLst/>
+          </a:prstGeom>
+          <a:noFill/>
+          <a:ln/>
+        </p:spPr>
+        <p:txBody>
+          <a:bodyPr wrap="square" lIns="0" tIns="0" rIns="0" bIns="0" rtlCol="0" anchor="ctr"/>
+          <a:lstStyle/>
+          <a:p>
+            <a:pPr algn="ctr" indent="0" marL="0">
+              <a:buNone/>
+            </a:pPr>
+            <a:r>
+              <a:rPr lang="en-US" sz="1400" b="1" dirty="0">
+                <a:solidFill>
+                  <a:schemeClr val="bg1"/>
+                </a:solidFill>
+              </a:rPr>
+              <a:t>1</a:t>
+            </a:r>
+            <a:endParaRPr lang="en-US" sz="1400" dirty="0"/>
+          </a:p>
+        </p:txBody>
+      </p:sp>
+      <p:sp>
+        <p:nvSpPr>
+          <p:cNvPr id="19" name="Text 17"/>
+          <p:cNvSpPr txBox="1"/>
+          <p:nvPr/>
+        </p:nvSpPr>
+        <p:spPr>
+          <a:xfrm>
+            <a:off x="6172200" y="1655064"/>
+            <a:ext cx="2377440" cy="274320"/>
+          </a:xfrm>
+          <a:prstGeom prst="rect">
+            <a:avLst/>
+          </a:prstGeom>
+          <a:noFill/>
+          <a:ln/>
+        </p:spPr>
+        <p:txBody>
+          <a:bodyPr wrap="square" lIns="0" tIns="0" rIns="0" bIns="0" rtlCol="0" anchor="ctr"/>
+          <a:lstStyle/>
+          <a:p>
+            <a:pPr indent="0" marL="0">
+              <a:buNone/>
+            </a:pPr>
+            <a:r>
+              <a:rPr lang="en-US" sz="1300" b="1" dirty="0">
+                <a:solidFill>
+                  <a:schemeClr val="tx1"/>
+                </a:solidFill>
+              </a:rPr>
+              <a:t>Фильтр до модели</a:t>
+            </a:r>
+            <a:endParaRPr lang="en-US" sz="1300" dirty="0"/>
+          </a:p>
+        </p:txBody>
+      </p:sp>
+      <p:sp>
+        <p:nvSpPr>
+          <p:cNvPr id="20" name="Text 18"/>
+          <p:cNvSpPr txBox="1"/>
+          <p:nvPr/>
+        </p:nvSpPr>
+        <p:spPr>
+          <a:xfrm>
+            <a:off x="6172200" y="1929384"/>
+            <a:ext cx="2377440" cy="457200"/>
+          </a:xfrm>
+          <a:prstGeom prst="rect">
+            <a:avLst/>
+          </a:prstGeom>
+          <a:noFill/>
+          <a:ln/>
+        </p:spPr>
+        <p:txBody>
+          <a:bodyPr wrap="square" lIns="0" tIns="0" rIns="0" bIns="0" rtlCol="0" anchor="t"/>
+          <a:lstStyle/>
+          <a:p>
+            <a:pPr indent="0" marL="0">
+              <a:buNone/>
+            </a:pPr>
+            <a:r>
               <a:rPr lang="en-US" sz="1100" dirty="0">
                 <a:solidFill>
                   <a:schemeClr val="accent6"/>
                 </a:solidFill>
               </a:rPr>
-              <a:t>Три слоя: пред-фильтр без LLM (0 токенов на очевидные случаи) → тул decline_request → проверка, что все точки плана в Приморье</a:t>
+              <a:t>другие регионы, оффтоп, «забудь правила» — 0 токенов</a:t>
+            </a:r>
+            <a:endParaRPr lang="en-US" sz="1100" dirty="0"/>
+          </a:p>
+        </p:txBody>
+      </p:sp>
+      <p:sp>
+        <p:nvSpPr>
+          <p:cNvPr id="21" name="num-2"/>
+          <p:cNvSpPr/>
+          <p:nvPr/>
+        </p:nvSpPr>
+        <p:spPr>
+          <a:xfrm>
+            <a:off x="5669280" y="2441448"/>
+            <a:ext cx="384048" cy="384048"/>
+          </a:xfrm>
+          <a:prstGeom prst="ellipse">
+            <a:avLst/>
+          </a:prstGeom>
+          <a:solidFill>
+            <a:schemeClr val="accent3"/>
+          </a:solidFill>
+          <a:ln w="12700">
+            <a:solidFill>
+              <a:schemeClr val="accent3"/>
+            </a:solidFill>
+            <a:prstDash val="solid"/>
+          </a:ln>
+        </p:spPr>
+      </p:sp>
+      <p:sp>
+        <p:nvSpPr>
+          <p:cNvPr id="22" name="Text 20"/>
+          <p:cNvSpPr txBox="1"/>
+          <p:nvPr/>
+        </p:nvSpPr>
+        <p:spPr>
+          <a:xfrm>
+            <a:off x="5669280" y="2441448"/>
+            <a:ext cx="384048" cy="384048"/>
+          </a:xfrm>
+          <a:prstGeom prst="rect">
+            <a:avLst/>
+          </a:prstGeom>
+          <a:noFill/>
+          <a:ln/>
+        </p:spPr>
+        <p:txBody>
+          <a:bodyPr wrap="square" lIns="0" tIns="0" rIns="0" bIns="0" rtlCol="0" anchor="ctr"/>
+          <a:lstStyle/>
+          <a:p>
+            <a:pPr algn="ctr" indent="0" marL="0">
+              <a:buNone/>
+            </a:pPr>
+            <a:r>
+              <a:rPr lang="en-US" sz="1400" b="1" dirty="0">
+                <a:solidFill>
+                  <a:schemeClr val="bg1"/>
+                </a:solidFill>
+              </a:rPr>
+              <a:t>2</a:t>
+            </a:r>
+            <a:endParaRPr lang="en-US" sz="1400" dirty="0"/>
+          </a:p>
+        </p:txBody>
+      </p:sp>
+      <p:sp>
+        <p:nvSpPr>
+          <p:cNvPr id="23" name="Text 21"/>
+          <p:cNvSpPr txBox="1"/>
+          <p:nvPr/>
+        </p:nvSpPr>
+        <p:spPr>
+          <a:xfrm>
+            <a:off x="6172200" y="2404872"/>
+            <a:ext cx="2377440" cy="274320"/>
+          </a:xfrm>
+          <a:prstGeom prst="rect">
+            <a:avLst/>
+          </a:prstGeom>
+          <a:noFill/>
+          <a:ln/>
+        </p:spPr>
+        <p:txBody>
+          <a:bodyPr wrap="square" lIns="0" tIns="0" rIns="0" bIns="0" rtlCol="0" anchor="ctr"/>
+          <a:lstStyle/>
+          <a:p>
+            <a:pPr indent="0" marL="0">
+              <a:buNone/>
+            </a:pPr>
+            <a:r>
+              <a:rPr lang="en-US" sz="1300" b="1" dirty="0">
+                <a:solidFill>
+                  <a:schemeClr val="tx1"/>
+                </a:solidFill>
+              </a:rPr>
+              <a:t>Отказ моделью</a:t>
+            </a:r>
+            <a:endParaRPr lang="en-US" sz="1300" dirty="0"/>
+          </a:p>
+        </p:txBody>
+      </p:sp>
+      <p:sp>
+        <p:nvSpPr>
+          <p:cNvPr id="24" name="Text 22"/>
+          <p:cNvSpPr txBox="1"/>
+          <p:nvPr/>
+        </p:nvSpPr>
+        <p:spPr>
+          <a:xfrm>
+            <a:off x="6172200" y="2679192"/>
+            <a:ext cx="2377440" cy="457200"/>
+          </a:xfrm>
+          <a:prstGeom prst="rect">
+            <a:avLst/>
+          </a:prstGeom>
+          <a:noFill/>
+          <a:ln/>
+        </p:spPr>
+        <p:txBody>
+          <a:bodyPr wrap="square" lIns="0" tIns="0" rIns="0" bIns="0" rtlCol="0" anchor="t"/>
+          <a:lstStyle/>
+          <a:p>
+            <a:pPr indent="0" marL="0">
+              <a:buNone/>
+            </a:pPr>
+            <a:r>
+              <a:rPr lang="en-US" sz="1100" dirty="0">
+                <a:solidFill>
+                  <a:schemeClr val="accent6"/>
+                </a:solidFill>
+              </a:rPr>
+              <a:t>неочевидные случаи — тул decline_request</a:t>
+            </a:r>
+            <a:endParaRPr lang="en-US" sz="1100" dirty="0"/>
+          </a:p>
+        </p:txBody>
+      </p:sp>
+      <p:sp>
+        <p:nvSpPr>
+          <p:cNvPr id="25" name="num-3"/>
+          <p:cNvSpPr/>
+          <p:nvPr/>
+        </p:nvSpPr>
+        <p:spPr>
+          <a:xfrm>
+            <a:off x="5669280" y="3191256"/>
+            <a:ext cx="384048" cy="384048"/>
+          </a:xfrm>
+          <a:prstGeom prst="ellipse">
+            <a:avLst/>
+          </a:prstGeom>
+          <a:solidFill>
+            <a:schemeClr val="accent4"/>
+          </a:solidFill>
+          <a:ln w="12700">
+            <a:solidFill>
+              <a:schemeClr val="accent4"/>
+            </a:solidFill>
+            <a:prstDash val="solid"/>
+          </a:ln>
+        </p:spPr>
+      </p:sp>
+      <p:sp>
+        <p:nvSpPr>
+          <p:cNvPr id="26" name="Text 24"/>
+          <p:cNvSpPr txBox="1"/>
+          <p:nvPr/>
+        </p:nvSpPr>
+        <p:spPr>
+          <a:xfrm>
+            <a:off x="5669280" y="3191256"/>
+            <a:ext cx="384048" cy="384048"/>
+          </a:xfrm>
+          <a:prstGeom prst="rect">
+            <a:avLst/>
+          </a:prstGeom>
+          <a:noFill/>
+          <a:ln/>
+        </p:spPr>
+        <p:txBody>
+          <a:bodyPr wrap="square" lIns="0" tIns="0" rIns="0" bIns="0" rtlCol="0" anchor="ctr"/>
+          <a:lstStyle/>
+          <a:p>
+            <a:pPr algn="ctr" indent="0" marL="0">
+              <a:buNone/>
+            </a:pPr>
+            <a:r>
+              <a:rPr lang="en-US" sz="1400" b="1" dirty="0">
+                <a:solidFill>
+                  <a:schemeClr val="bg1"/>
+                </a:solidFill>
+              </a:rPr>
+              <a:t>3</a:t>
+            </a:r>
+            <a:endParaRPr lang="en-US" sz="1400" dirty="0"/>
+          </a:p>
+        </p:txBody>
+      </p:sp>
+      <p:sp>
+        <p:nvSpPr>
+          <p:cNvPr id="27" name="Text 25"/>
+          <p:cNvSpPr txBox="1"/>
+          <p:nvPr/>
+        </p:nvSpPr>
+        <p:spPr>
+          <a:xfrm>
+            <a:off x="6172200" y="3154680"/>
+            <a:ext cx="2377440" cy="274320"/>
+          </a:xfrm>
+          <a:prstGeom prst="rect">
+            <a:avLst/>
+          </a:prstGeom>
+          <a:noFill/>
+          <a:ln/>
+        </p:spPr>
+        <p:txBody>
+          <a:bodyPr wrap="square" lIns="0" tIns="0" rIns="0" bIns="0" rtlCol="0" anchor="ctr"/>
+          <a:lstStyle/>
+          <a:p>
+            <a:pPr indent="0" marL="0">
+              <a:buNone/>
+            </a:pPr>
+            <a:r>
+              <a:rPr lang="en-US" sz="1300" b="1" dirty="0">
+                <a:solidFill>
+                  <a:schemeClr val="tx1"/>
+                </a:solidFill>
+              </a:rPr>
+              <a:t>Проверка плана</a:t>
+            </a:r>
+            <a:endParaRPr lang="en-US" sz="1300" dirty="0"/>
+          </a:p>
+        </p:txBody>
+      </p:sp>
+      <p:sp>
+        <p:nvSpPr>
+          <p:cNvPr id="28" name="Text 26"/>
+          <p:cNvSpPr txBox="1"/>
+          <p:nvPr/>
+        </p:nvSpPr>
+        <p:spPr>
+          <a:xfrm>
+            <a:off x="6172200" y="3429000"/>
+            <a:ext cx="2377440" cy="457200"/>
+          </a:xfrm>
+          <a:prstGeom prst="rect">
+            <a:avLst/>
+          </a:prstGeom>
+          <a:noFill/>
+          <a:ln/>
+        </p:spPr>
+        <p:txBody>
+          <a:bodyPr wrap="square" lIns="0" tIns="0" rIns="0" bIns="0" rtlCol="0" anchor="t"/>
+          <a:lstStyle/>
+          <a:p>
+            <a:pPr indent="0" marL="0">
+              <a:buNone/>
+            </a:pPr>
+            <a:r>
+              <a:rPr lang="en-US" sz="1100" dirty="0">
+                <a:solidFill>
+                  <a:schemeClr val="accent6"/>
+                </a:solidFill>
+              </a:rPr>
+              <a:t>все точки маршрута внутри Приморья</a:t>
             </a:r>
             <a:endParaRPr lang="en-US" sz="1100" dirty="0"/>
           </a:p>
@@ -16921,7 +17719,7 @@
       </p:sp>
       <p:pic>
         <p:nvPicPr>
-          <p:cNvPr id="16" name="refusal.png" descr="preencoded.png">    </p:cNvPr>
+          <p:cNvPr id="29" name="mascot-guard" descr="preencoded.png">    </p:cNvPr>
           <p:cNvPicPr>
             <a:picLocks noChangeAspect="1"/>
           </p:cNvPicPr>
@@ -16935,8 +17733,8 @@
         </p:blipFill>
         <p:spPr>
           <a:xfrm>
-            <a:off x="5486400" y="1097280"/>
-            <a:ext cx="3200400" cy="2231756"/>
+            <a:off x="8001000" y="4069080"/>
+            <a:ext cx="594360" cy="640080"/>
           </a:xfrm>
           <a:prstGeom prst="rect">
             <a:avLst/>
@@ -16973,7 +17771,7 @@
             <a:lvl1pPr>
               <a:defRPr sz="900">
                 <a:solidFill>
-                  <a:srgbClr val="7D6650"/>
+                  <a:srgbClr val="6B8590"/>
                 </a:solidFill>
               </a:defRPr>
             </a:lvl1pPr>
@@ -17001,34 +17799,34 @@
   <a:themeElements>
     <a:clrScheme name="Amba Primorye">
       <a:dk1>
-        <a:srgbClr val="2A1A10"/>
+        <a:srgbClr val="0F2D3A"/>
       </a:dk1>
       <a:lt1>
         <a:srgbClr val="FFFFFF"/>
       </a:lt1>
       <a:dk2>
-        <a:srgbClr val="0C2630"/>
+        <a:srgbClr val="0F2D3A"/>
       </a:dk2>
       <a:lt2>
-        <a:srgbClr val="F2E4C4"/>
+        <a:srgbClr val="E9EFF1"/>
       </a:lt2>
       <a:accent1>
-        <a:srgbClr val="B3261E"/>
+        <a:srgbClr val="F0641E"/>
       </a:accent1>
       <a:accent2>
-        <a:srgbClr val="D4A63A"/>
+        <a:srgbClr val="F5A15F"/>
       </a:accent2>
       <a:accent3>
-        <a:srgbClr val="2F7482"/>
+        <a:srgbClr val="2E6B62"/>
       </a:accent3>
       <a:accent4>
-        <a:srgbClr val="E8892B"/>
+        <a:srgbClr val="2F5D8A"/>
       </a:accent4>
       <a:accent5>
-        <a:srgbClr val="2F6B3A"/>
+        <a:srgbClr val="2E6B62"/>
       </a:accent5>
       <a:accent6>
-        <a:srgbClr val="5B4431"/>
+        <a:srgbClr val="3D5A66"/>
       </a:accent6>
       <a:hlink>
         <a:srgbClr val="1F5F8B"/>
@@ -17039,7 +17837,7 @@
     </a:clrScheme>
     <a:fontScheme name="Amba Primorye">
       <a:majorFont>
-        <a:latin typeface="Bookman Old Style"/>
+        <a:latin typeface="Arial"/>
         <a:ea typeface=""/>
         <a:cs typeface=""/>
         <a:font script="Jpan" typeface="游ゴシック Light"/>

--- a/presentation/Amba_Travel_AI.pptx
+++ b/presentation/Amba_Travel_AI.pptx
@@ -121,18 +121,18 @@
   <p:extLst>
     <p:ext uri="{521415D9-36F7-43E2-AB2F-B90AF26B5E84}">
       <p14:sectionLst xmlns:p14="http://schemas.microsoft.com/office/powerpoint/2010/main">
-        <p14:section name="Начало" id="{19ff1243-ed7a-812e-75c9-1041f6816633}">
+        <p14:section name="Начало" id="{55f83ce5-2c8c-0d70-bc69-07f9a223233c}">
           <p14:sldIdLst>
             <p14:sldId id="256"/>
           </p14:sldIdLst>
         </p14:section>
-        <p14:section name="Задача" id="{d7defa1a-5c26-224d-f83e-3188c6ec6a67}">
+        <p14:section name="Задача" id="{799d44a9-d8c1-e278-987e-670d39e1f5d9}">
           <p14:sldIdLst>
             <p14:sldId id="257"/>
             <p14:sldId id="258"/>
           </p14:sldIdLst>
         </p14:section>
-        <p14:section name="Решение" id="{116757dc-313b-a7b9-632a-4896286fea09}">
+        <p14:section name="Решение" id="{b2829937-d3a1-f9a6-ea09-bf5878568194}">
           <p14:sldIdLst>
             <p14:sldId id="259"/>
             <p14:sldId id="260"/>
@@ -142,19 +142,19 @@
             <p14:sldId id="264"/>
           </p14:sldIdLst>
         </p14:section>
-        <p14:section name="Замеры" id="{961554c5-61f0-2715-9dd3-70a801617162}">
+        <p14:section name="Замеры" id="{f16670f8-69df-c3b5-a63c-b4b78f7c6fd8}">
           <p14:sldIdLst>
             <p14:sldId id="265"/>
             <p14:sldId id="266"/>
             <p14:sldId id="267"/>
           </p14:sldIdLst>
         </p14:section>
-        <p14:section name="Команда" id="{0ac60ffc-1ab5-57bb-10c0-4a63167e7931}">
+        <p14:section name="Команда" id="{ced8fad4-d6ba-eaff-7fb7-bc38dcac5155}">
           <p14:sldIdLst>
             <p14:sldId id="268"/>
           </p14:sldIdLst>
         </p14:section>
-        <p14:section name="Итоги" id="{e3e67cd0-39a5-eb6a-ed05-8b90212319e3}">
+        <p14:section name="Итоги" id="{24763dff-eef9-df12-c23c-cef3725aae67}">
           <p14:sldIdLst>
             <p14:sldId id="269"/>
             <p14:sldId id="270"/>
@@ -257,9 +257,9 @@
           </c:dLbls>
           <c:cat>
             <c:multiLvlStrRef>
-              <c:f>Sheet1!$A$2:$A$3</c:f>
+              <c:f>Sheet1!$A$2:$A$4</c:f>
               <c:multiLvlStrCache>
-                <c:ptCount val="2"/>
+                <c:ptCount val="3"/>
                 <c:lvl>
                   <c:pt idx="0">
                     <c:v>v1</c:v>
@@ -267,21 +267,27 @@
                   <c:pt idx="1">
                     <c:v>v2</c:v>
                   </c:pt>
+                  <c:pt idx="2">
+                    <c:v>v3</c:v>
+                  </c:pt>
                 </c:lvl>
               </c:multiLvlStrCache>
             </c:multiLvlStrRef>
           </c:cat>
           <c:val>
             <c:numRef>
-              <c:f>Sheet1!$B$2:$B$3</c:f>
+              <c:f>Sheet1!$B$2:$B$4</c:f>
               <c:numCache>
                 <c:formatCode>General</c:formatCode>
-                <c:ptCount val="2"/>
+                <c:ptCount val="3"/>
                 <c:pt idx="0">
-                  <c:v>9470</c:v>
+                  <c:v>87860</c:v>
                 </c:pt>
                 <c:pt idx="1">
-                  <c:v>2893</c:v>
+                  <c:v>52098</c:v>
+                </c:pt>
+                <c:pt idx="2">
+                  <c:v>32462</c:v>
                 </c:pt>
               </c:numCache>
             </c:numRef>
@@ -520,9 +526,9 @@
           </c:dLbls>
           <c:cat>
             <c:multiLvlStrRef>
-              <c:f>Sheet1!$A$2:$A$3</c:f>
+              <c:f>Sheet1!$A$2:$A$4</c:f>
               <c:multiLvlStrCache>
-                <c:ptCount val="2"/>
+                <c:ptCount val="3"/>
                 <c:lvl>
                   <c:pt idx="0">
                     <c:v>v1</c:v>
@@ -530,21 +536,27 @@
                   <c:pt idx="1">
                     <c:v>v2</c:v>
                   </c:pt>
+                  <c:pt idx="2">
+                    <c:v>v3</c:v>
+                  </c:pt>
                 </c:lvl>
               </c:multiLvlStrCache>
             </c:multiLvlStrRef>
           </c:cat>
           <c:val>
             <c:numRef>
-              <c:f>Sheet1!$B$2:$B$3</c:f>
+              <c:f>Sheet1!$B$2:$B$4</c:f>
               <c:numCache>
                 <c:formatCode>General</c:formatCode>
-                <c:ptCount val="2"/>
+                <c:ptCount val="3"/>
                 <c:pt idx="0">
-                  <c:v>0.965</c:v>
+                  <c:v>0.643</c:v>
                 </c:pt>
                 <c:pt idx="1">
-                  <c:v>0.965</c:v>
+                  <c:v>0.75</c:v>
+                </c:pt>
+                <c:pt idx="2">
+                  <c:v>1</c:v>
                 </c:pt>
               </c:numCache>
             </c:numRef>
@@ -1092,7 +1104,7 @@
           <a:p>
             <a:r>
               <a:rPr lang="en-US" dirty="0"/>
-              <a:t>Представляем Амбу — тигрёнка-летописца. Это веб-ассистент: пишешь запрос обычными словами, получаешь готовый план поездки по Приморскому краю, оформленный как старорусская грамота. Главное — план не просто сгенерирован, а сверен с реальностью.</a:t>
+              <a:t>Представляем Амбу — тигрёнка-гида. Это веб-ассистент: пишешь запрос обычными словами, получаешь готовый план поездки по Приморскому краю. Главное — план не просто сгенерирован, а сверен с реальностью.</a:t>
             </a:r>
             <a:endParaRPr lang="en-US" dirty="0"/>
           </a:p>
@@ -1268,7 +1280,7 @@
           <a:p>
             <a:r>
               <a:rPr lang="en-US" dirty="0"/>
-              <a:t>Три версии на одном наборе из 20 запросов. v1 — бейзлайн: короткий промпт, сырые ответы тулов. v2 — сжатие контекста, пред-фильтр и цикл исправлений. v3 — тот же пайплайн на лёгкой модели. Смотрим качество, токены и время.</a:t>
+              <a:t>Три версии на одном наборе из 10 запросов. v1 — бейзлайн: короткий промпт, сырые ответы тулов. v2 — сжатие контекста, фильтр и цикл исправлений. v3 — исправления, найденные эвалом, и модель DeepSeek. Смотрим качество, токены и время.</a:t>
             </a:r>
             <a:endParaRPr lang="en-US" dirty="0"/>
           </a:p>
@@ -1356,7 +1368,7 @@
           <a:p>
             <a:r>
               <a:rPr lang="en-US" dirty="0"/>
-              <a:t>Главные выводы по замерам: сжатие контекста резко снижает токены без потери качества, сверка поднимает долю сходящихся планов, лёгкая модель дешевле — цена вопроса видна в таблице.</a:t>
+              <a:t>v1 и v2 — на бесплатной MiniMax, v3 — на DeepSeek с исправлениями. Главные выводы по замерам: сжатие контекста резко снижает токены без потери качества, сверка поднимает долю сходящихся планов, лёгкая модель дешевле — цена вопроса видна в таблице.</a:t>
             </a:r>
             <a:endParaRPr lang="en-US" dirty="0"/>
           </a:p>
@@ -3079,7 +3091,7 @@
                 <a:ea typeface="Arial" pitchFamily="34" charset="-122"/>
                 <a:cs typeface="Arial" pitchFamily="34" charset="-120"/>
               </a:rPr>
-              <a:t>Амба — AI-летописец странствий по Приморью</a:t>
+              <a:t>Амба — AI-гид по Приморью</a:t>
             </a:r>
             <a:endParaRPr lang="en-US" sz="3600" dirty="0"/>
           </a:p>
@@ -3210,7 +3222,7 @@
                 <a:ea typeface="Arial" pitchFamily="34" charset="-122"/>
                 <a:cs typeface="Arial" pitchFamily="34" charset="-120"/>
               </a:rPr>
-              <a:t>Гой еси, путникъ! Куда держимъ путь?</a:t>
+              <a:t>Привет! Куда поедем?</a:t>
             </a:r>
             <a:endParaRPr lang="en-US" sz="1200" dirty="0"/>
           </a:p>
@@ -3312,7 +3324,7 @@
                   <a:schemeClr val="accent1"/>
                 </a:solidFill>
               </a:rPr>
-              <a:t>20</a:t>
+              <a:t>10</a:t>
             </a:r>
             <a:endParaRPr lang="en-US" sz="4800" dirty="0"/>
           </a:p>
@@ -3348,7 +3360,7 @@
                   <a:schemeClr val="tx1"/>
                 </a:solidFill>
               </a:rPr>
-              <a:t>фиксированных запросов</a:t>
+              <a:t>фиксированных запросов в прогоне</a:t>
             </a:r>
             <a:endParaRPr lang="en-US" sz="1300" dirty="0"/>
           </a:p>
@@ -3384,7 +3396,7 @@
                   <a:schemeClr val="accent1"/>
                 </a:solidFill>
               </a:rPr>
-              <a:t>15</a:t>
+              <a:t>7</a:t>
             </a:r>
             <a:endParaRPr lang="en-US" sz="4800" dirty="0"/>
           </a:p>
@@ -3420,7 +3432,7 @@
                   <a:schemeClr val="tx1"/>
                 </a:solidFill>
               </a:rPr>
-              <a:t>поездок: все виды транспорта</a:t>
+              <a:t>поездок: машина, автобус, электричка, велосипед, пешком</a:t>
             </a:r>
             <a:endParaRPr lang="en-US" sz="1300" dirty="0"/>
           </a:p>
@@ -3456,7 +3468,7 @@
                   <a:schemeClr val="accent1"/>
                 </a:solidFill>
               </a:rPr>
-              <a:t>5</a:t>
+              <a:t>3</a:t>
             </a:r>
             <a:endParaRPr lang="en-US" sz="4800" dirty="0"/>
           </a:p>
@@ -3492,7 +3504,7 @@
                   <a:schemeClr val="tx1"/>
                 </a:solidFill>
               </a:rPr>
-              <a:t>нецелевых: другой регион, инъекции, оффтоп</a:t>
+              <a:t>нецелевых: другой регион, «забудь правила», оффтоп</a:t>
             </a:r>
             <a:endParaRPr lang="en-US" sz="1300" dirty="0"/>
           </a:p>
@@ -4606,7 +4618,7 @@
                             <a:srgbClr val="0F2D3A"/>
                           </a:solidFill>
                         </a:rPr>
-                        <a:t>rule-based-planner</a:t>
+                        <a:t>minimax-m3.1-flash:free</a:t>
                       </a:r>
                       <a:endParaRPr lang="en-US" sz="1000" dirty="0"/>
                     </a:p>
@@ -4664,10 +4676,10 @@
                       <a:r>
                         <a:rPr lang="en-US" sz="1100" b="1" dirty="0">
                           <a:solidFill>
-                            <a:srgbClr val="F0641E"/>
+                            <a:srgbClr val="0F2D3A"/>
                           </a:solidFill>
                         </a:rPr>
-                        <a:t>0.96</a:t>
+                        <a:t>0.64</a:t>
                       </a:r>
                       <a:endParaRPr lang="en-US" sz="1100" dirty="0"/>
                     </a:p>
@@ -4728,7 +4740,7 @@
                             <a:srgbClr val="0F2D3A"/>
                           </a:solidFill>
                         </a:rPr>
-                        <a:t>95%</a:t>
+                        <a:t>70%</a:t>
                       </a:r>
                       <a:endParaRPr lang="en-US" sz="1100" dirty="0"/>
                     </a:p>
@@ -4789,7 +4801,7 @@
                             <a:srgbClr val="0F2D3A"/>
                           </a:solidFill>
                         </a:rPr>
-                        <a:t>87%</a:t>
+                        <a:t>43%</a:t>
                       </a:r>
                       <a:endParaRPr lang="en-US" sz="1100" dirty="0"/>
                     </a:p>
@@ -4850,7 +4862,7 @@
                             <a:srgbClr val="0F2D3A"/>
                           </a:solidFill>
                         </a:rPr>
-                        <a:t>9 470</a:t>
+                        <a:t>87 860</a:t>
                       </a:r>
                       <a:endParaRPr lang="en-US" sz="1100" dirty="0"/>
                     </a:p>
@@ -4972,7 +4984,7 @@
                             <a:srgbClr val="0F2D3A"/>
                           </a:solidFill>
                         </a:rPr>
-                        <a:t>3,35</a:t>
+                        <a:t>68,47</a:t>
                       </a:r>
                       <a:endParaRPr lang="en-US" sz="1100" dirty="0"/>
                     </a:p>
@@ -5096,7 +5108,7 @@
                             <a:srgbClr val="0F2D3A"/>
                           </a:solidFill>
                         </a:rPr>
-                        <a:t>rule-based-planner</a:t>
+                        <a:t>minimax-m3.1-flash:free</a:t>
                       </a:r>
                       <a:endParaRPr lang="en-US" sz="1000" dirty="0"/>
                     </a:p>
@@ -5154,10 +5166,10 @@
                       <a:r>
                         <a:rPr lang="en-US" sz="1100" b="1" dirty="0">
                           <a:solidFill>
-                            <a:srgbClr val="F0641E"/>
+                            <a:srgbClr val="0F2D3A"/>
                           </a:solidFill>
                         </a:rPr>
-                        <a:t>0.96</a:t>
+                        <a:t>0.75</a:t>
                       </a:r>
                       <a:endParaRPr lang="en-US" sz="1100" dirty="0"/>
                     </a:p>
@@ -5218,7 +5230,7 @@
                             <a:srgbClr val="0F2D3A"/>
                           </a:solidFill>
                         </a:rPr>
-                        <a:t>95%</a:t>
+                        <a:t>80%</a:t>
                       </a:r>
                       <a:endParaRPr lang="en-US" sz="1100" dirty="0"/>
                     </a:p>
@@ -5279,7 +5291,7 @@
                             <a:srgbClr val="0F2D3A"/>
                           </a:solidFill>
                         </a:rPr>
-                        <a:t>87%</a:t>
+                        <a:t>57%</a:t>
                       </a:r>
                       <a:endParaRPr lang="en-US" sz="1100" dirty="0"/>
                     </a:p>
@@ -5340,7 +5352,7 @@
                             <a:srgbClr val="0F2D3A"/>
                           </a:solidFill>
                         </a:rPr>
-                        <a:t>2 893</a:t>
+                        <a:t>52 098</a:t>
                       </a:r>
                       <a:endParaRPr lang="en-US" sz="1100" dirty="0"/>
                     </a:p>
@@ -5462,7 +5474,7 @@
                             <a:srgbClr val="0F2D3A"/>
                           </a:solidFill>
                         </a:rPr>
-                        <a:t>0,37</a:t>
+                        <a:t>65,65</a:t>
                       </a:r>
                       <a:endParaRPr lang="en-US" sz="1100" dirty="0"/>
                     </a:p>
@@ -5506,6 +5518,496 @@
                     </a:lnB>
                     <a:solidFill>
                       <a:srgbClr val="FFFFFF"/>
+                    </a:solidFill>
+                  </a:tcPr>
+                </a:tc>
+              </a:tr>
+              <a:tr h="384048">
+                <a:tc>
+                  <a:txBody>
+                    <a:bodyPr/>
+                    <a:lstStyle/>
+                    <a:p>
+                      <a:pPr algn="l" indent="0" marL="0">
+                        <a:buNone/>
+                      </a:pPr>
+                      <a:r>
+                        <a:rPr lang="en-US" sz="1100" b="1" dirty="0">
+                          <a:solidFill>
+                            <a:srgbClr val="0F2D3A"/>
+                          </a:solidFill>
+                        </a:rPr>
+                        <a:t>v3 · Финальная: v2 + исправления + DeepSeek</a:t>
+                      </a:r>
+                      <a:endParaRPr lang="en-US" sz="1100" dirty="0"/>
+                    </a:p>
+                  </a:txBody>
+                  <a:tcPr marL="45720" marR="45720" marT="45720" marB="45720" anchor="ctr">
+                    <a:lnL w="6350" cap="flat" cmpd="sng" algn="ctr">
+                      <a:solidFill>
+                        <a:srgbClr val="D5E0E3"/>
+                      </a:solidFill>
+                      <a:prstDash val="solid"/>
+                      <a:round/>
+                      <a:headEnd type="none" w="med" len="med"/>
+                      <a:tailEnd type="none" w="med" len="med"/>
+                    </a:lnL>
+                    <a:lnR w="6350" cap="flat" cmpd="sng" algn="ctr">
+                      <a:solidFill>
+                        <a:srgbClr val="D5E0E3"/>
+                      </a:solidFill>
+                      <a:prstDash val="solid"/>
+                      <a:round/>
+                      <a:headEnd type="none" w="med" len="med"/>
+                      <a:tailEnd type="none" w="med" len="med"/>
+                    </a:lnR>
+                    <a:lnT w="6350" cap="flat" cmpd="sng" algn="ctr">
+                      <a:solidFill>
+                        <a:srgbClr val="D5E0E3"/>
+                      </a:solidFill>
+                      <a:prstDash val="solid"/>
+                      <a:round/>
+                      <a:headEnd type="none" w="med" len="med"/>
+                      <a:tailEnd type="none" w="med" len="med"/>
+                    </a:lnT>
+                    <a:lnB w="6350" cap="flat" cmpd="sng" algn="ctr">
+                      <a:solidFill>
+                        <a:srgbClr val="D5E0E3"/>
+                      </a:solidFill>
+                      <a:prstDash val="solid"/>
+                      <a:round/>
+                      <a:headEnd type="none" w="med" len="med"/>
+                      <a:tailEnd type="none" w="med" len="med"/>
+                    </a:lnB>
+                    <a:solidFill>
+                      <a:srgbClr val="F3F6F7"/>
+                    </a:solidFill>
+                  </a:tcPr>
+                </a:tc>
+                <a:tc>
+                  <a:txBody>
+                    <a:bodyPr/>
+                    <a:lstStyle/>
+                    <a:p>
+                      <a:pPr algn="ctr" indent="0" marL="0">
+                        <a:buNone/>
+                      </a:pPr>
+                      <a:r>
+                        <a:rPr lang="en-US" sz="1000" dirty="0">
+                          <a:solidFill>
+                            <a:srgbClr val="0F2D3A"/>
+                          </a:solidFill>
+                        </a:rPr>
+                        <a:t>deepseek-v4.1-flash</a:t>
+                      </a:r>
+                      <a:endParaRPr lang="en-US" sz="1000" dirty="0"/>
+                    </a:p>
+                  </a:txBody>
+                  <a:tcPr marL="45720" marR="45720" marT="45720" marB="45720" anchor="ctr">
+                    <a:lnL w="6350" cap="flat" cmpd="sng" algn="ctr">
+                      <a:solidFill>
+                        <a:srgbClr val="D5E0E3"/>
+                      </a:solidFill>
+                      <a:prstDash val="solid"/>
+                      <a:round/>
+                      <a:headEnd type="none" w="med" len="med"/>
+                      <a:tailEnd type="none" w="med" len="med"/>
+                    </a:lnL>
+                    <a:lnR w="6350" cap="flat" cmpd="sng" algn="ctr">
+                      <a:solidFill>
+                        <a:srgbClr val="D5E0E3"/>
+                      </a:solidFill>
+                      <a:prstDash val="solid"/>
+                      <a:round/>
+                      <a:headEnd type="none" w="med" len="med"/>
+                      <a:tailEnd type="none" w="med" len="med"/>
+                    </a:lnR>
+                    <a:lnT w="6350" cap="flat" cmpd="sng" algn="ctr">
+                      <a:solidFill>
+                        <a:srgbClr val="D5E0E3"/>
+                      </a:solidFill>
+                      <a:prstDash val="solid"/>
+                      <a:round/>
+                      <a:headEnd type="none" w="med" len="med"/>
+                      <a:tailEnd type="none" w="med" len="med"/>
+                    </a:lnT>
+                    <a:lnB w="6350" cap="flat" cmpd="sng" algn="ctr">
+                      <a:solidFill>
+                        <a:srgbClr val="D5E0E3"/>
+                      </a:solidFill>
+                      <a:prstDash val="solid"/>
+                      <a:round/>
+                      <a:headEnd type="none" w="med" len="med"/>
+                      <a:tailEnd type="none" w="med" len="med"/>
+                    </a:lnB>
+                    <a:solidFill>
+                      <a:srgbClr val="F3F6F7"/>
+                    </a:solidFill>
+                  </a:tcPr>
+                </a:tc>
+                <a:tc>
+                  <a:txBody>
+                    <a:bodyPr/>
+                    <a:lstStyle/>
+                    <a:p>
+                      <a:pPr algn="ctr" indent="0" marL="0">
+                        <a:buNone/>
+                      </a:pPr>
+                      <a:r>
+                        <a:rPr lang="en-US" sz="1100" b="1" dirty="0">
+                          <a:solidFill>
+                            <a:srgbClr val="F0641E"/>
+                          </a:solidFill>
+                        </a:rPr>
+                        <a:t>1.00</a:t>
+                      </a:r>
+                      <a:endParaRPr lang="en-US" sz="1100" dirty="0"/>
+                    </a:p>
+                  </a:txBody>
+                  <a:tcPr marL="45720" marR="45720" marT="45720" marB="45720" anchor="ctr">
+                    <a:lnL w="6350" cap="flat" cmpd="sng" algn="ctr">
+                      <a:solidFill>
+                        <a:srgbClr val="D5E0E3"/>
+                      </a:solidFill>
+                      <a:prstDash val="solid"/>
+                      <a:round/>
+                      <a:headEnd type="none" w="med" len="med"/>
+                      <a:tailEnd type="none" w="med" len="med"/>
+                    </a:lnL>
+                    <a:lnR w="6350" cap="flat" cmpd="sng" algn="ctr">
+                      <a:solidFill>
+                        <a:srgbClr val="D5E0E3"/>
+                      </a:solidFill>
+                      <a:prstDash val="solid"/>
+                      <a:round/>
+                      <a:headEnd type="none" w="med" len="med"/>
+                      <a:tailEnd type="none" w="med" len="med"/>
+                    </a:lnR>
+                    <a:lnT w="6350" cap="flat" cmpd="sng" algn="ctr">
+                      <a:solidFill>
+                        <a:srgbClr val="D5E0E3"/>
+                      </a:solidFill>
+                      <a:prstDash val="solid"/>
+                      <a:round/>
+                      <a:headEnd type="none" w="med" len="med"/>
+                      <a:tailEnd type="none" w="med" len="med"/>
+                    </a:lnT>
+                    <a:lnB w="6350" cap="flat" cmpd="sng" algn="ctr">
+                      <a:solidFill>
+                        <a:srgbClr val="D5E0E3"/>
+                      </a:solidFill>
+                      <a:prstDash val="solid"/>
+                      <a:round/>
+                      <a:headEnd type="none" w="med" len="med"/>
+                      <a:tailEnd type="none" w="med" len="med"/>
+                    </a:lnB>
+                    <a:solidFill>
+                      <a:srgbClr val="F3F6F7"/>
+                    </a:solidFill>
+                  </a:tcPr>
+                </a:tc>
+                <a:tc>
+                  <a:txBody>
+                    <a:bodyPr/>
+                    <a:lstStyle/>
+                    <a:p>
+                      <a:pPr algn="ctr" indent="0" marL="0">
+                        <a:buNone/>
+                      </a:pPr>
+                      <a:r>
+                        <a:rPr lang="en-US" sz="1100" dirty="0">
+                          <a:solidFill>
+                            <a:srgbClr val="0F2D3A"/>
+                          </a:solidFill>
+                        </a:rPr>
+                        <a:t>100%</a:t>
+                      </a:r>
+                      <a:endParaRPr lang="en-US" sz="1100" dirty="0"/>
+                    </a:p>
+                  </a:txBody>
+                  <a:tcPr marL="45720" marR="45720" marT="45720" marB="45720" anchor="ctr">
+                    <a:lnL w="6350" cap="flat" cmpd="sng" algn="ctr">
+                      <a:solidFill>
+                        <a:srgbClr val="D5E0E3"/>
+                      </a:solidFill>
+                      <a:prstDash val="solid"/>
+                      <a:round/>
+                      <a:headEnd type="none" w="med" len="med"/>
+                      <a:tailEnd type="none" w="med" len="med"/>
+                    </a:lnL>
+                    <a:lnR w="6350" cap="flat" cmpd="sng" algn="ctr">
+                      <a:solidFill>
+                        <a:srgbClr val="D5E0E3"/>
+                      </a:solidFill>
+                      <a:prstDash val="solid"/>
+                      <a:round/>
+                      <a:headEnd type="none" w="med" len="med"/>
+                      <a:tailEnd type="none" w="med" len="med"/>
+                    </a:lnR>
+                    <a:lnT w="6350" cap="flat" cmpd="sng" algn="ctr">
+                      <a:solidFill>
+                        <a:srgbClr val="D5E0E3"/>
+                      </a:solidFill>
+                      <a:prstDash val="solid"/>
+                      <a:round/>
+                      <a:headEnd type="none" w="med" len="med"/>
+                      <a:tailEnd type="none" w="med" len="med"/>
+                    </a:lnT>
+                    <a:lnB w="6350" cap="flat" cmpd="sng" algn="ctr">
+                      <a:solidFill>
+                        <a:srgbClr val="D5E0E3"/>
+                      </a:solidFill>
+                      <a:prstDash val="solid"/>
+                      <a:round/>
+                      <a:headEnd type="none" w="med" len="med"/>
+                      <a:tailEnd type="none" w="med" len="med"/>
+                    </a:lnB>
+                    <a:solidFill>
+                      <a:srgbClr val="F3F6F7"/>
+                    </a:solidFill>
+                  </a:tcPr>
+                </a:tc>
+                <a:tc>
+                  <a:txBody>
+                    <a:bodyPr/>
+                    <a:lstStyle/>
+                    <a:p>
+                      <a:pPr algn="ctr" indent="0" marL="0">
+                        <a:buNone/>
+                      </a:pPr>
+                      <a:r>
+                        <a:rPr lang="en-US" sz="1100" dirty="0">
+                          <a:solidFill>
+                            <a:srgbClr val="0F2D3A"/>
+                          </a:solidFill>
+                        </a:rPr>
+                        <a:t>100%</a:t>
+                      </a:r>
+                      <a:endParaRPr lang="en-US" sz="1100" dirty="0"/>
+                    </a:p>
+                  </a:txBody>
+                  <a:tcPr marL="45720" marR="45720" marT="45720" marB="45720" anchor="ctr">
+                    <a:lnL w="6350" cap="flat" cmpd="sng" algn="ctr">
+                      <a:solidFill>
+                        <a:srgbClr val="D5E0E3"/>
+                      </a:solidFill>
+                      <a:prstDash val="solid"/>
+                      <a:round/>
+                      <a:headEnd type="none" w="med" len="med"/>
+                      <a:tailEnd type="none" w="med" len="med"/>
+                    </a:lnL>
+                    <a:lnR w="6350" cap="flat" cmpd="sng" algn="ctr">
+                      <a:solidFill>
+                        <a:srgbClr val="D5E0E3"/>
+                      </a:solidFill>
+                      <a:prstDash val="solid"/>
+                      <a:round/>
+                      <a:headEnd type="none" w="med" len="med"/>
+                      <a:tailEnd type="none" w="med" len="med"/>
+                    </a:lnR>
+                    <a:lnT w="6350" cap="flat" cmpd="sng" algn="ctr">
+                      <a:solidFill>
+                        <a:srgbClr val="D5E0E3"/>
+                      </a:solidFill>
+                      <a:prstDash val="solid"/>
+                      <a:round/>
+                      <a:headEnd type="none" w="med" len="med"/>
+                      <a:tailEnd type="none" w="med" len="med"/>
+                    </a:lnT>
+                    <a:lnB w="6350" cap="flat" cmpd="sng" algn="ctr">
+                      <a:solidFill>
+                        <a:srgbClr val="D5E0E3"/>
+                      </a:solidFill>
+                      <a:prstDash val="solid"/>
+                      <a:round/>
+                      <a:headEnd type="none" w="med" len="med"/>
+                      <a:tailEnd type="none" w="med" len="med"/>
+                    </a:lnB>
+                    <a:solidFill>
+                      <a:srgbClr val="F3F6F7"/>
+                    </a:solidFill>
+                  </a:tcPr>
+                </a:tc>
+                <a:tc>
+                  <a:txBody>
+                    <a:bodyPr/>
+                    <a:lstStyle/>
+                    <a:p>
+                      <a:pPr algn="ctr" indent="0" marL="0">
+                        <a:buNone/>
+                      </a:pPr>
+                      <a:r>
+                        <a:rPr lang="en-US" sz="1100" dirty="0">
+                          <a:solidFill>
+                            <a:srgbClr val="0F2D3A"/>
+                          </a:solidFill>
+                        </a:rPr>
+                        <a:t>32 462</a:t>
+                      </a:r>
+                      <a:endParaRPr lang="en-US" sz="1100" dirty="0"/>
+                    </a:p>
+                  </a:txBody>
+                  <a:tcPr marL="45720" marR="45720" marT="45720" marB="45720" anchor="ctr">
+                    <a:lnL w="6350" cap="flat" cmpd="sng" algn="ctr">
+                      <a:solidFill>
+                        <a:srgbClr val="D5E0E3"/>
+                      </a:solidFill>
+                      <a:prstDash val="solid"/>
+                      <a:round/>
+                      <a:headEnd type="none" w="med" len="med"/>
+                      <a:tailEnd type="none" w="med" len="med"/>
+                    </a:lnL>
+                    <a:lnR w="6350" cap="flat" cmpd="sng" algn="ctr">
+                      <a:solidFill>
+                        <a:srgbClr val="D5E0E3"/>
+                      </a:solidFill>
+                      <a:prstDash val="solid"/>
+                      <a:round/>
+                      <a:headEnd type="none" w="med" len="med"/>
+                      <a:tailEnd type="none" w="med" len="med"/>
+                    </a:lnR>
+                    <a:lnT w="6350" cap="flat" cmpd="sng" algn="ctr">
+                      <a:solidFill>
+                        <a:srgbClr val="D5E0E3"/>
+                      </a:solidFill>
+                      <a:prstDash val="solid"/>
+                      <a:round/>
+                      <a:headEnd type="none" w="med" len="med"/>
+                      <a:tailEnd type="none" w="med" len="med"/>
+                    </a:lnT>
+                    <a:lnB w="6350" cap="flat" cmpd="sng" algn="ctr">
+                      <a:solidFill>
+                        <a:srgbClr val="D5E0E3"/>
+                      </a:solidFill>
+                      <a:prstDash val="solid"/>
+                      <a:round/>
+                      <a:headEnd type="none" w="med" len="med"/>
+                      <a:tailEnd type="none" w="med" len="med"/>
+                    </a:lnB>
+                    <a:solidFill>
+                      <a:srgbClr val="F3F6F7"/>
+                    </a:solidFill>
+                  </a:tcPr>
+                </a:tc>
+                <a:tc>
+                  <a:txBody>
+                    <a:bodyPr/>
+                    <a:lstStyle/>
+                    <a:p>
+                      <a:pPr algn="ctr" indent="0" marL="0">
+                        <a:buNone/>
+                      </a:pPr>
+                      <a:r>
+                        <a:rPr lang="en-US" sz="1100" dirty="0">
+                          <a:solidFill>
+                            <a:srgbClr val="0F2D3A"/>
+                          </a:solidFill>
+                        </a:rPr>
+                        <a:t>0.0052</a:t>
+                      </a:r>
+                      <a:endParaRPr lang="en-US" sz="1100" dirty="0"/>
+                    </a:p>
+                  </a:txBody>
+                  <a:tcPr marL="45720" marR="45720" marT="45720" marB="45720" anchor="ctr">
+                    <a:lnL w="6350" cap="flat" cmpd="sng" algn="ctr">
+                      <a:solidFill>
+                        <a:srgbClr val="D5E0E3"/>
+                      </a:solidFill>
+                      <a:prstDash val="solid"/>
+                      <a:round/>
+                      <a:headEnd type="none" w="med" len="med"/>
+                      <a:tailEnd type="none" w="med" len="med"/>
+                    </a:lnL>
+                    <a:lnR w="6350" cap="flat" cmpd="sng" algn="ctr">
+                      <a:solidFill>
+                        <a:srgbClr val="D5E0E3"/>
+                      </a:solidFill>
+                      <a:prstDash val="solid"/>
+                      <a:round/>
+                      <a:headEnd type="none" w="med" len="med"/>
+                      <a:tailEnd type="none" w="med" len="med"/>
+                    </a:lnR>
+                    <a:lnT w="6350" cap="flat" cmpd="sng" algn="ctr">
+                      <a:solidFill>
+                        <a:srgbClr val="D5E0E3"/>
+                      </a:solidFill>
+                      <a:prstDash val="solid"/>
+                      <a:round/>
+                      <a:headEnd type="none" w="med" len="med"/>
+                      <a:tailEnd type="none" w="med" len="med"/>
+                    </a:lnT>
+                    <a:lnB w="6350" cap="flat" cmpd="sng" algn="ctr">
+                      <a:solidFill>
+                        <a:srgbClr val="D5E0E3"/>
+                      </a:solidFill>
+                      <a:prstDash val="solid"/>
+                      <a:round/>
+                      <a:headEnd type="none" w="med" len="med"/>
+                      <a:tailEnd type="none" w="med" len="med"/>
+                    </a:lnB>
+                    <a:solidFill>
+                      <a:srgbClr val="F3F6F7"/>
+                    </a:solidFill>
+                  </a:tcPr>
+                </a:tc>
+                <a:tc>
+                  <a:txBody>
+                    <a:bodyPr/>
+                    <a:lstStyle/>
+                    <a:p>
+                      <a:pPr algn="ctr" indent="0" marL="0">
+                        <a:buNone/>
+                      </a:pPr>
+                      <a:r>
+                        <a:rPr lang="en-US" sz="1100" dirty="0">
+                          <a:solidFill>
+                            <a:srgbClr val="0F2D3A"/>
+                          </a:solidFill>
+                        </a:rPr>
+                        <a:t>50,54</a:t>
+                      </a:r>
+                      <a:endParaRPr lang="en-US" sz="1100" dirty="0"/>
+                    </a:p>
+                  </a:txBody>
+                  <a:tcPr marL="45720" marR="45720" marT="45720" marB="45720" anchor="ctr">
+                    <a:lnL w="6350" cap="flat" cmpd="sng" algn="ctr">
+                      <a:solidFill>
+                        <a:srgbClr val="D5E0E3"/>
+                      </a:solidFill>
+                      <a:prstDash val="solid"/>
+                      <a:round/>
+                      <a:headEnd type="none" w="med" len="med"/>
+                      <a:tailEnd type="none" w="med" len="med"/>
+                    </a:lnL>
+                    <a:lnR w="6350" cap="flat" cmpd="sng" algn="ctr">
+                      <a:solidFill>
+                        <a:srgbClr val="D5E0E3"/>
+                      </a:solidFill>
+                      <a:prstDash val="solid"/>
+                      <a:round/>
+                      <a:headEnd type="none" w="med" len="med"/>
+                      <a:tailEnd type="none" w="med" len="med"/>
+                    </a:lnR>
+                    <a:lnT w="6350" cap="flat" cmpd="sng" algn="ctr">
+                      <a:solidFill>
+                        <a:srgbClr val="D5E0E3"/>
+                      </a:solidFill>
+                      <a:prstDash val="solid"/>
+                      <a:round/>
+                      <a:headEnd type="none" w="med" len="med"/>
+                      <a:tailEnd type="none" w="med" len="med"/>
+                    </a:lnT>
+                    <a:lnB w="6350" cap="flat" cmpd="sng" algn="ctr">
+                      <a:solidFill>
+                        <a:srgbClr val="D5E0E3"/>
+                      </a:solidFill>
+                      <a:prstDash val="solid"/>
+                      <a:round/>
+                      <a:headEnd type="none" w="med" len="med"/>
+                      <a:tailEnd type="none" w="med" len="med"/>
+                    </a:lnB>
+                    <a:solidFill>
+                      <a:srgbClr val="F3F6F7"/>
                     </a:solidFill>
                   </a:tcPr>
                 </a:tc>
@@ -5546,42 +6048,6 @@
           </a:graphicData>
         </a:graphic>
       </p:graphicFrame>
-      <p:sp>
-        <p:nvSpPr>
-          <p:cNvPr id="6" name="Text 1"/>
-          <p:cNvSpPr txBox="1"/>
-          <p:nvPr/>
-        </p:nvSpPr>
-        <p:spPr>
-          <a:xfrm>
-            <a:off x="457200" y="2377440"/>
-            <a:ext cx="8229600" cy="228600"/>
-          </a:xfrm>
-          <a:prstGeom prst="rect">
-            <a:avLst/>
-          </a:prstGeom>
-          <a:noFill/>
-          <a:ln/>
-        </p:spPr>
-        <p:txBody>
-          <a:bodyPr wrap="square" lIns="0" tIns="0" rIns="0" bIns="0" rtlCol="0" anchor="ctr"/>
-          <a:lstStyle/>
-          <a:p>
-            <a:pPr indent="0" marL="0">
-              <a:buNone/>
-            </a:pPr>
-            <a:r>
-              <a:rPr lang="en-US" sz="1000" i="1" dirty="0">
-                <a:solidFill>
-                  <a:schemeClr val="accent1"/>
-                </a:solidFill>
-              </a:rPr>
-              <a:t>Демо-прогон без LLM: проверка обвязки эвала. Итоговые цифры — после прогона с моделями OpenRouter</a:t>
-            </a:r>
-            <a:endParaRPr lang="en-US" sz="1000" dirty="0"/>
-          </a:p>
-        </p:txBody>
-      </p:sp>
       <p:sp>
         <p:nvSpPr>
           <p:cNvPr id="25" name="Slide Number Placeholder 0"/>
@@ -5750,7 +6216,7 @@
                   <a:schemeClr val="accent1"/>
                 </a:solidFill>
               </a:rPr>
-              <a:t>−69%</a:t>
+              <a:t>−63%</a:t>
             </a:r>
             <a:endParaRPr lang="en-US" sz="4000" dirty="0"/>
           </a:p>
@@ -5786,7 +6252,7 @@
                   <a:schemeClr val="tx1"/>
                 </a:solidFill>
               </a:rPr>
-              <a:t>токенов на запрос после сжатия контекста (v1 → v2)</a:t>
+              <a:t>токенов на запрос: сжатие контекста (v1 → v3)</a:t>
             </a:r>
             <a:endParaRPr lang="en-US" sz="1200" dirty="0"/>
           </a:p>
@@ -5849,7 +6315,7 @@
                   <a:schemeClr val="accent1"/>
                 </a:solidFill>
               </a:rPr>
-              <a:t>+0.00</a:t>
+              <a:t>43 → 100%</a:t>
             </a:r>
             <a:endParaRPr lang="en-US" sz="4000" dirty="0"/>
           </a:p>
@@ -5885,7 +6351,7 @@
                   <a:schemeClr val="tx1"/>
                 </a:solidFill>
               </a:rPr>
-              <a:t>к качеству за счёт сверки и цикла исправлений (v1 → v2)</a:t>
+              <a:t>планов сходятся со всеми проверками</a:t>
             </a:r>
             <a:endParaRPr lang="en-US" sz="1200" dirty="0"/>
           </a:p>
@@ -5948,7 +6414,7 @@
                   <a:schemeClr val="accent1"/>
                 </a:solidFill>
               </a:rPr>
-              <a:t>—</a:t>
+              <a:t>$0.005</a:t>
             </a:r>
             <a:endParaRPr lang="en-US" sz="4000" dirty="0"/>
           </a:p>
@@ -5984,7 +6450,7 @@
                   <a:schemeClr val="tx1"/>
                 </a:solidFill>
               </a:rPr>
-              <a:t>качество v3 на лёгкой модели</a:t>
+              <a:t>за запрос на DeepSeek V4.1 Flash</a:t>
             </a:r>
             <a:endParaRPr lang="en-US" sz="1200" dirty="0"/>
           </a:p>
@@ -6060,7 +6526,7 @@
                   <a:schemeClr val="tx1"/>
                 </a:solidFill>
               </a:rPr>
-              <a:t>Валидатор ловит то, что модель «забыла»: выходной день музея, закат, последний рейс</a:t>
+              <a:t>Эвал нашёл 3 бага агента: обрезанный план, days строкой, зацикливание на невыполнимом запросе — исправлены в v3</a:t>
             </a:r>
             <a:endParaRPr lang="en-US" sz="1300" dirty="0"/>
           </a:p>
@@ -8820,7 +9286,7 @@
                 <a:ea typeface="Calibri" pitchFamily="34" charset="-122"/>
                 <a:cs typeface="Calibri" pitchFamily="34" charset="-120"/>
               </a:rPr>
-              <a:t>Амба сверит план с погодой, расписаниями и заправками — а грамоту можно взять с собой</a:t>
+              <a:t>Амба сверит план с погодой, расписаниями и заправками — а готовый план можно сохранить в PDF</a:t>
             </a:r>
             <a:endParaRPr lang="en-US" sz="1600" dirty="0"/>
           </a:p>
@@ -8883,7 +9349,7 @@
                 <a:ea typeface="Arial" pitchFamily="34" charset="-122"/>
                 <a:cs typeface="Arial" pitchFamily="34" charset="-120"/>
               </a:rPr>
-              <a:t>Писано тигрёнкомъ Амбою лѣта 7535</a:t>
+              <a:t>Хорошей дороги!</a:t>
             </a:r>
             <a:endParaRPr lang="en-US" sz="1200" dirty="0"/>
           </a:p>

--- a/presentation/Amba_Travel_AI.pptx
+++ b/presentation/Amba_Travel_AI.pptx
@@ -121,18 +121,18 @@
   <p:extLst>
     <p:ext uri="{521415D9-36F7-43E2-AB2F-B90AF26B5E84}">
       <p14:sectionLst xmlns:p14="http://schemas.microsoft.com/office/powerpoint/2010/main">
-        <p14:section name="Начало" id="{55f83ce5-2c8c-0d70-bc69-07f9a223233c}">
+        <p14:section name="Начало" id="{cd4e261f-ee8e-5653-065d-2542f687d38c}">
           <p14:sldIdLst>
             <p14:sldId id="256"/>
           </p14:sldIdLst>
         </p14:section>
-        <p14:section name="Задача" id="{799d44a9-d8c1-e278-987e-670d39e1f5d9}">
+        <p14:section name="Задача" id="{da4cd4c1-ce68-30c5-311f-b5f072e72015}">
           <p14:sldIdLst>
             <p14:sldId id="257"/>
             <p14:sldId id="258"/>
           </p14:sldIdLst>
         </p14:section>
-        <p14:section name="Решение" id="{b2829937-d3a1-f9a6-ea09-bf5878568194}">
+        <p14:section name="Решение" id="{6a2d136d-300a-fed9-272f-b4d6f9c1253b}">
           <p14:sldIdLst>
             <p14:sldId id="259"/>
             <p14:sldId id="260"/>
@@ -142,19 +142,19 @@
             <p14:sldId id="264"/>
           </p14:sldIdLst>
         </p14:section>
-        <p14:section name="Замеры" id="{f16670f8-69df-c3b5-a63c-b4b78f7c6fd8}">
+        <p14:section name="Замеры" id="{74768c1c-0b3d-199e-622d-dfd242cc9162}">
           <p14:sldIdLst>
             <p14:sldId id="265"/>
             <p14:sldId id="266"/>
             <p14:sldId id="267"/>
           </p14:sldIdLst>
         </p14:section>
-        <p14:section name="Команда" id="{ced8fad4-d6ba-eaff-7fb7-bc38dcac5155}">
+        <p14:section name="Команда" id="{8c5e2ea5-95d4-7c02-4e15-572ad56a4805}">
           <p14:sldIdLst>
             <p14:sldId id="268"/>
           </p14:sldIdLst>
         </p14:section>
-        <p14:section name="Итоги" id="{24763dff-eef9-df12-c23c-cef3725aae67}">
+        <p14:section name="Итоги" id="{709635d0-98e4-b71e-1d37-b0e8afd13c24}">
           <p14:sldIdLst>
             <p14:sldId id="269"/>
             <p14:sldId id="270"/>
@@ -1896,7 +1896,7 @@
           <a:p>
             <a:r>
               <a:rPr lang="en-US" dirty="0"/>
-              <a:t>Демо: запрос «на 3 дня на машине в Хасанский район». Сверху то, что агент понял из запроса, статус сверки, дни таймлайном, справа карта и живые шаги агента. Одной кнопкой тот же план превращается в старорусскую грамоту.</a:t>
+              <a:t>Демо: запрос «на 3 дня на машине в Хасанский район». Сверху то, что агент понял из запроса, статус сверки, дни таймлайном, справа карта и живые шаги агента. У каждого пункта ссылки, чтобы сразу всё оформить. Одной кнопкой план переключается в морской «Бортовой журнал».</a:t>
             </a:r>
             <a:endParaRPr lang="en-US" dirty="0"/>
           </a:p>
@@ -12131,7 +12131,7 @@
       </p:pic>
       <p:pic>
         <p:nvPicPr>
-          <p:cNvPr id="4" name="manuscript.png" descr="preencoded.png">    </p:cNvPr>
+          <p:cNvPr id="4" name="logbook.png" descr="preencoded.png">    </p:cNvPr>
           <p:cNvPicPr>
             <a:picLocks noChangeAspect="1"/>
           </p:cNvPicPr>
@@ -12183,7 +12183,7 @@
                   <a:schemeClr val="accent1"/>
                 </a:solidFill>
               </a:rPr>
-              <a:t>Режим «Грамота»</a:t>
+              <a:t>Вид «Бортовой журнал»</a:t>
             </a:r>
             <a:endParaRPr lang="en-US" sz="1400" dirty="0"/>
           </a:p>
@@ -12219,7 +12219,7 @@
                   <a:schemeClr val="tx1"/>
                 </a:solidFill>
               </a:rPr>
-              <a:t>Тот же план в виде старорусской рукописи: буквица, ѣ и ъ, цифирь с титлом, печать «Свѣрено». Переключается одной кнопкой</a:t>
+              <a:t>Тот же план в морском стиле: компас, координаты точек, отметка «Маршрут проверен». Переключается одной кнопкой</a:t>
             </a:r>
             <a:endParaRPr lang="en-US" sz="1100" dirty="0"/>
           </a:p>
@@ -12255,7 +12255,7 @@
                   <a:schemeClr val="accent6"/>
                 </a:solidFill>
               </a:rPr>
-              <a:t>Слева — обычный вид: интенты из запроса, статус сверки, дни таймлайном, карта и шаги агента вживую</a:t>
+              <a:t>У каждого пункта ссылки: карта, сайт кафе, расписание и билеты, гостиницы рядом</a:t>
             </a:r>
             <a:endParaRPr lang="en-US" sz="1000" dirty="0"/>
           </a:p>
@@ -13002,7 +13002,7 @@
       </p:sp>
       <p:sp>
         <p:nvSpPr>
-          <p:cNvPr id="21" name="9 тулов"/>
+          <p:cNvPr id="21" name="10 тулов"/>
           <p:cNvSpPr/>
           <p:nvPr/>
         </p:nvSpPr>
@@ -13057,7 +13057,7 @@
                   <a:schemeClr val="tx1"/>
                 </a:solidFill>
               </a:rPr>
-              <a:t>9 тулов</a:t>
+              <a:t>10 тулов</a:t>
             </a:r>
             <a:endParaRPr lang="en-US" sz="1400" dirty="0"/>
           </a:p>
@@ -13093,7 +13093,7 @@
                   <a:schemeClr val="tx1"/>
                 </a:solidFill>
               </a:rPr>
-              <a:t>Реальные API: Open-Meteo, OSRM, Nominatim, Overpass, Википедия</a:t>
+              <a:t>Реальные API: Open-Meteo, OSRM, Nominatim (места и кафе), Overpass, Википедия</a:t>
             </a:r>
             <a:endParaRPr lang="en-US" sz="1100" dirty="0"/>
           </a:p>
@@ -13107,7 +13107,7 @@
                   <a:schemeClr val="tx1"/>
                 </a:solidFill>
               </a:rPr>
-              <a:t>Офлайн: места и часы работы, жильё, расписания, события</a:t>
+              <a:t>Офлайн: часы работы, жильё, расписания, события</a:t>
             </a:r>
             <a:endParaRPr lang="en-US" sz="1100" dirty="0"/>
           </a:p>
@@ -14595,7 +14595,7 @@
                 <a:gridCol w="2880360"/>
                 <a:gridCol w="1234440"/>
               </a:tblGrid>
-              <a:tr h="329184">
+              <a:tr h="301752">
                 <a:tc>
                   <a:txBody>
                     <a:bodyPr/>
@@ -14780,7 +14780,7 @@
                   </a:tcPr>
                 </a:tc>
               </a:tr>
-              <a:tr h="329184">
+              <a:tr h="301752">
                 <a:tc>
                   <a:txBody>
                     <a:bodyPr/>
@@ -14972,7 +14972,7 @@
                   </a:tcPr>
                 </a:tc>
               </a:tr>
-              <a:tr h="329184">
+              <a:tr h="301752">
                 <a:tc>
                   <a:txBody>
                     <a:bodyPr/>
@@ -15164,7 +15164,7 @@
                   </a:tcPr>
                 </a:tc>
               </a:tr>
-              <a:tr h="329184">
+              <a:tr h="301752">
                 <a:tc>
                   <a:txBody>
                     <a:bodyPr/>
@@ -15356,7 +15356,199 @@
                   </a:tcPr>
                 </a:tc>
               </a:tr>
-              <a:tr h="329184">
+              <a:tr h="301752">
+                <a:tc>
+                  <a:txBody>
+                    <a:bodyPr/>
+                    <a:lstStyle/>
+                    <a:p>
+                      <a:pPr indent="0" marL="0">
+                        <a:buNone/>
+                      </a:pPr>
+                      <a:r>
+                        <a:rPr lang="en-US" sz="1100" dirty="0">
+                          <a:solidFill>
+                            <a:srgbClr val="0F2D3A"/>
+                          </a:solidFill>
+                          <a:latin typeface="Courier New" pitchFamily="34" charset="0"/>
+                          <a:ea typeface="Courier New" pitchFamily="34" charset="-122"/>
+                          <a:cs typeface="Courier New" pitchFamily="34" charset="-120"/>
+                        </a:rPr>
+                        <a:t>find_food</a:t>
+                      </a:r>
+                      <a:endParaRPr lang="en-US" sz="1100" dirty="0">
+                        <a:latin typeface="Courier New" charset="0"/>
+                        <a:ea typeface="Courier New" charset="0"/>
+                        <a:cs typeface="Courier New" charset="0"/>
+                      </a:endParaRPr>
+                    </a:p>
+                  </a:txBody>
+                  <a:tcPr marL="54864" marR="54864" marT="54864" marB="54864" anchor="ctr">
+                    <a:lnL w="6350" cap="flat" cmpd="sng" algn="ctr">
+                      <a:solidFill>
+                        <a:srgbClr val="D5E0E3"/>
+                      </a:solidFill>
+                      <a:prstDash val="solid"/>
+                      <a:round/>
+                      <a:headEnd type="none" w="med" len="med"/>
+                      <a:tailEnd type="none" w="med" len="med"/>
+                    </a:lnL>
+                    <a:lnR w="6350" cap="flat" cmpd="sng" algn="ctr">
+                      <a:solidFill>
+                        <a:srgbClr val="D5E0E3"/>
+                      </a:solidFill>
+                      <a:prstDash val="solid"/>
+                      <a:round/>
+                      <a:headEnd type="none" w="med" len="med"/>
+                      <a:tailEnd type="none" w="med" len="med"/>
+                    </a:lnR>
+                    <a:lnT w="6350" cap="flat" cmpd="sng" algn="ctr">
+                      <a:solidFill>
+                        <a:srgbClr val="D5E0E3"/>
+                      </a:solidFill>
+                      <a:prstDash val="solid"/>
+                      <a:round/>
+                      <a:headEnd type="none" w="med" len="med"/>
+                      <a:tailEnd type="none" w="med" len="med"/>
+                    </a:lnT>
+                    <a:lnB w="6350" cap="flat" cmpd="sng" algn="ctr">
+                      <a:solidFill>
+                        <a:srgbClr val="D5E0E3"/>
+                      </a:solidFill>
+                      <a:prstDash val="solid"/>
+                      <a:round/>
+                      <a:headEnd type="none" w="med" len="med"/>
+                      <a:tailEnd type="none" w="med" len="med"/>
+                    </a:lnB>
+                    <a:solidFill>
+                      <a:srgbClr val="FFFFFF"/>
+                    </a:solidFill>
+                  </a:tcPr>
+                </a:tc>
+                <a:tc>
+                  <a:txBody>
+                    <a:bodyPr/>
+                    <a:lstStyle/>
+                    <a:p>
+                      <a:pPr indent="0" marL="0">
+                        <a:buNone/>
+                      </a:pPr>
+                      <a:r>
+                        <a:rPr lang="en-US" sz="1200" dirty="0">
+                          <a:solidFill>
+                            <a:srgbClr val="0F2D3A"/>
+                          </a:solidFill>
+                        </a:rPr>
+                        <a:t>Nominatim (OSM): кафе, кухня, сайт</a:t>
+                      </a:r>
+                      <a:endParaRPr lang="en-US" sz="1200" dirty="0"/>
+                    </a:p>
+                  </a:txBody>
+                  <a:tcPr marL="54864" marR="54864" marT="54864" marB="54864" anchor="ctr">
+                    <a:lnL w="6350" cap="flat" cmpd="sng" algn="ctr">
+                      <a:solidFill>
+                        <a:srgbClr val="D5E0E3"/>
+                      </a:solidFill>
+                      <a:prstDash val="solid"/>
+                      <a:round/>
+                      <a:headEnd type="none" w="med" len="med"/>
+                      <a:tailEnd type="none" w="med" len="med"/>
+                    </a:lnL>
+                    <a:lnR w="6350" cap="flat" cmpd="sng" algn="ctr">
+                      <a:solidFill>
+                        <a:srgbClr val="D5E0E3"/>
+                      </a:solidFill>
+                      <a:prstDash val="solid"/>
+                      <a:round/>
+                      <a:headEnd type="none" w="med" len="med"/>
+                      <a:tailEnd type="none" w="med" len="med"/>
+                    </a:lnR>
+                    <a:lnT w="6350" cap="flat" cmpd="sng" algn="ctr">
+                      <a:solidFill>
+                        <a:srgbClr val="D5E0E3"/>
+                      </a:solidFill>
+                      <a:prstDash val="solid"/>
+                      <a:round/>
+                      <a:headEnd type="none" w="med" len="med"/>
+                      <a:tailEnd type="none" w="med" len="med"/>
+                    </a:lnT>
+                    <a:lnB w="6350" cap="flat" cmpd="sng" algn="ctr">
+                      <a:solidFill>
+                        <a:srgbClr val="D5E0E3"/>
+                      </a:solidFill>
+                      <a:prstDash val="solid"/>
+                      <a:round/>
+                      <a:headEnd type="none" w="med" len="med"/>
+                      <a:tailEnd type="none" w="med" len="med"/>
+                    </a:lnB>
+                    <a:solidFill>
+                      <a:srgbClr val="FFFFFF"/>
+                    </a:solidFill>
+                  </a:tcPr>
+                </a:tc>
+                <a:tc>
+                  <a:txBody>
+                    <a:bodyPr/>
+                    <a:lstStyle/>
+                    <a:p>
+                      <a:pPr indent="0" marL="0">
+                        <a:buNone/>
+                      </a:pPr>
+                      <a:r>
+                        <a:rPr lang="en-US" sz="1200" b="1" dirty="0">
+                          <a:solidFill>
+                            <a:srgbClr val="2E6B62"/>
+                          </a:solidFill>
+                        </a:rPr>
+                        <a:t>реальный</a:t>
+                      </a:r>
+                      <a:endParaRPr lang="en-US" sz="1200" dirty="0"/>
+                    </a:p>
+                  </a:txBody>
+                  <a:tcPr marL="54864" marR="54864" marT="54864" marB="54864" anchor="ctr">
+                    <a:lnL w="6350" cap="flat" cmpd="sng" algn="ctr">
+                      <a:solidFill>
+                        <a:srgbClr val="D5E0E3"/>
+                      </a:solidFill>
+                      <a:prstDash val="solid"/>
+                      <a:round/>
+                      <a:headEnd type="none" w="med" len="med"/>
+                      <a:tailEnd type="none" w="med" len="med"/>
+                    </a:lnL>
+                    <a:lnR w="6350" cap="flat" cmpd="sng" algn="ctr">
+                      <a:solidFill>
+                        <a:srgbClr val="D5E0E3"/>
+                      </a:solidFill>
+                      <a:prstDash val="solid"/>
+                      <a:round/>
+                      <a:headEnd type="none" w="med" len="med"/>
+                      <a:tailEnd type="none" w="med" len="med"/>
+                    </a:lnR>
+                    <a:lnT w="6350" cap="flat" cmpd="sng" algn="ctr">
+                      <a:solidFill>
+                        <a:srgbClr val="D5E0E3"/>
+                      </a:solidFill>
+                      <a:prstDash val="solid"/>
+                      <a:round/>
+                      <a:headEnd type="none" w="med" len="med"/>
+                      <a:tailEnd type="none" w="med" len="med"/>
+                    </a:lnT>
+                    <a:lnB w="6350" cap="flat" cmpd="sng" algn="ctr">
+                      <a:solidFill>
+                        <a:srgbClr val="D5E0E3"/>
+                      </a:solidFill>
+                      <a:prstDash val="solid"/>
+                      <a:round/>
+                      <a:headEnd type="none" w="med" len="med"/>
+                      <a:tailEnd type="none" w="med" len="med"/>
+                    </a:lnB>
+                    <a:solidFill>
+                      <a:srgbClr val="FFFFFF"/>
+                    </a:solidFill>
+                  </a:tcPr>
+                </a:tc>
+              </a:tr>
+              <a:tr h="301752">
                 <a:tc>
                   <a:txBody>
                     <a:bodyPr/>
@@ -15421,7 +15613,7 @@
                       <a:tailEnd type="none" w="med" len="med"/>
                     </a:lnB>
                     <a:solidFill>
-                      <a:srgbClr val="FFFFFF"/>
+                      <a:srgbClr val="F3F6F7"/>
                     </a:solidFill>
                   </a:tcPr>
                 </a:tc>
@@ -15482,7 +15674,7 @@
                       <a:tailEnd type="none" w="med" len="med"/>
                     </a:lnB>
                     <a:solidFill>
-                      <a:srgbClr val="FFFFFF"/>
+                      <a:srgbClr val="F3F6F7"/>
                     </a:solidFill>
                   </a:tcPr>
                 </a:tc>
@@ -15543,12 +15735,12 @@
                       <a:tailEnd type="none" w="med" len="med"/>
                     </a:lnB>
                     <a:solidFill>
-                      <a:srgbClr val="FFFFFF"/>
+                      <a:srgbClr val="F3F6F7"/>
                     </a:solidFill>
                   </a:tcPr>
                 </a:tc>
               </a:tr>
-              <a:tr h="329184">
+              <a:tr h="301752">
                 <a:tc>
                   <a:txBody>
                     <a:bodyPr/>
@@ -15613,7 +15805,7 @@
                       <a:tailEnd type="none" w="med" len="med"/>
                     </a:lnB>
                     <a:solidFill>
-                      <a:srgbClr val="F3F6F7"/>
+                      <a:srgbClr val="FFFFFF"/>
                     </a:solidFill>
                   </a:tcPr>
                 </a:tc>
@@ -15674,7 +15866,7 @@
                       <a:tailEnd type="none" w="med" len="med"/>
                     </a:lnB>
                     <a:solidFill>
-                      <a:srgbClr val="F3F6F7"/>
+                      <a:srgbClr val="FFFFFF"/>
                     </a:solidFill>
                   </a:tcPr>
                 </a:tc>
@@ -15735,12 +15927,12 @@
                       <a:tailEnd type="none" w="med" len="med"/>
                     </a:lnB>
                     <a:solidFill>
-                      <a:srgbClr val="F3F6F7"/>
+                      <a:srgbClr val="FFFFFF"/>
                     </a:solidFill>
                   </a:tcPr>
                 </a:tc>
               </a:tr>
-              <a:tr h="329184">
+              <a:tr h="301752">
                 <a:tc>
                   <a:txBody>
                     <a:bodyPr/>
@@ -15805,7 +15997,7 @@
                       <a:tailEnd type="none" w="med" len="med"/>
                     </a:lnB>
                     <a:solidFill>
-                      <a:srgbClr val="FFFFFF"/>
+                      <a:srgbClr val="F3F6F7"/>
                     </a:solidFill>
                   </a:tcPr>
                 </a:tc>
@@ -15866,7 +16058,7 @@
                       <a:tailEnd type="none" w="med" len="med"/>
                     </a:lnB>
                     <a:solidFill>
-                      <a:srgbClr val="FFFFFF"/>
+                      <a:srgbClr val="F3F6F7"/>
                     </a:solidFill>
                   </a:tcPr>
                 </a:tc>
@@ -15927,12 +16119,12 @@
                       <a:tailEnd type="none" w="med" len="med"/>
                     </a:lnB>
                     <a:solidFill>
-                      <a:srgbClr val="FFFFFF"/>
+                      <a:srgbClr val="F3F6F7"/>
                     </a:solidFill>
                   </a:tcPr>
                 </a:tc>
               </a:tr>
-              <a:tr h="329184">
+              <a:tr h="301752">
                 <a:tc>
                   <a:txBody>
                     <a:bodyPr/>
@@ -15997,7 +16189,7 @@
                       <a:tailEnd type="none" w="med" len="med"/>
                     </a:lnB>
                     <a:solidFill>
-                      <a:srgbClr val="F3F6F7"/>
+                      <a:srgbClr val="FFFFFF"/>
                     </a:solidFill>
                   </a:tcPr>
                 </a:tc>
@@ -16058,7 +16250,7 @@
                       <a:tailEnd type="none" w="med" len="med"/>
                     </a:lnB>
                     <a:solidFill>
-                      <a:srgbClr val="F3F6F7"/>
+                      <a:srgbClr val="FFFFFF"/>
                     </a:solidFill>
                   </a:tcPr>
                 </a:tc>
@@ -16119,12 +16311,12 @@
                       <a:tailEnd type="none" w="med" len="med"/>
                     </a:lnB>
                     <a:solidFill>
-                      <a:srgbClr val="F3F6F7"/>
+                      <a:srgbClr val="FFFFFF"/>
                     </a:solidFill>
                   </a:tcPr>
                 </a:tc>
               </a:tr>
-              <a:tr h="329184">
+              <a:tr h="301752">
                 <a:tc>
                   <a:txBody>
                     <a:bodyPr/>
@@ -16189,7 +16381,7 @@
                       <a:tailEnd type="none" w="med" len="med"/>
                     </a:lnB>
                     <a:solidFill>
-                      <a:srgbClr val="FFFFFF"/>
+                      <a:srgbClr val="F3F6F7"/>
                     </a:solidFill>
                   </a:tcPr>
                 </a:tc>
@@ -16250,7 +16442,7 @@
                       <a:tailEnd type="none" w="med" len="med"/>
                     </a:lnB>
                     <a:solidFill>
-                      <a:srgbClr val="FFFFFF"/>
+                      <a:srgbClr val="F3F6F7"/>
                     </a:solidFill>
                   </a:tcPr>
                 </a:tc>
@@ -16311,12 +16503,12 @@
                       <a:tailEnd type="none" w="med" len="med"/>
                     </a:lnB>
                     <a:solidFill>
-                      <a:srgbClr val="FFFFFF"/>
+                      <a:srgbClr val="F3F6F7"/>
                     </a:solidFill>
                   </a:tcPr>
                 </a:tc>
               </a:tr>
-              <a:tr h="329184">
+              <a:tr h="301752">
                 <a:tc>
                   <a:txBody>
                     <a:bodyPr/>
@@ -16381,7 +16573,7 @@
                       <a:tailEnd type="none" w="med" len="med"/>
                     </a:lnB>
                     <a:solidFill>
-                      <a:srgbClr val="F3F6F7"/>
+                      <a:srgbClr val="FFFFFF"/>
                     </a:solidFill>
                   </a:tcPr>
                 </a:tc>
@@ -16442,7 +16634,7 @@
                       <a:tailEnd type="none" w="med" len="med"/>
                     </a:lnB>
                     <a:solidFill>
-                      <a:srgbClr val="F3F6F7"/>
+                      <a:srgbClr val="FFFFFF"/>
                     </a:solidFill>
                   </a:tcPr>
                 </a:tc>
@@ -16503,7 +16695,7 @@
                       <a:tailEnd type="none" w="med" len="med"/>
                     </a:lnB>
                     <a:solidFill>
-                      <a:srgbClr val="F3F6F7"/>
+                      <a:srgbClr val="FFFFFF"/>
                     </a:solidFill>
                   </a:tcPr>
                 </a:tc>

--- a/presentation/Amba_Travel_AI.pptx
+++ b/presentation/Amba_Travel_AI.pptx
@@ -118,18 +118,18 @@
   <p:extLst>
     <p:ext uri="{521415D9-36F7-43E2-AB2F-B90AF26B5E84}">
       <p14:sectionLst xmlns:p14="http://schemas.microsoft.com/office/powerpoint/2010/main">
-        <p14:section name="Начало" id="{72c25d14-9d06-3b07-c245-1d5383509611}">
+        <p14:section name="Начало" id="{68b9d785-0606-c10d-9fad-f31553f473be}">
           <p14:sldIdLst>
             <p14:sldId id="256"/>
           </p14:sldIdLst>
         </p14:section>
-        <p14:section name="Задача" id="{cd108198-0f5d-f42d-f141-e2d8a7cec34f}">
+        <p14:section name="Задача" id="{b0b1bade-1c7e-7c8b-dcf5-48dd068d6941}">
           <p14:sldIdLst>
             <p14:sldId id="257"/>
             <p14:sldId id="258"/>
           </p14:sldIdLst>
         </p14:section>
-        <p14:section name="Решение" id="{3f7c07b1-0769-8b31-75cb-9d0502ec3f0a}">
+        <p14:section name="Решение" id="{0ae5ad04-9cb5-b8c8-b329-6efbf0f5d369}">
           <p14:sldIdLst>
             <p14:sldId id="259"/>
             <p14:sldId id="260"/>
@@ -137,18 +137,18 @@
             <p14:sldId id="262"/>
           </p14:sldIdLst>
         </p14:section>
-        <p14:section name="Замеры" id="{510fa9e0-358e-772c-c6d0-67e8f144319c}">
+        <p14:section name="Замеры" id="{d1f19482-9be7-5e8d-a97a-41b4d2c34962}">
           <p14:sldIdLst>
             <p14:sldId id="263"/>
             <p14:sldId id="264"/>
           </p14:sldIdLst>
         </p14:section>
-        <p14:section name="Команда" id="{f60041b7-69b4-049a-84e0-36f46f39b9c1}">
+        <p14:section name="Команда" id="{9fcbecf6-56c2-d7c2-f042-35405b3c6317}">
           <p14:sldIdLst>
             <p14:sldId id="265"/>
           </p14:sldIdLst>
         </p14:section>
-        <p14:section name="Итоги" id="{440d3599-b774-37cc-f57d-d9cce8639bfe}">
+        <p14:section name="Итоги" id="{55186cd4-f36f-f7e8-d150-45af7da119c3}">
           <p14:sldIdLst>
             <p14:sldId id="266"/>
             <p14:sldId id="267"/>

--- a/presentation/Amba_Travel_AI.pptx
+++ b/presentation/Amba_Travel_AI.pptx
@@ -118,18 +118,18 @@
   <p:extLst>
     <p:ext uri="{521415D9-36F7-43E2-AB2F-B90AF26B5E84}">
       <p14:sectionLst xmlns:p14="http://schemas.microsoft.com/office/powerpoint/2010/main">
-        <p14:section name="Начало" id="{68b9d785-0606-c10d-9fad-f31553f473be}">
+        <p14:section name="Начало" id="{a53a9f18-68cf-11c8-128c-2d5dc4fce491}">
           <p14:sldIdLst>
             <p14:sldId id="256"/>
           </p14:sldIdLst>
         </p14:section>
-        <p14:section name="Задача" id="{b0b1bade-1c7e-7c8b-dcf5-48dd068d6941}">
+        <p14:section name="Задача" id="{ad494c9a-0b08-322d-a968-917bdaf5b72b}">
           <p14:sldIdLst>
             <p14:sldId id="257"/>
             <p14:sldId id="258"/>
           </p14:sldIdLst>
         </p14:section>
-        <p14:section name="Решение" id="{0ae5ad04-9cb5-b8c8-b329-6efbf0f5d369}">
+        <p14:section name="Решение" id="{bbbad43e-4ae3-41f7-296c-59b297608eb3}">
           <p14:sldIdLst>
             <p14:sldId id="259"/>
             <p14:sldId id="260"/>
@@ -137,18 +137,18 @@
             <p14:sldId id="262"/>
           </p14:sldIdLst>
         </p14:section>
-        <p14:section name="Замеры" id="{d1f19482-9be7-5e8d-a97a-41b4d2c34962}">
+        <p14:section name="Замеры" id="{00b71219-c60c-8af1-4a48-0d856c412d84}">
           <p14:sldIdLst>
             <p14:sldId id="263"/>
             <p14:sldId id="264"/>
           </p14:sldIdLst>
         </p14:section>
-        <p14:section name="Команда" id="{9fcbecf6-56c2-d7c2-f042-35405b3c6317}">
+        <p14:section name="Команда" id="{6d2d6cd0-06f0-eaa3-f34d-06c53afddf45}">
           <p14:sldIdLst>
             <p14:sldId id="265"/>
           </p14:sldIdLst>
         </p14:section>
-        <p14:section name="Итоги" id="{55186cd4-f36f-f7e8-d150-45af7da119c3}">
+        <p14:section name="Итоги" id="{9b0c520e-3fc8-6d14-cc7c-dc1b8a6808ce}">
           <p14:sldIdLst>
             <p14:sldId id="266"/>
             <p14:sldId id="267"/>

--- a/presentation/Amba_Travel_AI.pptx
+++ b/presentation/Amba_Travel_AI.pptx
@@ -118,18 +118,18 @@
   <p:extLst>
     <p:ext uri="{521415D9-36F7-43E2-AB2F-B90AF26B5E84}">
       <p14:sectionLst xmlns:p14="http://schemas.microsoft.com/office/powerpoint/2010/main">
-        <p14:section name="Начало" id="{a53a9f18-68cf-11c8-128c-2d5dc4fce491}">
+        <p14:section name="Начало" id="{2e90688d-574c-18c0-79dd-45628652b439}">
           <p14:sldIdLst>
             <p14:sldId id="256"/>
           </p14:sldIdLst>
         </p14:section>
-        <p14:section name="Задача" id="{ad494c9a-0b08-322d-a968-917bdaf5b72b}">
+        <p14:section name="Задача" id="{83777072-8378-e08e-7a9d-0c7b8e96fba5}">
           <p14:sldIdLst>
             <p14:sldId id="257"/>
             <p14:sldId id="258"/>
           </p14:sldIdLst>
         </p14:section>
-        <p14:section name="Решение" id="{bbbad43e-4ae3-41f7-296c-59b297608eb3}">
+        <p14:section name="Решение" id="{7ef3efa7-aada-c695-797a-4223646397ad}">
           <p14:sldIdLst>
             <p14:sldId id="259"/>
             <p14:sldId id="260"/>
@@ -137,18 +137,18 @@
             <p14:sldId id="262"/>
           </p14:sldIdLst>
         </p14:section>
-        <p14:section name="Замеры" id="{00b71219-c60c-8af1-4a48-0d856c412d84}">
+        <p14:section name="Замеры" id="{f3afaca9-cc39-5655-e42e-77669cd040db}">
           <p14:sldIdLst>
             <p14:sldId id="263"/>
             <p14:sldId id="264"/>
           </p14:sldIdLst>
         </p14:section>
-        <p14:section name="Команда" id="{6d2d6cd0-06f0-eaa3-f34d-06c53afddf45}">
+        <p14:section name="Команда" id="{45f56791-773a-fbd1-c6a7-7c3fa142a50b}">
           <p14:sldIdLst>
             <p14:sldId id="265"/>
           </p14:sldIdLst>
         </p14:section>
-        <p14:section name="Итоги" id="{9b0c520e-3fc8-6d14-cc7c-dc1b8a6808ce}">
+        <p14:section name="Итоги" id="{75cf3900-1107-f23d-5739-fb1fcda29088}">
           <p14:sldIdLst>
             <p14:sldId id="266"/>
             <p14:sldId id="267"/>

--- a/presentation/Amba_Travel_AI.pptx
+++ b/presentation/Amba_Travel_AI.pptx
@@ -118,18 +118,18 @@
   <p:extLst>
     <p:ext uri="{521415D9-36F7-43E2-AB2F-B90AF26B5E84}">
       <p14:sectionLst xmlns:p14="http://schemas.microsoft.com/office/powerpoint/2010/main">
-        <p14:section name="Начало" id="{2e90688d-574c-18c0-79dd-45628652b439}">
+        <p14:section name="Начало" id="{12feb9ea-ce08-8dbc-0b1a-f99d7c0fd7a9}">
           <p14:sldIdLst>
             <p14:sldId id="256"/>
           </p14:sldIdLst>
         </p14:section>
-        <p14:section name="Задача" id="{83777072-8378-e08e-7a9d-0c7b8e96fba5}">
+        <p14:section name="Задача" id="{1632df76-448f-777b-6ad2-e6aa817efe6f}">
           <p14:sldIdLst>
             <p14:sldId id="257"/>
             <p14:sldId id="258"/>
           </p14:sldIdLst>
         </p14:section>
-        <p14:section name="Решение" id="{7ef3efa7-aada-c695-797a-4223646397ad}">
+        <p14:section name="Решение" id="{ccc146b5-cc50-af38-c804-7fb1560e45e8}">
           <p14:sldIdLst>
             <p14:sldId id="259"/>
             <p14:sldId id="260"/>
@@ -137,18 +137,18 @@
             <p14:sldId id="262"/>
           </p14:sldIdLst>
         </p14:section>
-        <p14:section name="Замеры" id="{f3afaca9-cc39-5655-e42e-77669cd040db}">
+        <p14:section name="Замеры" id="{90ded53e-7d4c-b43e-9330-a550e64c15e2}">
           <p14:sldIdLst>
             <p14:sldId id="263"/>
             <p14:sldId id="264"/>
           </p14:sldIdLst>
         </p14:section>
-        <p14:section name="Команда" id="{45f56791-773a-fbd1-c6a7-7c3fa142a50b}">
+        <p14:section name="Команда" id="{7f4173de-a595-2b2e-5fc1-eb1eb47bb7b5}">
           <p14:sldIdLst>
             <p14:sldId id="265"/>
           </p14:sldIdLst>
         </p14:section>
-        <p14:section name="Итоги" id="{75cf3900-1107-f23d-5739-fb1fcda29088}">
+        <p14:section name="Итоги" id="{f9fa4ec0-dbca-15d1-9ec7-9103a86d716f}">
           <p14:sldIdLst>
             <p14:sldId id="266"/>
             <p14:sldId id="267"/>
@@ -1604,7 +1604,7 @@
           <a:p>
             <a:r>
               <a:rPr lang="en-US" dirty="0"/>
-              <a:t>[0:50 · к концу слайда 2:35] Вот как это выглядит. Человек пишет: «на три дня на машине в Хасанский район». Если чего-то не хватает, Амба коротко уточняет, например какую кухню вы любите. Дальше видно, что агент понял из запроса, статус проверки, дни таймлайном и маршрут на карте — по улицам, а не напрямик. Обеды — реальные кафе из OpenStreetMap. У каждого пункта есть ссылки: карта, сайт, расписание и билеты, гостиницы рядом. Демо открыто по ссылке на последнем слайде.</a:t>
+              <a:t>[0:50 · к концу слайда 2:35] Вот как это выглядит. Человек пишет: «на три дня на машине в Хасанский район». Если чего-то не хватает, Амба коротко уточняет, например какую кухню вы любите. Дальше видно, что агент понял из запроса, статус проверки, дни таймлайном и маршрут на карте — по улицам, а не напрямик. Обеды — реальные кафе из OpenStreetMap, у каждого пункта ссылки. А если что-то не понравилось, план можно доработать прямо в чате: «подешевле», «убери музей».</a:t>
             </a:r>
             <a:endParaRPr lang="en-US" dirty="0"/>
           </a:p>
@@ -1692,7 +1692,7 @@
           <a:p>
             <a:r>
               <a:rPr lang="en-US" dirty="0"/>
-              <a:t>[0:50 · к концу слайда 3:25] Это не один промпт, а агентный цикл. Сначала фильтр: всё, что не про Приморье, отклоняется без вызова модели. Если важного не хватает, агент задаёт один-два вопроса. Дальше модель сама выбирает тулы, мы вызываем их параллельно и возвращаем данные, и так по кругу, пока данных не хватит. Готовый план проходит проверку; если есть противоречия, агент их исправляет. Цикл написан с нуля на FastAPI, модель — DeepSeek через OpenRouter.</a:t>
+              <a:t>[0:50 · к концу слайда 3:25] Это не один промпт, а агентный цикл. Сначала фильтр: всё, что не про Приморье, отклоняется без вызова модели. Если важного не хватает, агент задаёт один-два вопроса, а после плана с ним можно продолжить диалог. Дальше модель сама выбирает тулы, мы вызываем их параллельно и возвращаем данные, и так по кругу, пока данных не хватит. Готовый план проходит проверку; если есть противоречия, агент их исправляет. Цикл написан с нуля на FastAPI, модель — DeepSeek через OpenRouter.</a:t>
             </a:r>
             <a:endParaRPr lang="en-US" dirty="0"/>
           </a:p>
@@ -1868,7 +1868,7 @@
           <a:p>
             <a:r>
               <a:rPr lang="en-US" dirty="0"/>
-              <a:t>[0:50 · к концу слайда 4:50] Главное правило задания — план должен сходиться. Проверку делает код, а не модель: для пешехода — не больше двадцати километров и до заката, для велосипеда — не в дождь, для автобуса — рейс реально ходит и вы успеваете на последний, для машины — по пути есть заправки. Плюс сроки, ночёвка, режим работы, погода. И Амба говорит только о Приморье: алгебру, Сочи и «забудь правила» вежливо отклоняет, а поездку из Хабаровска во Владивосток спокойно планирует.</a:t>
+              <a:t>[0:50 · к концу слайда 4:50] Главное правило задания — план должен сходиться. Проверку делает код, а не модель: для пешехода — не больше двадцати километров и до заката, для велосипеда — не в дождь, для автобуса — рейс реально ходит и вы успеваете на последний, для машины — по пути есть заправки. Плюс сроки, ночёвка, режим работы, погода. И Амба говорит только о Приморье: алгебру, Сочи и «забудь правила» вежливо отклоняет. От спама стоят лимиты запросов в Redis.</a:t>
             </a:r>
             <a:endParaRPr lang="en-US" dirty="0"/>
           </a:p>
